--- a/design/malaysia-study-live/말레이시아유학_2편_해외직영캠퍼스.pptx
+++ b/design/malaysia-study-live/말레이시아유학_2편_해외직영캠퍼스.pptx
@@ -11925,7 +11925,7 @@
                           <a:ea typeface="맑은 고딕" pitchFamily="34" charset="-122"/>
                           <a:cs typeface="맑은 고딕" pitchFamily="34" charset="-120"/>
                         </a:rPr>
-                        <a:t>154,080 + MUFY</a:t>
+                        <a:t>171,930 ~ 183,430</a:t>
                       </a:r>
                       <a:endParaRPr lang="en-US" sz="1250" dirty="0">
                         <a:latin typeface="맑은 고딕" charset="0"/>
@@ -11993,7 +11993,7 @@
                           <a:ea typeface="맑은 고딕" pitchFamily="34" charset="-122"/>
                           <a:cs typeface="맑은 고딕" pitchFamily="34" charset="-120"/>
                         </a:rPr>
-                        <a:t>약 5,223만 + α</a:t>
+                        <a:t>약 5,828만 ~ 6,218만</a:t>
                       </a:r>
                       <a:endParaRPr lang="en-US" sz="1250" dirty="0">
                         <a:latin typeface="맑은 고딕" charset="0"/>
@@ -12061,7 +12061,7 @@
                           <a:ea typeface="맑은 고딕" pitchFamily="34" charset="-122"/>
                           <a:cs typeface="맑은 고딕" pitchFamily="34" charset="-120"/>
                         </a:rPr>
-                        <a:t>—</a:t>
+                        <a:t>약 1,512만</a:t>
                       </a:r>
                       <a:endParaRPr lang="en-US" sz="1250" dirty="0">
                         <a:latin typeface="맑은 고딕" charset="0"/>
@@ -12131,7 +12131,7 @@
                           <a:ea typeface="맑은 고딕" pitchFamily="34" charset="-122"/>
                           <a:cs typeface="맑은 고딕" pitchFamily="34" charset="-120"/>
                         </a:rPr>
-                        <a:t>모나쉬 — 공학 (파운데이션 + 4년)</a:t>
+                        <a:t>모나쉬 — MUFY + 공학 4년</a:t>
                       </a:r>
                       <a:endParaRPr lang="en-US" sz="1250" dirty="0">
                         <a:latin typeface="맑은 고딕" charset="0"/>
@@ -12267,7 +12267,7 @@
                           <a:ea typeface="맑은 고딕" pitchFamily="34" charset="-122"/>
                           <a:cs typeface="맑은 고딕" pitchFamily="34" charset="-120"/>
                         </a:rPr>
-                        <a:t>49,440 + 272,640 = 322,080</a:t>
+                        <a:t>290,490 ~ 301,990</a:t>
                       </a:r>
                       <a:endParaRPr lang="en-US" sz="1250" dirty="0">
                         <a:latin typeface="맑은 고딕" charset="0"/>
@@ -12335,7 +12335,7 @@
                           <a:ea typeface="맑은 고딕" pitchFamily="34" charset="-122"/>
                           <a:cs typeface="맑은 고딕" pitchFamily="34" charset="-120"/>
                         </a:rPr>
-                        <a:t>약 1억 918만</a:t>
+                        <a:t>약 9,848만 ~ 1억 237만</a:t>
                       </a:r>
                       <a:endParaRPr lang="en-US" sz="1250" dirty="0">
                         <a:latin typeface="맑은 고딕" charset="0"/>
@@ -12403,7 +12403,7 @@
                           <a:ea typeface="맑은 고딕" pitchFamily="34" charset="-122"/>
                           <a:cs typeface="맑은 고딕" pitchFamily="34" charset="-120"/>
                         </a:rPr>
-                        <a:t>약 2,184만</a:t>
+                        <a:t>약 2,009만</a:t>
                       </a:r>
                       <a:endParaRPr lang="en-US" sz="1250" dirty="0">
                         <a:latin typeface="맑은 고딕" charset="0"/>
@@ -13391,7 +13391,7 @@
                 <a:ea typeface="맑은 고딕" pitchFamily="34" charset="-122"/>
                 <a:cs typeface="맑은 고딕" pitchFamily="34" charset="-120"/>
               </a:rPr>
-              <a:t>※ 학비만 비교한 표입니다. 모나쉬 MUFY 학비는 Monash College 운영이라 이 프로스펙터스에 없습니다.</a:t>
+              <a:t>※ 학비만 비교한 표입니다. MUFY 학비는 선웨이 칼리지 파운데이션 기준(RM 17,850~29,350)을 적용했습니다 · 6% 서비스세 별도.</a:t>
             </a:r>
             <a:endParaRPr lang="en-US" sz="900" dirty="0"/>
           </a:p>
@@ -13869,7 +13869,7 @@
                           <a:ea typeface="맑은 고딕" pitchFamily="34" charset="-122"/>
                           <a:cs typeface="맑은 고딕" pitchFamily="34" charset="-120"/>
                         </a:rPr>
-                        <a:t>모나쉬 공학 5년</a:t>
+                        <a:t>모나쉬 MUFY + 공학 5년</a:t>
                       </a:r>
                       <a:endParaRPr lang="en-US" sz="1200" dirty="0">
                         <a:latin typeface="맑은 고딕" charset="0"/>
@@ -13939,7 +13939,7 @@
                           <a:ea typeface="맑은 고딕" pitchFamily="34" charset="-122"/>
                           <a:cs typeface="맑은 고딕" pitchFamily="34" charset="-120"/>
                         </a:rPr>
-                        <a:t>연간 학비</a:t>
+                        <a:t>1년차 학비 (파운데이션)</a:t>
                       </a:r>
                       <a:endParaRPr lang="en-US" sz="1200" dirty="0">
                         <a:latin typeface="맑은 고딕" charset="0"/>
@@ -14007,7 +14007,7 @@
                           <a:ea typeface="맑은 고딕" pitchFamily="34" charset="-122"/>
                           <a:cs typeface="맑은 고딕" pitchFamily="34" charset="-120"/>
                         </a:rPr>
-                        <a:t>약 1,719만</a:t>
+                        <a:t>DHES 약 1,676만</a:t>
                       </a:r>
                       <a:endParaRPr lang="en-US" sz="1200" dirty="0">
                         <a:latin typeface="맑은 고딕" charset="0"/>
@@ -14075,7 +14075,7 @@
                           <a:ea typeface="맑은 고딕" pitchFamily="34" charset="-122"/>
                           <a:cs typeface="맑은 고딕" pitchFamily="34" charset="-120"/>
                         </a:rPr>
-                        <a:t>약 1,644만</a:t>
+                        <a:t>파운데이션 약 1,288만</a:t>
                       </a:r>
                       <a:endParaRPr lang="en-US" sz="1200" dirty="0">
                         <a:latin typeface="맑은 고딕" charset="0"/>
@@ -14143,7 +14143,7 @@
                           <a:ea typeface="맑은 고딕" pitchFamily="34" charset="-122"/>
                           <a:cs typeface="맑은 고딕" pitchFamily="34" charset="-120"/>
                         </a:rPr>
-                        <a:t>약 2,184만</a:t>
+                        <a:t>MUFY 약 800만</a:t>
                       </a:r>
                       <a:endParaRPr lang="en-US" sz="1200" dirty="0">
                         <a:latin typeface="맑은 고딕" charset="0"/>
@@ -14191,6 +14191,280 @@
                     </a:lnB>
                     <a:solidFill>
                       <a:srgbClr val="FFFFFF"/>
+                    </a:solidFill>
+                  </a:tcPr>
+                </a:tc>
+              </a:tr>
+              <a:tr h="438912">
+                <a:tc>
+                  <a:txBody>
+                    <a:bodyPr/>
+                    <a:lstStyle/>
+                    <a:p>
+                      <a:pPr indent="0" marL="0">
+                        <a:buNone/>
+                      </a:pPr>
+                      <a:r>
+                        <a:rPr lang="en-US" sz="1200" dirty="0">
+                          <a:solidFill>
+                            <a:srgbClr val="1B2426"/>
+                          </a:solidFill>
+                          <a:latin typeface="맑은 고딕" pitchFamily="34" charset="0"/>
+                          <a:ea typeface="맑은 고딕" pitchFamily="34" charset="-122"/>
+                          <a:cs typeface="맑은 고딕" pitchFamily="34" charset="-120"/>
+                        </a:rPr>
+                        <a:t>2년차 이후 학비 (학부)</a:t>
+                      </a:r>
+                      <a:endParaRPr lang="en-US" sz="1200" dirty="0">
+                        <a:latin typeface="맑은 고딕" charset="0"/>
+                        <a:ea typeface="맑은 고딕" charset="0"/>
+                        <a:cs typeface="맑은 고딕" charset="0"/>
+                      </a:endParaRPr>
+                    </a:p>
+                  </a:txBody>
+                  <a:tcPr marL="88900" marR="88900" marT="50800" marB="50800" anchor="ctr">
+                    <a:lnL w="6350" cap="flat" cmpd="sng" algn="ctr">
+                      <a:solidFill>
+                        <a:srgbClr val="DCD6C9"/>
+                      </a:solidFill>
+                      <a:prstDash val="solid"/>
+                      <a:round/>
+                      <a:headEnd type="none" w="med" len="med"/>
+                      <a:tailEnd type="none" w="med" len="med"/>
+                    </a:lnL>
+                    <a:lnR w="6350" cap="flat" cmpd="sng" algn="ctr">
+                      <a:solidFill>
+                        <a:srgbClr val="DCD6C9"/>
+                      </a:solidFill>
+                      <a:prstDash val="solid"/>
+                      <a:round/>
+                      <a:headEnd type="none" w="med" len="med"/>
+                      <a:tailEnd type="none" w="med" len="med"/>
+                    </a:lnR>
+                    <a:lnT w="6350" cap="flat" cmpd="sng" algn="ctr">
+                      <a:solidFill>
+                        <a:srgbClr val="DCD6C9"/>
+                      </a:solidFill>
+                      <a:prstDash val="solid"/>
+                      <a:round/>
+                      <a:headEnd type="none" w="med" len="med"/>
+                      <a:tailEnd type="none" w="med" len="med"/>
+                    </a:lnT>
+                    <a:lnB w="6350" cap="flat" cmpd="sng" algn="ctr">
+                      <a:solidFill>
+                        <a:srgbClr val="DCD6C9"/>
+                      </a:solidFill>
+                      <a:prstDash val="solid"/>
+                      <a:round/>
+                      <a:headEnd type="none" w="med" len="med"/>
+                      <a:tailEnd type="none" w="med" len="med"/>
+                    </a:lnB>
+                    <a:solidFill>
+                      <a:srgbClr val="F1EDE4"/>
+                    </a:solidFill>
+                  </a:tcPr>
+                </a:tc>
+                <a:tc>
+                  <a:txBody>
+                    <a:bodyPr/>
+                    <a:lstStyle/>
+                    <a:p>
+                      <a:pPr indent="0" marL="0">
+                        <a:buNone/>
+                      </a:pPr>
+                      <a:r>
+                        <a:rPr lang="en-US" sz="1200" dirty="0">
+                          <a:solidFill>
+                            <a:srgbClr val="1B2426"/>
+                          </a:solidFill>
+                          <a:latin typeface="맑은 고딕" pitchFamily="34" charset="0"/>
+                          <a:ea typeface="맑은 고딕" pitchFamily="34" charset="-122"/>
+                          <a:cs typeface="맑은 고딕" pitchFamily="34" charset="-120"/>
+                        </a:rPr>
+                        <a:t>약 1,741만 / 년</a:t>
+                      </a:r>
+                      <a:endParaRPr lang="en-US" sz="1200" dirty="0">
+                        <a:latin typeface="맑은 고딕" charset="0"/>
+                        <a:ea typeface="맑은 고딕" charset="0"/>
+                        <a:cs typeface="맑은 고딕" charset="0"/>
+                      </a:endParaRPr>
+                    </a:p>
+                  </a:txBody>
+                  <a:tcPr marL="88900" marR="88900" marT="50800" marB="50800" anchor="ctr">
+                    <a:lnL w="6350" cap="flat" cmpd="sng" algn="ctr">
+                      <a:solidFill>
+                        <a:srgbClr val="DCD6C9"/>
+                      </a:solidFill>
+                      <a:prstDash val="solid"/>
+                      <a:round/>
+                      <a:headEnd type="none" w="med" len="med"/>
+                      <a:tailEnd type="none" w="med" len="med"/>
+                    </a:lnL>
+                    <a:lnR w="6350" cap="flat" cmpd="sng" algn="ctr">
+                      <a:solidFill>
+                        <a:srgbClr val="DCD6C9"/>
+                      </a:solidFill>
+                      <a:prstDash val="solid"/>
+                      <a:round/>
+                      <a:headEnd type="none" w="med" len="med"/>
+                      <a:tailEnd type="none" w="med" len="med"/>
+                    </a:lnR>
+                    <a:lnT w="6350" cap="flat" cmpd="sng" algn="ctr">
+                      <a:solidFill>
+                        <a:srgbClr val="DCD6C9"/>
+                      </a:solidFill>
+                      <a:prstDash val="solid"/>
+                      <a:round/>
+                      <a:headEnd type="none" w="med" len="med"/>
+                      <a:tailEnd type="none" w="med" len="med"/>
+                    </a:lnT>
+                    <a:lnB w="6350" cap="flat" cmpd="sng" algn="ctr">
+                      <a:solidFill>
+                        <a:srgbClr val="DCD6C9"/>
+                      </a:solidFill>
+                      <a:prstDash val="solid"/>
+                      <a:round/>
+                      <a:headEnd type="none" w="med" len="med"/>
+                      <a:tailEnd type="none" w="med" len="med"/>
+                    </a:lnB>
+                    <a:solidFill>
+                      <a:srgbClr val="F1EDE4"/>
+                    </a:solidFill>
+                  </a:tcPr>
+                </a:tc>
+                <a:tc>
+                  <a:txBody>
+                    <a:bodyPr/>
+                    <a:lstStyle/>
+                    <a:p>
+                      <a:pPr indent="0" marL="0">
+                        <a:buNone/>
+                      </a:pPr>
+                      <a:r>
+                        <a:rPr lang="en-US" sz="1200" dirty="0">
+                          <a:solidFill>
+                            <a:srgbClr val="1B2426"/>
+                          </a:solidFill>
+                          <a:latin typeface="맑은 고딕" pitchFamily="34" charset="0"/>
+                          <a:ea typeface="맑은 고딕" pitchFamily="34" charset="-122"/>
+                          <a:cs typeface="맑은 고딕" pitchFamily="34" charset="-120"/>
+                        </a:rPr>
+                        <a:t>약 1,763만 / 년</a:t>
+                      </a:r>
+                      <a:endParaRPr lang="en-US" sz="1200" dirty="0">
+                        <a:latin typeface="맑은 고딕" charset="0"/>
+                        <a:ea typeface="맑은 고딕" charset="0"/>
+                        <a:cs typeface="맑은 고딕" charset="0"/>
+                      </a:endParaRPr>
+                    </a:p>
+                  </a:txBody>
+                  <a:tcPr marL="88900" marR="88900" marT="50800" marB="50800" anchor="ctr">
+                    <a:lnL w="6350" cap="flat" cmpd="sng" algn="ctr">
+                      <a:solidFill>
+                        <a:srgbClr val="DCD6C9"/>
+                      </a:solidFill>
+                      <a:prstDash val="solid"/>
+                      <a:round/>
+                      <a:headEnd type="none" w="med" len="med"/>
+                      <a:tailEnd type="none" w="med" len="med"/>
+                    </a:lnL>
+                    <a:lnR w="6350" cap="flat" cmpd="sng" algn="ctr">
+                      <a:solidFill>
+                        <a:srgbClr val="DCD6C9"/>
+                      </a:solidFill>
+                      <a:prstDash val="solid"/>
+                      <a:round/>
+                      <a:headEnd type="none" w="med" len="med"/>
+                      <a:tailEnd type="none" w="med" len="med"/>
+                    </a:lnR>
+                    <a:lnT w="6350" cap="flat" cmpd="sng" algn="ctr">
+                      <a:solidFill>
+                        <a:srgbClr val="DCD6C9"/>
+                      </a:solidFill>
+                      <a:prstDash val="solid"/>
+                      <a:round/>
+                      <a:headEnd type="none" w="med" len="med"/>
+                      <a:tailEnd type="none" w="med" len="med"/>
+                    </a:lnT>
+                    <a:lnB w="6350" cap="flat" cmpd="sng" algn="ctr">
+                      <a:solidFill>
+                        <a:srgbClr val="DCD6C9"/>
+                      </a:solidFill>
+                      <a:prstDash val="solid"/>
+                      <a:round/>
+                      <a:headEnd type="none" w="med" len="med"/>
+                      <a:tailEnd type="none" w="med" len="med"/>
+                    </a:lnB>
+                    <a:solidFill>
+                      <a:srgbClr val="F1EDE4"/>
+                    </a:solidFill>
+                  </a:tcPr>
+                </a:tc>
+                <a:tc>
+                  <a:txBody>
+                    <a:bodyPr/>
+                    <a:lstStyle/>
+                    <a:p>
+                      <a:pPr indent="0" marL="0">
+                        <a:buNone/>
+                      </a:pPr>
+                      <a:r>
+                        <a:rPr lang="en-US" sz="1200" dirty="0">
+                          <a:solidFill>
+                            <a:srgbClr val="1B2426"/>
+                          </a:solidFill>
+                          <a:latin typeface="맑은 고딕" pitchFamily="34" charset="0"/>
+                          <a:ea typeface="맑은 고딕" pitchFamily="34" charset="-122"/>
+                          <a:cs typeface="맑은 고딕" pitchFamily="34" charset="-120"/>
+                        </a:rPr>
+                        <a:t>약 2,311만 / 년</a:t>
+                      </a:r>
+                      <a:endParaRPr lang="en-US" sz="1200" dirty="0">
+                        <a:latin typeface="맑은 고딕" charset="0"/>
+                        <a:ea typeface="맑은 고딕" charset="0"/>
+                        <a:cs typeface="맑은 고딕" charset="0"/>
+                      </a:endParaRPr>
+                    </a:p>
+                  </a:txBody>
+                  <a:tcPr marL="88900" marR="88900" marT="50800" marB="50800" anchor="ctr">
+                    <a:lnL w="6350" cap="flat" cmpd="sng" algn="ctr">
+                      <a:solidFill>
+                        <a:srgbClr val="DCD6C9"/>
+                      </a:solidFill>
+                      <a:prstDash val="solid"/>
+                      <a:round/>
+                      <a:headEnd type="none" w="med" len="med"/>
+                      <a:tailEnd type="none" w="med" len="med"/>
+                    </a:lnL>
+                    <a:lnR w="6350" cap="flat" cmpd="sng" algn="ctr">
+                      <a:solidFill>
+                        <a:srgbClr val="DCD6C9"/>
+                      </a:solidFill>
+                      <a:prstDash val="solid"/>
+                      <a:round/>
+                      <a:headEnd type="none" w="med" len="med"/>
+                      <a:tailEnd type="none" w="med" len="med"/>
+                    </a:lnR>
+                    <a:lnT w="6350" cap="flat" cmpd="sng" algn="ctr">
+                      <a:solidFill>
+                        <a:srgbClr val="DCD6C9"/>
+                      </a:solidFill>
+                      <a:prstDash val="solid"/>
+                      <a:round/>
+                      <a:headEnd type="none" w="med" len="med"/>
+                      <a:tailEnd type="none" w="med" len="med"/>
+                    </a:lnT>
+                    <a:lnB w="6350" cap="flat" cmpd="sng" algn="ctr">
+                      <a:solidFill>
+                        <a:srgbClr val="DCD6C9"/>
+                      </a:solidFill>
+                      <a:prstDash val="solid"/>
+                      <a:round/>
+                      <a:headEnd type="none" w="med" len="med"/>
+                      <a:tailEnd type="none" w="med" len="med"/>
+                    </a:lnB>
+                    <a:solidFill>
+                      <a:srgbClr val="F1EDE4"/>
                     </a:solidFill>
                   </a:tcPr>
                 </a:tc>
@@ -14260,7 +14534,7 @@
                       <a:tailEnd type="none" w="med" len="med"/>
                     </a:lnB>
                     <a:solidFill>
-                      <a:srgbClr val="F1EDE4"/>
+                      <a:srgbClr val="FFFFFF"/>
                     </a:solidFill>
                   </a:tcPr>
                 </a:tc>
@@ -14328,7 +14602,7 @@
                       <a:tailEnd type="none" w="med" len="med"/>
                     </a:lnB>
                     <a:solidFill>
-                      <a:srgbClr val="F1EDE4"/>
+                      <a:srgbClr val="FFFFFF"/>
                     </a:solidFill>
                   </a:tcPr>
                 </a:tc>
@@ -14396,7 +14670,7 @@
                       <a:tailEnd type="none" w="med" len="med"/>
                     </a:lnB>
                     <a:solidFill>
-                      <a:srgbClr val="F1EDE4"/>
+                      <a:srgbClr val="FFFFFF"/>
                     </a:solidFill>
                   </a:tcPr>
                 </a:tc>
@@ -14464,7 +14738,7 @@
                       <a:tailEnd type="none" w="med" len="med"/>
                     </a:lnB>
                     <a:solidFill>
-                      <a:srgbClr val="F1EDE4"/>
+                      <a:srgbClr val="FFFFFF"/>
                     </a:solidFill>
                   </a:tcPr>
                 </a:tc>
@@ -14534,7 +14808,7 @@
                       <a:tailEnd type="none" w="med" len="med"/>
                     </a:lnB>
                     <a:solidFill>
-                      <a:srgbClr val="FFFFFF"/>
+                      <a:srgbClr val="F1EDE4"/>
                     </a:solidFill>
                   </a:tcPr>
                 </a:tc>
@@ -14602,7 +14876,7 @@
                       <a:tailEnd type="none" w="med" len="med"/>
                     </a:lnB>
                     <a:solidFill>
-                      <a:srgbClr val="FFFFFF"/>
+                      <a:srgbClr val="F1EDE4"/>
                     </a:solidFill>
                   </a:tcPr>
                 </a:tc>
@@ -14670,7 +14944,7 @@
                       <a:tailEnd type="none" w="med" len="med"/>
                     </a:lnB>
                     <a:solidFill>
-                      <a:srgbClr val="FFFFFF"/>
+                      <a:srgbClr val="F1EDE4"/>
                     </a:solidFill>
                   </a:tcPr>
                 </a:tc>
@@ -14738,7 +15012,7 @@
                       <a:tailEnd type="none" w="med" len="med"/>
                     </a:lnB>
                     <a:solidFill>
-                      <a:srgbClr val="FFFFFF"/>
+                      <a:srgbClr val="F1EDE4"/>
                     </a:solidFill>
                   </a:tcPr>
                 </a:tc>
@@ -14808,7 +15082,7 @@
                       <a:tailEnd type="none" w="med" len="med"/>
                     </a:lnB>
                     <a:solidFill>
-                      <a:srgbClr val="F1EDE4"/>
+                      <a:srgbClr val="FFFFFF"/>
                     </a:solidFill>
                   </a:tcPr>
                 </a:tc>
@@ -14876,7 +15150,7 @@
                       <a:tailEnd type="none" w="med" len="med"/>
                     </a:lnB>
                     <a:solidFill>
-                      <a:srgbClr val="F1EDE4"/>
+                      <a:srgbClr val="FFFFFF"/>
                     </a:solidFill>
                   </a:tcPr>
                 </a:tc>
@@ -14944,7 +15218,7 @@
                       <a:tailEnd type="none" w="med" len="med"/>
                     </a:lnB>
                     <a:solidFill>
-                      <a:srgbClr val="F1EDE4"/>
+                      <a:srgbClr val="FFFFFF"/>
                     </a:solidFill>
                   </a:tcPr>
                 </a:tc>
@@ -15012,7 +15286,7 @@
                       <a:tailEnd type="none" w="med" len="med"/>
                     </a:lnB>
                     <a:solidFill>
-                      <a:srgbClr val="F1EDE4"/>
+                      <a:srgbClr val="FFFFFF"/>
                     </a:solidFill>
                   </a:tcPr>
                 </a:tc>
@@ -15082,7 +15356,7 @@
                       <a:tailEnd type="none" w="med" len="med"/>
                     </a:lnB>
                     <a:solidFill>
-                      <a:srgbClr val="FFFFFF"/>
+                      <a:srgbClr val="F1EDE4"/>
                     </a:solidFill>
                   </a:tcPr>
                 </a:tc>
@@ -15103,7 +15377,7 @@
                           <a:ea typeface="맑은 고딕" pitchFamily="34" charset="-122"/>
                           <a:cs typeface="맑은 고딕" pitchFamily="34" charset="-120"/>
                         </a:rPr>
-                        <a:t>약 3,799만</a:t>
+                        <a:t>약 3,756만</a:t>
                       </a:r>
                       <a:endParaRPr lang="en-US" sz="1200" dirty="0">
                         <a:latin typeface="맑은 고딕" charset="0"/>
@@ -15150,7 +15424,7 @@
                       <a:tailEnd type="none" w="med" len="med"/>
                     </a:lnB>
                     <a:solidFill>
-                      <a:srgbClr val="FFFFFF"/>
+                      <a:srgbClr val="F1EDE4"/>
                     </a:solidFill>
                   </a:tcPr>
                 </a:tc>
@@ -15171,7 +15445,7 @@
                           <a:ea typeface="맑은 고딕" pitchFamily="34" charset="-122"/>
                           <a:cs typeface="맑은 고딕" pitchFamily="34" charset="-120"/>
                         </a:rPr>
-                        <a:t>약 3,724만</a:t>
+                        <a:t>약 3,368만</a:t>
                       </a:r>
                       <a:endParaRPr lang="en-US" sz="1200" dirty="0">
                         <a:latin typeface="맑은 고딕" charset="0"/>
@@ -15218,7 +15492,7 @@
                       <a:tailEnd type="none" w="med" len="med"/>
                     </a:lnB>
                     <a:solidFill>
-                      <a:srgbClr val="FFFFFF"/>
+                      <a:srgbClr val="F1EDE4"/>
                     </a:solidFill>
                   </a:tcPr>
                 </a:tc>
@@ -15239,7 +15513,7 @@
                           <a:ea typeface="맑은 고딕" pitchFamily="34" charset="-122"/>
                           <a:cs typeface="맑은 고딕" pitchFamily="34" charset="-120"/>
                         </a:rPr>
-                        <a:t>약 4,264만</a:t>
+                        <a:t>약 2,880만</a:t>
                       </a:r>
                       <a:endParaRPr lang="en-US" sz="1200" dirty="0">
                         <a:latin typeface="맑은 고딕" charset="0"/>
@@ -15286,7 +15560,7 @@
                       <a:tailEnd type="none" w="med" len="med"/>
                     </a:lnB>
                     <a:solidFill>
-                      <a:srgbClr val="FFFFFF"/>
+                      <a:srgbClr val="F1EDE4"/>
                     </a:solidFill>
                   </a:tcPr>
                 </a:tc>
@@ -15356,7 +15630,7 @@
                       <a:tailEnd type="none" w="med" len="med"/>
                     </a:lnB>
                     <a:solidFill>
-                      <a:srgbClr val="F1EDE4"/>
+                      <a:srgbClr val="FFFFFF"/>
                     </a:solidFill>
                   </a:tcPr>
                 </a:tc>
@@ -15377,7 +15651,7 @@
                           <a:ea typeface="맑은 고딕" pitchFamily="34" charset="-122"/>
                           <a:cs typeface="맑은 고딕" pitchFamily="34" charset="-120"/>
                         </a:rPr>
-                        <a:t>약 3,299만</a:t>
+                        <a:t>약 3,321만</a:t>
                       </a:r>
                       <a:endParaRPr lang="en-US" sz="1200" dirty="0">
                         <a:latin typeface="맑은 고딕" charset="0"/>
@@ -15424,7 +15698,7 @@
                       <a:tailEnd type="none" w="med" len="med"/>
                     </a:lnB>
                     <a:solidFill>
-                      <a:srgbClr val="F1EDE4"/>
+                      <a:srgbClr val="FFFFFF"/>
                     </a:solidFill>
                   </a:tcPr>
                 </a:tc>
@@ -15445,7 +15719,7 @@
                           <a:ea typeface="맑은 고딕" pitchFamily="34" charset="-122"/>
                           <a:cs typeface="맑은 고딕" pitchFamily="34" charset="-120"/>
                         </a:rPr>
-                        <a:t>약 3,224만</a:t>
+                        <a:t>약 3,343만</a:t>
                       </a:r>
                       <a:endParaRPr lang="en-US" sz="1200" dirty="0">
                         <a:latin typeface="맑은 고딕" charset="0"/>
@@ -15492,7 +15766,7 @@
                       <a:tailEnd type="none" w="med" len="med"/>
                     </a:lnB>
                     <a:solidFill>
-                      <a:srgbClr val="F1EDE4"/>
+                      <a:srgbClr val="FFFFFF"/>
                     </a:solidFill>
                   </a:tcPr>
                 </a:tc>
@@ -15513,7 +15787,7 @@
                           <a:ea typeface="맑은 고딕" pitchFamily="34" charset="-122"/>
                           <a:cs typeface="맑은 고딕" pitchFamily="34" charset="-120"/>
                         </a:rPr>
-                        <a:t>약 3,764만</a:t>
+                        <a:t>약 3,891만</a:t>
                       </a:r>
                       <a:endParaRPr lang="en-US" sz="1200" dirty="0">
                         <a:latin typeface="맑은 고딕" charset="0"/>
@@ -15560,7 +15834,7 @@
                       <a:tailEnd type="none" w="med" len="med"/>
                     </a:lnB>
                     <a:solidFill>
-                      <a:srgbClr val="F1EDE4"/>
+                      <a:srgbClr val="FFFFFF"/>
                     </a:solidFill>
                   </a:tcPr>
                 </a:tc>
@@ -15630,7 +15904,7 @@
                       <a:tailEnd type="none" w="med" len="med"/>
                     </a:lnB>
                     <a:solidFill>
-                      <a:srgbClr val="FFFFFF"/>
+                      <a:srgbClr val="F1EDE4"/>
                     </a:solidFill>
                   </a:tcPr>
                 </a:tc>
@@ -15651,7 +15925,7 @@
                           <a:ea typeface="맑은 고딕" pitchFamily="34" charset="-122"/>
                           <a:cs typeface="맑은 고딕" pitchFamily="34" charset="-120"/>
                         </a:rPr>
-                        <a:t>약 1억 397만</a:t>
+                        <a:t>약 1억 398만</a:t>
                       </a:r>
                       <a:endParaRPr lang="en-US" sz="1200" dirty="0">
                         <a:latin typeface="맑은 고딕" charset="0"/>
@@ -15698,7 +15972,7 @@
                       <a:tailEnd type="none" w="med" len="med"/>
                     </a:lnB>
                     <a:solidFill>
-                      <a:srgbClr val="FFFFFF"/>
+                      <a:srgbClr val="F1EDE4"/>
                     </a:solidFill>
                   </a:tcPr>
                 </a:tc>
@@ -15719,7 +15993,7 @@
                           <a:ea typeface="맑은 고딕" pitchFamily="34" charset="-122"/>
                           <a:cs typeface="맑은 고딕" pitchFamily="34" charset="-120"/>
                         </a:rPr>
-                        <a:t>약 1억 3,396만</a:t>
+                        <a:t>약 1억 3,397만</a:t>
                       </a:r>
                       <a:endParaRPr lang="en-US" sz="1200" dirty="0">
                         <a:latin typeface="맑은 고딕" charset="0"/>
@@ -15766,7 +16040,7 @@
                       <a:tailEnd type="none" w="med" len="med"/>
                     </a:lnB>
                     <a:solidFill>
-                      <a:srgbClr val="FFFFFF"/>
+                      <a:srgbClr val="F1EDE4"/>
                     </a:solidFill>
                   </a:tcPr>
                 </a:tc>
@@ -15787,7 +16061,7 @@
                           <a:ea typeface="맑은 고딕" pitchFamily="34" charset="-122"/>
                           <a:cs typeface="맑은 고딕" pitchFamily="34" charset="-120"/>
                         </a:rPr>
-                        <a:t>약 1억 9,320만</a:t>
+                        <a:t>약 1억 8,444만</a:t>
                       </a:r>
                       <a:endParaRPr lang="en-US" sz="1200" dirty="0">
                         <a:latin typeface="맑은 고딕" charset="0"/>
@@ -15834,7 +16108,7 @@
                       <a:tailEnd type="none" w="med" len="med"/>
                     </a:lnB>
                     <a:solidFill>
-                      <a:srgbClr val="FFFFFF"/>
+                      <a:srgbClr val="F1EDE4"/>
                     </a:solidFill>
                   </a:tcPr>
                 </a:tc>
@@ -15943,7 +16217,7 @@
                 <a:ea typeface="맑은 고딕" pitchFamily="34" charset="-122"/>
                 <a:cs typeface="맑은 고딕" pitchFamily="34" charset="-120"/>
               </a:rPr>
-              <a:t>※ 입학비 500만 원은 1년차에만 포함했습니다. 수학 기간이 길어져도 입학비는 늘지 않습니다. 6% 서비스세와 생활비는 별도입니다.</a:t>
+              <a:t>※ 입학비 500만 원은 1년차에만 포함했습니다. 수학 기간이 길어져도 늘지 않습니다 · MUFY는 선웨이 파운데이션 학비(RM 17,850~29,350) 평균 적용 · 6% 서비스세와 생활비 별도.</a:t>
             </a:r>
             <a:endParaRPr lang="en-US" sz="900" dirty="0"/>
           </a:p>
@@ -18039,7 +18313,7 @@
                 <a:ea typeface="맑은 고딕" pitchFamily="34" charset="-122"/>
                 <a:cs typeface="맑은 고딕" pitchFamily="34" charset="-120"/>
               </a:rPr>
-              <a:t>두 학교 파운데이션 기간·인테이크·학비</a:t>
+              <a:t>MUFY는 선웨이 칼리지 운영 · 인테이크 1·7·8월</a:t>
             </a:r>
             <a:endParaRPr lang="en-US" sz="1100" dirty="0"/>
           </a:p>
@@ -18143,7 +18417,7 @@
                 <a:ea typeface="맑은 고딕" pitchFamily="34" charset="-122"/>
                 <a:cs typeface="맑은 고딕" pitchFamily="34" charset="-120"/>
               </a:rPr>
-              <a:t>학부 계열별 연간 학비와 수학 기간</a:t>
+              <a:t>DHES로는 공학 2학년 진입 불가 (각주 4)</a:t>
             </a:r>
             <a:endParaRPr lang="en-US" sz="1100" dirty="0"/>
           </a:p>
@@ -18247,7 +18521,7 @@
                 <a:ea typeface="맑은 고딕" pitchFamily="34" charset="-122"/>
                 <a:cs typeface="맑은 고딕" pitchFamily="34" charset="-120"/>
               </a:rPr>
-              <a:t>노팅엄 2+1 영국 이동 조건</a:t>
+              <a:t>노팅엄 영어 요건 및 2+1 영국 이동 조건</a:t>
             </a:r>
             <a:endParaRPr lang="en-US" sz="1100" dirty="0"/>
           </a:p>
@@ -18351,7 +18625,7 @@
                 <a:ea typeface="맑은 고딕" pitchFamily="34" charset="-122"/>
                 <a:cs typeface="맑은 고딕" pitchFamily="34" charset="-120"/>
               </a:rPr>
-              <a:t>모나쉬 공학 일부 호주 이동 필수</a:t>
+              <a:t>노팅엄 GED 불가 — 입학처 회신 + 브로셔 p.9 일치</a:t>
             </a:r>
             <a:endParaRPr lang="en-US" sz="1100" dirty="0"/>
           </a:p>
@@ -18497,7 +18771,7 @@
                 <a:ea typeface="맑은 고딕" pitchFamily="34" charset="-122"/>
                 <a:cs typeface="맑은 고딕" pitchFamily="34" charset="-120"/>
               </a:rPr>
-              <a:t>GED 인정 여부와 최소 점수 (두 학교 모두 자료에 없음)</a:t>
+              <a:t>모나쉬의 GED 인정 여부와 최소 점수 (자료에 없음)</a:t>
             </a:r>
             <a:endParaRPr lang="en-US" sz="1100" dirty="0"/>
           </a:p>
@@ -18601,7 +18875,7 @@
                 <a:ea typeface="맑은 고딕" pitchFamily="34" charset="-122"/>
                 <a:cs typeface="맑은 고딕" pitchFamily="34" charset="-120"/>
               </a:rPr>
-              <a:t>MUFY 학비 (Monash College 운영)</a:t>
+              <a:t>MUFY 학비 — 선웨이 칼리지 공식 금액 재확인</a:t>
             </a:r>
             <a:endParaRPr lang="en-US" sz="1100" dirty="0"/>
           </a:p>
@@ -24535,7 +24809,7 @@
                           <a:ea typeface="맑은 고딕" pitchFamily="34" charset="-122"/>
                           <a:cs typeface="맑은 고딕" pitchFamily="34" charset="-120"/>
                         </a:rPr>
-                        <a:t>프로스펙터스 미기재</a:t>
+                        <a:t>RM 17,850 ~ 29,350</a:t>
                       </a:r>
                       <a:endParaRPr lang="en-US" sz="1200" dirty="0">
                         <a:latin typeface="맑은 고딕" charset="0"/>
@@ -24556,7 +24830,7 @@
                           <a:ea typeface="맑은 고딕" pitchFamily="34" charset="-122"/>
                           <a:cs typeface="맑은 고딕" pitchFamily="34" charset="-120"/>
                         </a:rPr>
-                        <a:t>(선웨이 확인)</a:t>
+                        <a:t>약 605만 ~ 995만 원</a:t>
                       </a:r>
                       <a:endParaRPr lang="en-US" sz="1200" dirty="0">
                         <a:latin typeface="맑은 고딕" charset="0"/>
@@ -25727,7 +26001,7 @@
                 <a:ea typeface="맑은 고딕" pitchFamily="34" charset="-122"/>
                 <a:cs typeface="맑은 고딕" pitchFamily="34" charset="-120"/>
               </a:rPr>
-              <a:t>디플로마 전 과목을 통과하고 가중평균(WAM) 50 이상이어야 문학·사회과학·경영·이학으로 진급합니다. 정보기술은 WAM 60이 필요합니다.</a:t>
+              <a:t>전 과목 통과 + 가중평균(WAM) 50 이상으로 문학·사회과학·경영·이학 진급, 정보기술은 WAM 60. 영어는 IELTS 5.5(각 5.0 이상), 미달 시 Monash English 선이수.</a:t>
             </a:r>
             <a:endParaRPr lang="en-US" sz="1150" dirty="0"/>
           </a:p>
@@ -25791,7 +26065,7 @@
                 <a:ea typeface="맑은 고딕" pitchFamily="34" charset="-122"/>
                 <a:cs typeface="맑은 고딕" pitchFamily="34" charset="-120"/>
               </a:rPr>
-              <a:t>파운데이션 영어 요건 — IELTS 5.5 (각 영역 5.0 이상) · 미달 시 Monash English(ME) 선이수   |   생의학·재료공학은 말레이시아 2년 후 호주 클레이턴 이동 필수 (WAM 50)</a:t>
+              <a:t>공학 지망자 주의 — DHES로는 공학 2학년 진입이 안 됩니다 (프로스펙터스 각주 4: Monash College Diploma Part 2 이수자만 가능). 말레이시아에서 공학을 하려면 MUFY → 공학 1학년(4년) 경로입니다.</a:t>
             </a:r>
             <a:endParaRPr lang="en-US" sz="1100" dirty="0"/>
           </a:p>
@@ -30588,7 +30862,7 @@
                 <a:ea typeface="맑은 고딕" pitchFamily="34" charset="-122"/>
                 <a:cs typeface="맑은 고딕" pitchFamily="34" charset="-120"/>
               </a:rPr>
-              <a:t>① DHES 1년 (RM 49,440) → 학부 2·3학년 2년 (RM 51,360 × 2)  =  총 3년 · RM 152,160 · 약 5,158만 원</a:t>
+              <a:t>① DHES 1년 (RM 49,440) → 학부 2·3학년 (RM 51,360 × 2)  =  총 3년 · RM 152,160 · 약 5,158만 원   ← 가장 짧고 저렴</a:t>
             </a:r>
             <a:endParaRPr lang="en-US" sz="1250" dirty="0"/>
           </a:p>
@@ -30630,7 +30904,7 @@
                 <a:ea typeface="맑은 고딕" pitchFamily="34" charset="-122"/>
                 <a:cs typeface="맑은 고딕" pitchFamily="34" charset="-120"/>
               </a:rPr>
-              <a:t>② MUFY 1년 → 학부 1~3학년 3년 (RM 51,360 × 3)  =  총 4년 · 학부 학비만 RM 154,080 · 약 5,223만 원 + MUFY 학비 별도</a:t>
+              <a:t>② MUFY 1년 (RM 17,850~29,350) → 학부 1~3학년 (RM 51,360 × 3)  =  총 4년 · RM 171,930~183,430 · 약 5,828만~6,218만 원</a:t>
             </a:r>
             <a:endParaRPr lang="en-US" sz="1250" dirty="0"/>
           </a:p>

--- a/design/malaysia-study-live/말레이시아유학_2편_해외직영캠퍼스.pptx
+++ b/design/malaysia-study-live/말레이시아유학_2편_해외직영캠퍼스.pptx
@@ -4914,13 +4914,14 @@
             <a:tbl>
               <a:tblPr/>
               <a:tblGrid>
-                <a:gridCol w="2651760"/>
-                <a:gridCol w="2066544"/>
-                <a:gridCol w="2066544"/>
-                <a:gridCol w="2066544"/>
-                <a:gridCol w="2060143"/>
+                <a:gridCol w="2194560"/>
+                <a:gridCol w="1743395"/>
+                <a:gridCol w="1743395"/>
+                <a:gridCol w="1743395"/>
+                <a:gridCol w="1743395"/>
+                <a:gridCol w="1743395"/>
               </a:tblGrid>
-              <a:tr h="384048">
+              <a:tr h="365760">
                 <a:tc>
                   <a:txBody>
                     <a:bodyPr/>
@@ -4930,7 +4931,7 @@
                         <a:buNone/>
                       </a:pPr>
                       <a:r>
-                        <a:rPr lang="en-US" sz="1050" b="1" dirty="0">
+                        <a:rPr lang="en-US" sz="1000" b="1" dirty="0">
                           <a:solidFill>
                             <a:srgbClr val="FFFFFF"/>
                           </a:solidFill>
@@ -4940,7 +4941,7 @@
                         </a:rPr>
                         <a:t>항목</a:t>
                       </a:r>
-                      <a:endParaRPr lang="en-US" sz="1050" dirty="0">
+                      <a:endParaRPr lang="en-US" sz="1000" dirty="0">
                         <a:latin typeface="맑은 고딕" charset="0"/>
                         <a:ea typeface="맑은 고딕" charset="0"/>
                         <a:cs typeface="맑은 고딕" charset="0"/>
@@ -4998,7 +4999,7 @@
                         <a:buNone/>
                       </a:pPr>
                       <a:r>
-                        <a:rPr lang="en-US" sz="1050" b="1" dirty="0">
+                        <a:rPr lang="en-US" sz="1000" b="1" dirty="0">
                           <a:solidFill>
                             <a:srgbClr val="FFFFFF"/>
                           </a:solidFill>
@@ -5006,9 +5007,30 @@
                           <a:ea typeface="맑은 고딕" pitchFamily="34" charset="-122"/>
                           <a:cs typeface="맑은 고딕" pitchFamily="34" charset="-120"/>
                         </a:rPr>
-                        <a:t>모나쉬 DHES 3년</a:t>
+                        <a:t>모나쉬</a:t>
                       </a:r>
-                      <a:endParaRPr lang="en-US" sz="1050" dirty="0">
+                      <a:endParaRPr lang="en-US" sz="1000" dirty="0">
+                        <a:latin typeface="맑은 고딕" charset="0"/>
+                        <a:ea typeface="맑은 고딕" charset="0"/>
+                        <a:cs typeface="맑은 고딕" charset="0"/>
+                      </a:endParaRPr>
+                    </a:p>
+                    <a:p>
+                      <a:pPr indent="0" marL="0">
+                        <a:buNone/>
+                      </a:pPr>
+                      <a:r>
+                        <a:rPr lang="en-US" sz="1000" b="1" dirty="0">
+                          <a:solidFill>
+                            <a:srgbClr val="FFFFFF"/>
+                          </a:solidFill>
+                          <a:latin typeface="맑은 고딕" pitchFamily="34" charset="0"/>
+                          <a:ea typeface="맑은 고딕" pitchFamily="34" charset="-122"/>
+                          <a:cs typeface="맑은 고딕" pitchFamily="34" charset="-120"/>
+                        </a:rPr>
+                        <a:t>DHES 3년</a:t>
+                      </a:r>
+                      <a:endParaRPr lang="en-US" sz="1000" dirty="0">
                         <a:latin typeface="맑은 고딕" charset="0"/>
                         <a:ea typeface="맑은 고딕" charset="0"/>
                         <a:cs typeface="맑은 고딕" charset="0"/>
@@ -5066,7 +5088,7 @@
                         <a:buNone/>
                       </a:pPr>
                       <a:r>
-                        <a:rPr lang="en-US" sz="1050" b="1" dirty="0">
+                        <a:rPr lang="en-US" sz="1000" b="1" dirty="0">
                           <a:solidFill>
                             <a:srgbClr val="FFFFFF"/>
                           </a:solidFill>
@@ -5074,9 +5096,30 @@
                           <a:ea typeface="맑은 고딕" pitchFamily="34" charset="-122"/>
                           <a:cs typeface="맑은 고딕" pitchFamily="34" charset="-120"/>
                         </a:rPr>
-                        <a:t>노팅엄 문과 계열 4년</a:t>
+                        <a:t>모나쉬</a:t>
                       </a:r>
-                      <a:endParaRPr lang="en-US" sz="1050" dirty="0">
+                      <a:endParaRPr lang="en-US" sz="1000" dirty="0">
+                        <a:latin typeface="맑은 고딕" charset="0"/>
+                        <a:ea typeface="맑은 고딕" charset="0"/>
+                        <a:cs typeface="맑은 고딕" charset="0"/>
+                      </a:endParaRPr>
+                    </a:p>
+                    <a:p>
+                      <a:pPr indent="0" marL="0">
+                        <a:buNone/>
+                      </a:pPr>
+                      <a:r>
+                        <a:rPr lang="en-US" sz="1000" b="1" dirty="0">
+                          <a:solidFill>
+                            <a:srgbClr val="FFFFFF"/>
+                          </a:solidFill>
+                          <a:latin typeface="맑은 고딕" pitchFamily="34" charset="0"/>
+                          <a:ea typeface="맑은 고딕" pitchFamily="34" charset="-122"/>
+                          <a:cs typeface="맑은 고딕" pitchFamily="34" charset="-120"/>
+                        </a:rPr>
+                        <a:t>MUFY + 학부 4년</a:t>
+                      </a:r>
+                      <a:endParaRPr lang="en-US" sz="1000" dirty="0">
                         <a:latin typeface="맑은 고딕" charset="0"/>
                         <a:ea typeface="맑은 고딕" charset="0"/>
                         <a:cs typeface="맑은 고딕" charset="0"/>
@@ -5134,7 +5177,7 @@
                         <a:buNone/>
                       </a:pPr>
                       <a:r>
-                        <a:rPr lang="en-US" sz="1050" b="1" dirty="0">
+                        <a:rPr lang="en-US" sz="1000" b="1" dirty="0">
                           <a:solidFill>
                             <a:srgbClr val="FFFFFF"/>
                           </a:solidFill>
@@ -5142,9 +5185,30 @@
                           <a:ea typeface="맑은 고딕" pitchFamily="34" charset="-122"/>
                           <a:cs typeface="맑은 고딕" pitchFamily="34" charset="-120"/>
                         </a:rPr>
-                        <a:t>모나쉬 MUFY + 공학 5년</a:t>
+                        <a:t>노팅엄</a:t>
                       </a:r>
-                      <a:endParaRPr lang="en-US" sz="1050" dirty="0">
+                      <a:endParaRPr lang="en-US" sz="1000" dirty="0">
+                        <a:latin typeface="맑은 고딕" charset="0"/>
+                        <a:ea typeface="맑은 고딕" charset="0"/>
+                        <a:cs typeface="맑은 고딕" charset="0"/>
+                      </a:endParaRPr>
+                    </a:p>
+                    <a:p>
+                      <a:pPr indent="0" marL="0">
+                        <a:buNone/>
+                      </a:pPr>
+                      <a:r>
+                        <a:rPr lang="en-US" sz="1000" b="1" dirty="0">
+                          <a:solidFill>
+                            <a:srgbClr val="FFFFFF"/>
+                          </a:solidFill>
+                          <a:latin typeface="맑은 고딕" pitchFamily="34" charset="0"/>
+                          <a:ea typeface="맑은 고딕" pitchFamily="34" charset="-122"/>
+                          <a:cs typeface="맑은 고딕" pitchFamily="34" charset="-120"/>
+                        </a:rPr>
+                        <a:t>문과 계열 4년</a:t>
+                      </a:r>
+                      <a:endParaRPr lang="en-US" sz="1000" dirty="0">
                         <a:latin typeface="맑은 고딕" charset="0"/>
                         <a:ea typeface="맑은 고딕" charset="0"/>
                         <a:cs typeface="맑은 고딕" charset="0"/>
@@ -5202,7 +5266,7 @@
                         <a:buNone/>
                       </a:pPr>
                       <a:r>
-                        <a:rPr lang="en-US" sz="1050" b="1" dirty="0">
+                        <a:rPr lang="en-US" sz="1000" b="1" dirty="0">
                           <a:solidFill>
                             <a:srgbClr val="FFFFFF"/>
                           </a:solidFill>
@@ -5210,9 +5274,30 @@
                           <a:ea typeface="맑은 고딕" pitchFamily="34" charset="-122"/>
                           <a:cs typeface="맑은 고딕" pitchFamily="34" charset="-120"/>
                         </a:rPr>
-                        <a:t>노팅엄 MEng 공학 5년</a:t>
+                        <a:t>모나쉬</a:t>
                       </a:r>
-                      <a:endParaRPr lang="en-US" sz="1050" dirty="0">
+                      <a:endParaRPr lang="en-US" sz="1000" dirty="0">
+                        <a:latin typeface="맑은 고딕" charset="0"/>
+                        <a:ea typeface="맑은 고딕" charset="0"/>
+                        <a:cs typeface="맑은 고딕" charset="0"/>
+                      </a:endParaRPr>
+                    </a:p>
+                    <a:p>
+                      <a:pPr indent="0" marL="0">
+                        <a:buNone/>
+                      </a:pPr>
+                      <a:r>
+                        <a:rPr lang="en-US" sz="1000" b="1" dirty="0">
+                          <a:solidFill>
+                            <a:srgbClr val="FFFFFF"/>
+                          </a:solidFill>
+                          <a:latin typeface="맑은 고딕" pitchFamily="34" charset="0"/>
+                          <a:ea typeface="맑은 고딕" pitchFamily="34" charset="-122"/>
+                          <a:cs typeface="맑은 고딕" pitchFamily="34" charset="-120"/>
+                        </a:rPr>
+                        <a:t>MUFY + 공학 5년</a:t>
+                      </a:r>
+                      <a:endParaRPr lang="en-US" sz="1000" dirty="0">
                         <a:latin typeface="맑은 고딕" charset="0"/>
                         <a:ea typeface="맑은 고딕" charset="0"/>
                         <a:cs typeface="맑은 고딕" charset="0"/>
@@ -5261,8 +5346,6 @@
                     </a:solidFill>
                   </a:tcPr>
                 </a:tc>
-              </a:tr>
-              <a:tr h="384048">
                 <a:tc>
                   <a:txBody>
                     <a:bodyPr/>
@@ -5272,7 +5355,98 @@
                         <a:buNone/>
                       </a:pPr>
                       <a:r>
-                        <a:rPr lang="en-US" sz="1050" dirty="0">
+                        <a:rPr lang="en-US" sz="1000" b="1" dirty="0">
+                          <a:solidFill>
+                            <a:srgbClr val="FFFFFF"/>
+                          </a:solidFill>
+                          <a:latin typeface="맑은 고딕" pitchFamily="34" charset="0"/>
+                          <a:ea typeface="맑은 고딕" pitchFamily="34" charset="-122"/>
+                          <a:cs typeface="맑은 고딕" pitchFamily="34" charset="-120"/>
+                        </a:rPr>
+                        <a:t>노팅엄</a:t>
+                      </a:r>
+                      <a:endParaRPr lang="en-US" sz="1000" dirty="0">
+                        <a:latin typeface="맑은 고딕" charset="0"/>
+                        <a:ea typeface="맑은 고딕" charset="0"/>
+                        <a:cs typeface="맑은 고딕" charset="0"/>
+                      </a:endParaRPr>
+                    </a:p>
+                    <a:p>
+                      <a:pPr indent="0" marL="0">
+                        <a:buNone/>
+                      </a:pPr>
+                      <a:r>
+                        <a:rPr lang="en-US" sz="1000" b="1" dirty="0">
+                          <a:solidFill>
+                            <a:srgbClr val="FFFFFF"/>
+                          </a:solidFill>
+                          <a:latin typeface="맑은 고딕" pitchFamily="34" charset="0"/>
+                          <a:ea typeface="맑은 고딕" pitchFamily="34" charset="-122"/>
+                          <a:cs typeface="맑은 고딕" pitchFamily="34" charset="-120"/>
+                        </a:rPr>
+                        <a:t>MEng 공학 5년</a:t>
+                      </a:r>
+                      <a:endParaRPr lang="en-US" sz="1000" dirty="0">
+                        <a:latin typeface="맑은 고딕" charset="0"/>
+                        <a:ea typeface="맑은 고딕" charset="0"/>
+                        <a:cs typeface="맑은 고딕" charset="0"/>
+                      </a:endParaRPr>
+                    </a:p>
+                  </a:txBody>
+                  <a:tcPr marL="88900" marR="88900" marT="50800" marB="50800" anchor="ctr">
+                    <a:lnL w="6350" cap="flat" cmpd="sng" algn="ctr">
+                      <a:solidFill>
+                        <a:srgbClr val="DCD6C9"/>
+                      </a:solidFill>
+                      <a:prstDash val="solid"/>
+                      <a:round/>
+                      <a:headEnd type="none" w="med" len="med"/>
+                      <a:tailEnd type="none" w="med" len="med"/>
+                    </a:lnL>
+                    <a:lnR w="6350" cap="flat" cmpd="sng" algn="ctr">
+                      <a:solidFill>
+                        <a:srgbClr val="DCD6C9"/>
+                      </a:solidFill>
+                      <a:prstDash val="solid"/>
+                      <a:round/>
+                      <a:headEnd type="none" w="med" len="med"/>
+                      <a:tailEnd type="none" w="med" len="med"/>
+                    </a:lnR>
+                    <a:lnT w="6350" cap="flat" cmpd="sng" algn="ctr">
+                      <a:solidFill>
+                        <a:srgbClr val="DCD6C9"/>
+                      </a:solidFill>
+                      <a:prstDash val="solid"/>
+                      <a:round/>
+                      <a:headEnd type="none" w="med" len="med"/>
+                      <a:tailEnd type="none" w="med" len="med"/>
+                    </a:lnT>
+                    <a:lnB w="6350" cap="flat" cmpd="sng" algn="ctr">
+                      <a:solidFill>
+                        <a:srgbClr val="DCD6C9"/>
+                      </a:solidFill>
+                      <a:prstDash val="solid"/>
+                      <a:round/>
+                      <a:headEnd type="none" w="med" len="med"/>
+                      <a:tailEnd type="none" w="med" len="med"/>
+                    </a:lnB>
+                    <a:solidFill>
+                      <a:srgbClr val="134744"/>
+                    </a:solidFill>
+                  </a:tcPr>
+                </a:tc>
+              </a:tr>
+              <a:tr h="365760">
+                <a:tc>
+                  <a:txBody>
+                    <a:bodyPr/>
+                    <a:lstStyle/>
+                    <a:p>
+                      <a:pPr indent="0" marL="0">
+                        <a:buNone/>
+                      </a:pPr>
+                      <a:r>
+                        <a:rPr lang="en-US" sz="1000" dirty="0">
                           <a:solidFill>
                             <a:srgbClr val="1B2426"/>
                           </a:solidFill>
@@ -5282,7 +5456,7 @@
                         </a:rPr>
                         <a:t>1년차 학비 (파운데이션)</a:t>
                       </a:r>
-                      <a:endParaRPr lang="en-US" sz="1050" dirty="0">
+                      <a:endParaRPr lang="en-US" sz="1000" dirty="0">
                         <a:latin typeface="맑은 고딕" charset="0"/>
                         <a:ea typeface="맑은 고딕" charset="0"/>
                         <a:cs typeface="맑은 고딕" charset="0"/>
@@ -5340,7 +5514,7 @@
                         <a:buNone/>
                       </a:pPr>
                       <a:r>
-                        <a:rPr lang="en-US" sz="1050" dirty="0">
+                        <a:rPr lang="en-US" sz="1000" dirty="0">
                           <a:solidFill>
                             <a:srgbClr val="1B2426"/>
                           </a:solidFill>
@@ -5348,9 +5522,9 @@
                           <a:ea typeface="맑은 고딕" pitchFamily="34" charset="-122"/>
                           <a:cs typeface="맑은 고딕" pitchFamily="34" charset="-120"/>
                         </a:rPr>
-                        <a:t>DHES 약 1,676만</a:t>
+                        <a:t>1,676만</a:t>
                       </a:r>
-                      <a:endParaRPr lang="en-US" sz="1050" dirty="0">
+                      <a:endParaRPr lang="en-US" sz="1000" dirty="0">
                         <a:latin typeface="맑은 고딕" charset="0"/>
                         <a:ea typeface="맑은 고딕" charset="0"/>
                         <a:cs typeface="맑은 고딕" charset="0"/>
@@ -5408,7 +5582,7 @@
                         <a:buNone/>
                       </a:pPr>
                       <a:r>
-                        <a:rPr lang="en-US" sz="1050" dirty="0">
+                        <a:rPr lang="en-US" sz="1000" dirty="0">
                           <a:solidFill>
                             <a:srgbClr val="1B2426"/>
                           </a:solidFill>
@@ -5416,9 +5590,9 @@
                           <a:ea typeface="맑은 고딕" pitchFamily="34" charset="-122"/>
                           <a:cs typeface="맑은 고딕" pitchFamily="34" charset="-120"/>
                         </a:rPr>
-                        <a:t>파운데이션 약 1,288만</a:t>
+                        <a:t>800만</a:t>
                       </a:r>
-                      <a:endParaRPr lang="en-US" sz="1050" dirty="0">
+                      <a:endParaRPr lang="en-US" sz="1000" dirty="0">
                         <a:latin typeface="맑은 고딕" charset="0"/>
                         <a:ea typeface="맑은 고딕" charset="0"/>
                         <a:cs typeface="맑은 고딕" charset="0"/>
@@ -5476,7 +5650,7 @@
                         <a:buNone/>
                       </a:pPr>
                       <a:r>
-                        <a:rPr lang="en-US" sz="1050" dirty="0">
+                        <a:rPr lang="en-US" sz="1000" dirty="0">
                           <a:solidFill>
                             <a:srgbClr val="1B2426"/>
                           </a:solidFill>
@@ -5484,9 +5658,9 @@
                           <a:ea typeface="맑은 고딕" pitchFamily="34" charset="-122"/>
                           <a:cs typeface="맑은 고딕" pitchFamily="34" charset="-120"/>
                         </a:rPr>
-                        <a:t>MUFY 약 800만</a:t>
+                        <a:t>1,288만</a:t>
                       </a:r>
-                      <a:endParaRPr lang="en-US" sz="1050" dirty="0">
+                      <a:endParaRPr lang="en-US" sz="1000" dirty="0">
                         <a:latin typeface="맑은 고딕" charset="0"/>
                         <a:ea typeface="맑은 고딕" charset="0"/>
                         <a:cs typeface="맑은 고딕" charset="0"/>
@@ -5544,7 +5718,7 @@
                         <a:buNone/>
                       </a:pPr>
                       <a:r>
-                        <a:rPr lang="en-US" sz="1050" dirty="0">
+                        <a:rPr lang="en-US" sz="1000" dirty="0">
                           <a:solidFill>
                             <a:srgbClr val="1B2426"/>
                           </a:solidFill>
@@ -5552,9 +5726,9 @@
                           <a:ea typeface="맑은 고딕" pitchFamily="34" charset="-122"/>
                           <a:cs typeface="맑은 고딕" pitchFamily="34" charset="-120"/>
                         </a:rPr>
-                        <a:t>파운데이션 약 1,288만</a:t>
+                        <a:t>800만</a:t>
                       </a:r>
-                      <a:endParaRPr lang="en-US" sz="1050" dirty="0">
+                      <a:endParaRPr lang="en-US" sz="1000" dirty="0">
                         <a:latin typeface="맑은 고딕" charset="0"/>
                         <a:ea typeface="맑은 고딕" charset="0"/>
                         <a:cs typeface="맑은 고딕" charset="0"/>
@@ -5603,8 +5777,6 @@
                     </a:solidFill>
                   </a:tcPr>
                 </a:tc>
-              </a:tr>
-              <a:tr h="384048">
                 <a:tc>
                   <a:txBody>
                     <a:bodyPr/>
@@ -5614,7 +5786,7 @@
                         <a:buNone/>
                       </a:pPr>
                       <a:r>
-                        <a:rPr lang="en-US" sz="1050" dirty="0">
+                        <a:rPr lang="en-US" sz="1000" dirty="0">
                           <a:solidFill>
                             <a:srgbClr val="1B2426"/>
                           </a:solidFill>
@@ -5622,9 +5794,79 @@
                           <a:ea typeface="맑은 고딕" pitchFamily="34" charset="-122"/>
                           <a:cs typeface="맑은 고딕" pitchFamily="34" charset="-120"/>
                         </a:rPr>
-                        <a:t>2년차 이후 학비 (학부)</a:t>
+                        <a:t>1,288만</a:t>
                       </a:r>
-                      <a:endParaRPr lang="en-US" sz="1050" dirty="0">
+                      <a:endParaRPr lang="en-US" sz="1000" dirty="0">
+                        <a:latin typeface="맑은 고딕" charset="0"/>
+                        <a:ea typeface="맑은 고딕" charset="0"/>
+                        <a:cs typeface="맑은 고딕" charset="0"/>
+                      </a:endParaRPr>
+                    </a:p>
+                  </a:txBody>
+                  <a:tcPr marL="88900" marR="88900" marT="50800" marB="50800" anchor="ctr">
+                    <a:lnL w="6350" cap="flat" cmpd="sng" algn="ctr">
+                      <a:solidFill>
+                        <a:srgbClr val="DCD6C9"/>
+                      </a:solidFill>
+                      <a:prstDash val="solid"/>
+                      <a:round/>
+                      <a:headEnd type="none" w="med" len="med"/>
+                      <a:tailEnd type="none" w="med" len="med"/>
+                    </a:lnL>
+                    <a:lnR w="6350" cap="flat" cmpd="sng" algn="ctr">
+                      <a:solidFill>
+                        <a:srgbClr val="DCD6C9"/>
+                      </a:solidFill>
+                      <a:prstDash val="solid"/>
+                      <a:round/>
+                      <a:headEnd type="none" w="med" len="med"/>
+                      <a:tailEnd type="none" w="med" len="med"/>
+                    </a:lnR>
+                    <a:lnT w="6350" cap="flat" cmpd="sng" algn="ctr">
+                      <a:solidFill>
+                        <a:srgbClr val="DCD6C9"/>
+                      </a:solidFill>
+                      <a:prstDash val="solid"/>
+                      <a:round/>
+                      <a:headEnd type="none" w="med" len="med"/>
+                      <a:tailEnd type="none" w="med" len="med"/>
+                    </a:lnT>
+                    <a:lnB w="6350" cap="flat" cmpd="sng" algn="ctr">
+                      <a:solidFill>
+                        <a:srgbClr val="DCD6C9"/>
+                      </a:solidFill>
+                      <a:prstDash val="solid"/>
+                      <a:round/>
+                      <a:headEnd type="none" w="med" len="med"/>
+                      <a:tailEnd type="none" w="med" len="med"/>
+                    </a:lnB>
+                    <a:solidFill>
+                      <a:srgbClr val="FFFFFF"/>
+                    </a:solidFill>
+                  </a:tcPr>
+                </a:tc>
+              </a:tr>
+              <a:tr h="365760">
+                <a:tc>
+                  <a:txBody>
+                    <a:bodyPr/>
+                    <a:lstStyle/>
+                    <a:p>
+                      <a:pPr indent="0" marL="0">
+                        <a:buNone/>
+                      </a:pPr>
+                      <a:r>
+                        <a:rPr lang="en-US" sz="1000" dirty="0">
+                          <a:solidFill>
+                            <a:srgbClr val="1B2426"/>
+                          </a:solidFill>
+                          <a:latin typeface="맑은 고딕" pitchFamily="34" charset="0"/>
+                          <a:ea typeface="맑은 고딕" pitchFamily="34" charset="-122"/>
+                          <a:cs typeface="맑은 고딕" pitchFamily="34" charset="-120"/>
+                        </a:rPr>
+                        <a:t>2년차 이후 학비 (학부, 연)</a:t>
+                      </a:r>
+                      <a:endParaRPr lang="en-US" sz="1000" dirty="0">
                         <a:latin typeface="맑은 고딕" charset="0"/>
                         <a:ea typeface="맑은 고딕" charset="0"/>
                         <a:cs typeface="맑은 고딕" charset="0"/>
@@ -5682,7 +5924,7 @@
                         <a:buNone/>
                       </a:pPr>
                       <a:r>
-                        <a:rPr lang="en-US" sz="1050" dirty="0">
+                        <a:rPr lang="en-US" sz="1000" dirty="0">
                           <a:solidFill>
                             <a:srgbClr val="1B2426"/>
                           </a:solidFill>
@@ -5690,9 +5932,9 @@
                           <a:ea typeface="맑은 고딕" pitchFamily="34" charset="-122"/>
                           <a:cs typeface="맑은 고딕" pitchFamily="34" charset="-120"/>
                         </a:rPr>
-                        <a:t>약 1,741만 / 년</a:t>
+                        <a:t>1,741만</a:t>
                       </a:r>
-                      <a:endParaRPr lang="en-US" sz="1050" dirty="0">
+                      <a:endParaRPr lang="en-US" sz="1000" dirty="0">
                         <a:latin typeface="맑은 고딕" charset="0"/>
                         <a:ea typeface="맑은 고딕" charset="0"/>
                         <a:cs typeface="맑은 고딕" charset="0"/>
@@ -5750,7 +5992,7 @@
                         <a:buNone/>
                       </a:pPr>
                       <a:r>
-                        <a:rPr lang="en-US" sz="1050" dirty="0">
+                        <a:rPr lang="en-US" sz="1000" dirty="0">
                           <a:solidFill>
                             <a:srgbClr val="1B2426"/>
                           </a:solidFill>
@@ -5758,9 +6000,9 @@
                           <a:ea typeface="맑은 고딕" pitchFamily="34" charset="-122"/>
                           <a:cs typeface="맑은 고딕" pitchFamily="34" charset="-120"/>
                         </a:rPr>
-                        <a:t>약 1,865만 / 년</a:t>
+                        <a:t>1,741만</a:t>
                       </a:r>
-                      <a:endParaRPr lang="en-US" sz="1050" dirty="0">
+                      <a:endParaRPr lang="en-US" sz="1000" dirty="0">
                         <a:latin typeface="맑은 고딕" charset="0"/>
                         <a:ea typeface="맑은 고딕" charset="0"/>
                         <a:cs typeface="맑은 고딕" charset="0"/>
@@ -5818,7 +6060,7 @@
                         <a:buNone/>
                       </a:pPr>
                       <a:r>
-                        <a:rPr lang="en-US" sz="1050" dirty="0">
+                        <a:rPr lang="en-US" sz="1000" dirty="0">
                           <a:solidFill>
                             <a:srgbClr val="1B2426"/>
                           </a:solidFill>
@@ -5826,9 +6068,9 @@
                           <a:ea typeface="맑은 고딕" pitchFamily="34" charset="-122"/>
                           <a:cs typeface="맑은 고딕" pitchFamily="34" charset="-120"/>
                         </a:rPr>
-                        <a:t>약 2,311만 / 년</a:t>
+                        <a:t>1,865만</a:t>
                       </a:r>
-                      <a:endParaRPr lang="en-US" sz="1050" dirty="0">
+                      <a:endParaRPr lang="en-US" sz="1000" dirty="0">
                         <a:latin typeface="맑은 고딕" charset="0"/>
                         <a:ea typeface="맑은 고딕" charset="0"/>
                         <a:cs typeface="맑은 고딕" charset="0"/>
@@ -5886,7 +6128,7 @@
                         <a:buNone/>
                       </a:pPr>
                       <a:r>
-                        <a:rPr lang="en-US" sz="1050" dirty="0">
+                        <a:rPr lang="en-US" sz="1000" dirty="0">
                           <a:solidFill>
                             <a:srgbClr val="1B2426"/>
                           </a:solidFill>
@@ -5894,9 +6136,9 @@
                           <a:ea typeface="맑은 고딕" pitchFamily="34" charset="-122"/>
                           <a:cs typeface="맑은 고딕" pitchFamily="34" charset="-120"/>
                         </a:rPr>
-                        <a:t>약 2,271만 / 년</a:t>
+                        <a:t>2,311만</a:t>
                       </a:r>
-                      <a:endParaRPr lang="en-US" sz="1050" dirty="0">
+                      <a:endParaRPr lang="en-US" sz="1000" dirty="0">
                         <a:latin typeface="맑은 고딕" charset="0"/>
                         <a:ea typeface="맑은 고딕" charset="0"/>
                         <a:cs typeface="맑은 고딕" charset="0"/>
@@ -5945,8 +6187,6 @@
                     </a:solidFill>
                   </a:tcPr>
                 </a:tc>
-              </a:tr>
-              <a:tr h="384048">
                 <a:tc>
                   <a:txBody>
                     <a:bodyPr/>
@@ -5956,7 +6196,7 @@
                         <a:buNone/>
                       </a:pPr>
                       <a:r>
-                        <a:rPr lang="en-US" sz="1050" dirty="0">
+                        <a:rPr lang="en-US" sz="1000" dirty="0">
                           <a:solidFill>
                             <a:srgbClr val="1B2426"/>
                           </a:solidFill>
@@ -5964,9 +6204,79 @@
                           <a:ea typeface="맑은 고딕" pitchFamily="34" charset="-122"/>
                           <a:cs typeface="맑은 고딕" pitchFamily="34" charset="-120"/>
                         </a:rPr>
-                        <a:t>학생비자 갱신</a:t>
+                        <a:t>2,271만</a:t>
                       </a:r>
-                      <a:endParaRPr lang="en-US" sz="1050" dirty="0">
+                      <a:endParaRPr lang="en-US" sz="1000" dirty="0">
+                        <a:latin typeface="맑은 고딕" charset="0"/>
+                        <a:ea typeface="맑은 고딕" charset="0"/>
+                        <a:cs typeface="맑은 고딕" charset="0"/>
+                      </a:endParaRPr>
+                    </a:p>
+                  </a:txBody>
+                  <a:tcPr marL="88900" marR="88900" marT="50800" marB="50800" anchor="ctr">
+                    <a:lnL w="6350" cap="flat" cmpd="sng" algn="ctr">
+                      <a:solidFill>
+                        <a:srgbClr val="DCD6C9"/>
+                      </a:solidFill>
+                      <a:prstDash val="solid"/>
+                      <a:round/>
+                      <a:headEnd type="none" w="med" len="med"/>
+                      <a:tailEnd type="none" w="med" len="med"/>
+                    </a:lnL>
+                    <a:lnR w="6350" cap="flat" cmpd="sng" algn="ctr">
+                      <a:solidFill>
+                        <a:srgbClr val="DCD6C9"/>
+                      </a:solidFill>
+                      <a:prstDash val="solid"/>
+                      <a:round/>
+                      <a:headEnd type="none" w="med" len="med"/>
+                      <a:tailEnd type="none" w="med" len="med"/>
+                    </a:lnR>
+                    <a:lnT w="6350" cap="flat" cmpd="sng" algn="ctr">
+                      <a:solidFill>
+                        <a:srgbClr val="DCD6C9"/>
+                      </a:solidFill>
+                      <a:prstDash val="solid"/>
+                      <a:round/>
+                      <a:headEnd type="none" w="med" len="med"/>
+                      <a:tailEnd type="none" w="med" len="med"/>
+                    </a:lnT>
+                    <a:lnB w="6350" cap="flat" cmpd="sng" algn="ctr">
+                      <a:solidFill>
+                        <a:srgbClr val="DCD6C9"/>
+                      </a:solidFill>
+                      <a:prstDash val="solid"/>
+                      <a:round/>
+                      <a:headEnd type="none" w="med" len="med"/>
+                      <a:tailEnd type="none" w="med" len="med"/>
+                    </a:lnB>
+                    <a:solidFill>
+                      <a:srgbClr val="F1EDE4"/>
+                    </a:solidFill>
+                  </a:tcPr>
+                </a:tc>
+              </a:tr>
+              <a:tr h="365760">
+                <a:tc>
+                  <a:txBody>
+                    <a:bodyPr/>
+                    <a:lstStyle/>
+                    <a:p>
+                      <a:pPr indent="0" marL="0">
+                        <a:buNone/>
+                      </a:pPr>
+                      <a:r>
+                        <a:rPr lang="en-US" sz="1000" dirty="0">
+                          <a:solidFill>
+                            <a:srgbClr val="1B2426"/>
+                          </a:solidFill>
+                          <a:latin typeface="맑은 고딕" pitchFamily="34" charset="0"/>
+                          <a:ea typeface="맑은 고딕" pitchFamily="34" charset="-122"/>
+                          <a:cs typeface="맑은 고딕" pitchFamily="34" charset="-120"/>
+                        </a:rPr>
+                        <a:t>학생비자 갱신 (연)</a:t>
+                      </a:r>
+                      <a:endParaRPr lang="en-US" sz="1000" dirty="0">
                         <a:latin typeface="맑은 고딕" charset="0"/>
                         <a:ea typeface="맑은 고딕" charset="0"/>
                         <a:cs typeface="맑은 고딕" charset="0"/>
@@ -6024,7 +6334,7 @@
                         <a:buNone/>
                       </a:pPr>
                       <a:r>
-                        <a:rPr lang="en-US" sz="1050" dirty="0">
+                        <a:rPr lang="en-US" sz="1000" dirty="0">
                           <a:solidFill>
                             <a:srgbClr val="1B2426"/>
                           </a:solidFill>
@@ -6032,9 +6342,9 @@
                           <a:ea typeface="맑은 고딕" pitchFamily="34" charset="-122"/>
                           <a:cs typeface="맑은 고딕" pitchFamily="34" charset="-120"/>
                         </a:rPr>
-                        <a:t>약 140만 / 년</a:t>
+                        <a:t>140만</a:t>
                       </a:r>
-                      <a:endParaRPr lang="en-US" sz="1050" dirty="0">
+                      <a:endParaRPr lang="en-US" sz="1000" dirty="0">
                         <a:latin typeface="맑은 고딕" charset="0"/>
                         <a:ea typeface="맑은 고딕" charset="0"/>
                         <a:cs typeface="맑은 고딕" charset="0"/>
@@ -6092,7 +6402,7 @@
                         <a:buNone/>
                       </a:pPr>
                       <a:r>
-                        <a:rPr lang="en-US" sz="1050" dirty="0">
+                        <a:rPr lang="en-US" sz="1000" dirty="0">
                           <a:solidFill>
                             <a:srgbClr val="1B2426"/>
                           </a:solidFill>
@@ -6100,9 +6410,9 @@
                           <a:ea typeface="맑은 고딕" pitchFamily="34" charset="-122"/>
                           <a:cs typeface="맑은 고딕" pitchFamily="34" charset="-120"/>
                         </a:rPr>
-                        <a:t>약 140만 / 년</a:t>
+                        <a:t>140만</a:t>
                       </a:r>
-                      <a:endParaRPr lang="en-US" sz="1050" dirty="0">
+                      <a:endParaRPr lang="en-US" sz="1000" dirty="0">
                         <a:latin typeface="맑은 고딕" charset="0"/>
                         <a:ea typeface="맑은 고딕" charset="0"/>
                         <a:cs typeface="맑은 고딕" charset="0"/>
@@ -6160,7 +6470,7 @@
                         <a:buNone/>
                       </a:pPr>
                       <a:r>
-                        <a:rPr lang="en-US" sz="1050" dirty="0">
+                        <a:rPr lang="en-US" sz="1000" dirty="0">
                           <a:solidFill>
                             <a:srgbClr val="1B2426"/>
                           </a:solidFill>
@@ -6168,9 +6478,9 @@
                           <a:ea typeface="맑은 고딕" pitchFamily="34" charset="-122"/>
                           <a:cs typeface="맑은 고딕" pitchFamily="34" charset="-120"/>
                         </a:rPr>
-                        <a:t>약 140만 / 년</a:t>
+                        <a:t>140만</a:t>
                       </a:r>
-                      <a:endParaRPr lang="en-US" sz="1050" dirty="0">
+                      <a:endParaRPr lang="en-US" sz="1000" dirty="0">
                         <a:latin typeface="맑은 고딕" charset="0"/>
                         <a:ea typeface="맑은 고딕" charset="0"/>
                         <a:cs typeface="맑은 고딕" charset="0"/>
@@ -6228,7 +6538,7 @@
                         <a:buNone/>
                       </a:pPr>
                       <a:r>
-                        <a:rPr lang="en-US" sz="1050" dirty="0">
+                        <a:rPr lang="en-US" sz="1000" dirty="0">
                           <a:solidFill>
                             <a:srgbClr val="1B2426"/>
                           </a:solidFill>
@@ -6236,9 +6546,9 @@
                           <a:ea typeface="맑은 고딕" pitchFamily="34" charset="-122"/>
                           <a:cs typeface="맑은 고딕" pitchFamily="34" charset="-120"/>
                         </a:rPr>
-                        <a:t>약 140만 / 년</a:t>
+                        <a:t>140만</a:t>
                       </a:r>
-                      <a:endParaRPr lang="en-US" sz="1050" dirty="0">
+                      <a:endParaRPr lang="en-US" sz="1000" dirty="0">
                         <a:latin typeface="맑은 고딕" charset="0"/>
                         <a:ea typeface="맑은 고딕" charset="0"/>
                         <a:cs typeface="맑은 고딕" charset="0"/>
@@ -6287,8 +6597,6 @@
                     </a:solidFill>
                   </a:tcPr>
                 </a:tc>
-              </a:tr>
-              <a:tr h="384048">
                 <a:tc>
                   <a:txBody>
                     <a:bodyPr/>
@@ -6298,7 +6606,7 @@
                         <a:buNone/>
                       </a:pPr>
                       <a:r>
-                        <a:rPr lang="en-US" sz="1050" dirty="0">
+                        <a:rPr lang="en-US" sz="1000" dirty="0">
                           <a:solidFill>
                             <a:srgbClr val="1B2426"/>
                           </a:solidFill>
@@ -6306,9 +6614,79 @@
                           <a:ea typeface="맑은 고딕" pitchFamily="34" charset="-122"/>
                           <a:cs typeface="맑은 고딕" pitchFamily="34" charset="-120"/>
                         </a:rPr>
-                        <a:t>IM 공동체 운영비</a:t>
+                        <a:t>140만</a:t>
                       </a:r>
-                      <a:endParaRPr lang="en-US" sz="1050" dirty="0">
+                      <a:endParaRPr lang="en-US" sz="1000" dirty="0">
+                        <a:latin typeface="맑은 고딕" charset="0"/>
+                        <a:ea typeface="맑은 고딕" charset="0"/>
+                        <a:cs typeface="맑은 고딕" charset="0"/>
+                      </a:endParaRPr>
+                    </a:p>
+                  </a:txBody>
+                  <a:tcPr marL="88900" marR="88900" marT="50800" marB="50800" anchor="ctr">
+                    <a:lnL w="6350" cap="flat" cmpd="sng" algn="ctr">
+                      <a:solidFill>
+                        <a:srgbClr val="DCD6C9"/>
+                      </a:solidFill>
+                      <a:prstDash val="solid"/>
+                      <a:round/>
+                      <a:headEnd type="none" w="med" len="med"/>
+                      <a:tailEnd type="none" w="med" len="med"/>
+                    </a:lnL>
+                    <a:lnR w="6350" cap="flat" cmpd="sng" algn="ctr">
+                      <a:solidFill>
+                        <a:srgbClr val="DCD6C9"/>
+                      </a:solidFill>
+                      <a:prstDash val="solid"/>
+                      <a:round/>
+                      <a:headEnd type="none" w="med" len="med"/>
+                      <a:tailEnd type="none" w="med" len="med"/>
+                    </a:lnR>
+                    <a:lnT w="6350" cap="flat" cmpd="sng" algn="ctr">
+                      <a:solidFill>
+                        <a:srgbClr val="DCD6C9"/>
+                      </a:solidFill>
+                      <a:prstDash val="solid"/>
+                      <a:round/>
+                      <a:headEnd type="none" w="med" len="med"/>
+                      <a:tailEnd type="none" w="med" len="med"/>
+                    </a:lnT>
+                    <a:lnB w="6350" cap="flat" cmpd="sng" algn="ctr">
+                      <a:solidFill>
+                        <a:srgbClr val="DCD6C9"/>
+                      </a:solidFill>
+                      <a:prstDash val="solid"/>
+                      <a:round/>
+                      <a:headEnd type="none" w="med" len="med"/>
+                      <a:tailEnd type="none" w="med" len="med"/>
+                    </a:lnB>
+                    <a:solidFill>
+                      <a:srgbClr val="FFFFFF"/>
+                    </a:solidFill>
+                  </a:tcPr>
+                </a:tc>
+              </a:tr>
+              <a:tr h="365760">
+                <a:tc>
+                  <a:txBody>
+                    <a:bodyPr/>
+                    <a:lstStyle/>
+                    <a:p>
+                      <a:pPr indent="0" marL="0">
+                        <a:buNone/>
+                      </a:pPr>
+                      <a:r>
+                        <a:rPr lang="en-US" sz="1000" dirty="0">
+                          <a:solidFill>
+                            <a:srgbClr val="1B2426"/>
+                          </a:solidFill>
+                          <a:latin typeface="맑은 고딕" pitchFamily="34" charset="0"/>
+                          <a:ea typeface="맑은 고딕" pitchFamily="34" charset="-122"/>
+                          <a:cs typeface="맑은 고딕" pitchFamily="34" charset="-120"/>
+                        </a:rPr>
+                        <a:t>IM 공동체 운영비 (연)</a:t>
+                      </a:r>
+                      <a:endParaRPr lang="en-US" sz="1000" dirty="0">
                         <a:latin typeface="맑은 고딕" charset="0"/>
                         <a:ea typeface="맑은 고딕" charset="0"/>
                         <a:cs typeface="맑은 고딕" charset="0"/>
@@ -6366,7 +6744,7 @@
                         <a:buNone/>
                       </a:pPr>
                       <a:r>
-                        <a:rPr lang="en-US" sz="1050" dirty="0">
+                        <a:rPr lang="en-US" sz="1000" dirty="0">
                           <a:solidFill>
                             <a:srgbClr val="1B2426"/>
                           </a:solidFill>
@@ -6374,9 +6752,9 @@
                           <a:ea typeface="맑은 고딕" pitchFamily="34" charset="-122"/>
                           <a:cs typeface="맑은 고딕" pitchFamily="34" charset="-120"/>
                         </a:rPr>
-                        <a:t>1,440만 / 년 (120×12)</a:t>
+                        <a:t>1,440만</a:t>
                       </a:r>
-                      <a:endParaRPr lang="en-US" sz="1050" dirty="0">
+                      <a:endParaRPr lang="en-US" sz="1000" dirty="0">
                         <a:latin typeface="맑은 고딕" charset="0"/>
                         <a:ea typeface="맑은 고딕" charset="0"/>
                         <a:cs typeface="맑은 고딕" charset="0"/>
@@ -6434,7 +6812,7 @@
                         <a:buNone/>
                       </a:pPr>
                       <a:r>
-                        <a:rPr lang="en-US" sz="1050" dirty="0">
+                        <a:rPr lang="en-US" sz="1000" dirty="0">
                           <a:solidFill>
                             <a:srgbClr val="1B2426"/>
                           </a:solidFill>
@@ -6442,9 +6820,9 @@
                           <a:ea typeface="맑은 고딕" pitchFamily="34" charset="-122"/>
                           <a:cs typeface="맑은 고딕" pitchFamily="34" charset="-120"/>
                         </a:rPr>
-                        <a:t>1,440만 / 년 (120×12)</a:t>
+                        <a:t>1,440만</a:t>
                       </a:r>
-                      <a:endParaRPr lang="en-US" sz="1050" dirty="0">
+                      <a:endParaRPr lang="en-US" sz="1000" dirty="0">
                         <a:latin typeface="맑은 고딕" charset="0"/>
                         <a:ea typeface="맑은 고딕" charset="0"/>
                         <a:cs typeface="맑은 고딕" charset="0"/>
@@ -6502,7 +6880,7 @@
                         <a:buNone/>
                       </a:pPr>
                       <a:r>
-                        <a:rPr lang="en-US" sz="1050" dirty="0">
+                        <a:rPr lang="en-US" sz="1000" dirty="0">
                           <a:solidFill>
                             <a:srgbClr val="1B2426"/>
                           </a:solidFill>
@@ -6510,9 +6888,9 @@
                           <a:ea typeface="맑은 고딕" pitchFamily="34" charset="-122"/>
                           <a:cs typeface="맑은 고딕" pitchFamily="34" charset="-120"/>
                         </a:rPr>
-                        <a:t>1,440만 / 년 (120×12)</a:t>
+                        <a:t>1,440만</a:t>
                       </a:r>
-                      <a:endParaRPr lang="en-US" sz="1050" dirty="0">
+                      <a:endParaRPr lang="en-US" sz="1000" dirty="0">
                         <a:latin typeface="맑은 고딕" charset="0"/>
                         <a:ea typeface="맑은 고딕" charset="0"/>
                         <a:cs typeface="맑은 고딕" charset="0"/>
@@ -6570,7 +6948,7 @@
                         <a:buNone/>
                       </a:pPr>
                       <a:r>
-                        <a:rPr lang="en-US" sz="1050" dirty="0">
+                        <a:rPr lang="en-US" sz="1000" dirty="0">
                           <a:solidFill>
                             <a:srgbClr val="1B2426"/>
                           </a:solidFill>
@@ -6578,9 +6956,9 @@
                           <a:ea typeface="맑은 고딕" pitchFamily="34" charset="-122"/>
                           <a:cs typeface="맑은 고딕" pitchFamily="34" charset="-120"/>
                         </a:rPr>
-                        <a:t>1,440만 / 년 (120×12)</a:t>
+                        <a:t>1,440만</a:t>
                       </a:r>
-                      <a:endParaRPr lang="en-US" sz="1050" dirty="0">
+                      <a:endParaRPr lang="en-US" sz="1000" dirty="0">
                         <a:latin typeface="맑은 고딕" charset="0"/>
                         <a:ea typeface="맑은 고딕" charset="0"/>
                         <a:cs typeface="맑은 고딕" charset="0"/>
@@ -6629,8 +7007,6 @@
                     </a:solidFill>
                   </a:tcPr>
                 </a:tc>
-              </a:tr>
-              <a:tr h="384048">
                 <a:tc>
                   <a:txBody>
                     <a:bodyPr/>
@@ -6640,7 +7016,77 @@
                         <a:buNone/>
                       </a:pPr>
                       <a:r>
-                        <a:rPr lang="en-US" sz="1050" dirty="0">
+                        <a:rPr lang="en-US" sz="1000" dirty="0">
+                          <a:solidFill>
+                            <a:srgbClr val="1B2426"/>
+                          </a:solidFill>
+                          <a:latin typeface="맑은 고딕" pitchFamily="34" charset="0"/>
+                          <a:ea typeface="맑은 고딕" pitchFamily="34" charset="-122"/>
+                          <a:cs typeface="맑은 고딕" pitchFamily="34" charset="-120"/>
+                        </a:rPr>
+                        <a:t>1,440만</a:t>
+                      </a:r>
+                      <a:endParaRPr lang="en-US" sz="1000" dirty="0">
+                        <a:latin typeface="맑은 고딕" charset="0"/>
+                        <a:ea typeface="맑은 고딕" charset="0"/>
+                        <a:cs typeface="맑은 고딕" charset="0"/>
+                      </a:endParaRPr>
+                    </a:p>
+                  </a:txBody>
+                  <a:tcPr marL="88900" marR="88900" marT="50800" marB="50800" anchor="ctr">
+                    <a:lnL w="6350" cap="flat" cmpd="sng" algn="ctr">
+                      <a:solidFill>
+                        <a:srgbClr val="DCD6C9"/>
+                      </a:solidFill>
+                      <a:prstDash val="solid"/>
+                      <a:round/>
+                      <a:headEnd type="none" w="med" len="med"/>
+                      <a:tailEnd type="none" w="med" len="med"/>
+                    </a:lnL>
+                    <a:lnR w="6350" cap="flat" cmpd="sng" algn="ctr">
+                      <a:solidFill>
+                        <a:srgbClr val="DCD6C9"/>
+                      </a:solidFill>
+                      <a:prstDash val="solid"/>
+                      <a:round/>
+                      <a:headEnd type="none" w="med" len="med"/>
+                      <a:tailEnd type="none" w="med" len="med"/>
+                    </a:lnR>
+                    <a:lnT w="6350" cap="flat" cmpd="sng" algn="ctr">
+                      <a:solidFill>
+                        <a:srgbClr val="DCD6C9"/>
+                      </a:solidFill>
+                      <a:prstDash val="solid"/>
+                      <a:round/>
+                      <a:headEnd type="none" w="med" len="med"/>
+                      <a:tailEnd type="none" w="med" len="med"/>
+                    </a:lnT>
+                    <a:lnB w="6350" cap="flat" cmpd="sng" algn="ctr">
+                      <a:solidFill>
+                        <a:srgbClr val="DCD6C9"/>
+                      </a:solidFill>
+                      <a:prstDash val="solid"/>
+                      <a:round/>
+                      <a:headEnd type="none" w="med" len="med"/>
+                      <a:tailEnd type="none" w="med" len="med"/>
+                    </a:lnB>
+                    <a:solidFill>
+                      <a:srgbClr val="F1EDE4"/>
+                    </a:solidFill>
+                  </a:tcPr>
+                </a:tc>
+              </a:tr>
+              <a:tr h="365760">
+                <a:tc>
+                  <a:txBody>
+                    <a:bodyPr/>
+                    <a:lstStyle/>
+                    <a:p>
+                      <a:pPr indent="0" marL="0">
+                        <a:buNone/>
+                      </a:pPr>
+                      <a:r>
+                        <a:rPr lang="en-US" sz="1000" dirty="0">
                           <a:solidFill>
                             <a:srgbClr val="1B2426"/>
                           </a:solidFill>
@@ -6650,7 +7096,7 @@
                         </a:rPr>
                         <a:t>입학비 — 입회 시 1회</a:t>
                       </a:r>
-                      <a:endParaRPr lang="en-US" sz="1050" dirty="0">
+                      <a:endParaRPr lang="en-US" sz="1000" dirty="0">
                         <a:latin typeface="맑은 고딕" charset="0"/>
                         <a:ea typeface="맑은 고딕" charset="0"/>
                         <a:cs typeface="맑은 고딕" charset="0"/>
@@ -6708,7 +7154,7 @@
                         <a:buNone/>
                       </a:pPr>
                       <a:r>
-                        <a:rPr lang="en-US" sz="1050" dirty="0">
+                        <a:rPr lang="en-US" sz="1000" dirty="0">
                           <a:solidFill>
                             <a:srgbClr val="1B2426"/>
                           </a:solidFill>
@@ -6718,7 +7164,7 @@
                         </a:rPr>
                         <a:t>500만</a:t>
                       </a:r>
-                      <a:endParaRPr lang="en-US" sz="1050" dirty="0">
+                      <a:endParaRPr lang="en-US" sz="1000" dirty="0">
                         <a:latin typeface="맑은 고딕" charset="0"/>
                         <a:ea typeface="맑은 고딕" charset="0"/>
                         <a:cs typeface="맑은 고딕" charset="0"/>
@@ -6776,7 +7222,7 @@
                         <a:buNone/>
                       </a:pPr>
                       <a:r>
-                        <a:rPr lang="en-US" sz="1050" dirty="0">
+                        <a:rPr lang="en-US" sz="1000" dirty="0">
                           <a:solidFill>
                             <a:srgbClr val="1B2426"/>
                           </a:solidFill>
@@ -6786,7 +7232,7 @@
                         </a:rPr>
                         <a:t>500만</a:t>
                       </a:r>
-                      <a:endParaRPr lang="en-US" sz="1050" dirty="0">
+                      <a:endParaRPr lang="en-US" sz="1000" dirty="0">
                         <a:latin typeface="맑은 고딕" charset="0"/>
                         <a:ea typeface="맑은 고딕" charset="0"/>
                         <a:cs typeface="맑은 고딕" charset="0"/>
@@ -6844,7 +7290,7 @@
                         <a:buNone/>
                       </a:pPr>
                       <a:r>
-                        <a:rPr lang="en-US" sz="1050" dirty="0">
+                        <a:rPr lang="en-US" sz="1000" dirty="0">
                           <a:solidFill>
                             <a:srgbClr val="1B2426"/>
                           </a:solidFill>
@@ -6854,7 +7300,7 @@
                         </a:rPr>
                         <a:t>500만</a:t>
                       </a:r>
-                      <a:endParaRPr lang="en-US" sz="1050" dirty="0">
+                      <a:endParaRPr lang="en-US" sz="1000" dirty="0">
                         <a:latin typeface="맑은 고딕" charset="0"/>
                         <a:ea typeface="맑은 고딕" charset="0"/>
                         <a:cs typeface="맑은 고딕" charset="0"/>
@@ -6912,7 +7358,7 @@
                         <a:buNone/>
                       </a:pPr>
                       <a:r>
-                        <a:rPr lang="en-US" sz="1050" dirty="0">
+                        <a:rPr lang="en-US" sz="1000" dirty="0">
                           <a:solidFill>
                             <a:srgbClr val="1B2426"/>
                           </a:solidFill>
@@ -6922,7 +7368,7 @@
                         </a:rPr>
                         <a:t>500만</a:t>
                       </a:r>
-                      <a:endParaRPr lang="en-US" sz="1050" dirty="0">
+                      <a:endParaRPr lang="en-US" sz="1000" dirty="0">
                         <a:latin typeface="맑은 고딕" charset="0"/>
                         <a:ea typeface="맑은 고딕" charset="0"/>
                         <a:cs typeface="맑은 고딕" charset="0"/>
@@ -6971,8 +7417,6 @@
                     </a:solidFill>
                   </a:tcPr>
                 </a:tc>
-              </a:tr>
-              <a:tr h="384048">
                 <a:tc>
                   <a:txBody>
                     <a:bodyPr/>
@@ -6982,7 +7426,77 @@
                         <a:buNone/>
                       </a:pPr>
                       <a:r>
-                        <a:rPr lang="en-US" sz="1050" dirty="0">
+                        <a:rPr lang="en-US" sz="1000" dirty="0">
+                          <a:solidFill>
+                            <a:srgbClr val="1B2426"/>
+                          </a:solidFill>
+                          <a:latin typeface="맑은 고딕" pitchFamily="34" charset="0"/>
+                          <a:ea typeface="맑은 고딕" pitchFamily="34" charset="-122"/>
+                          <a:cs typeface="맑은 고딕" pitchFamily="34" charset="-120"/>
+                        </a:rPr>
+                        <a:t>500만</a:t>
+                      </a:r>
+                      <a:endParaRPr lang="en-US" sz="1000" dirty="0">
+                        <a:latin typeface="맑은 고딕" charset="0"/>
+                        <a:ea typeface="맑은 고딕" charset="0"/>
+                        <a:cs typeface="맑은 고딕" charset="0"/>
+                      </a:endParaRPr>
+                    </a:p>
+                  </a:txBody>
+                  <a:tcPr marL="88900" marR="88900" marT="50800" marB="50800" anchor="ctr">
+                    <a:lnL w="6350" cap="flat" cmpd="sng" algn="ctr">
+                      <a:solidFill>
+                        <a:srgbClr val="DCD6C9"/>
+                      </a:solidFill>
+                      <a:prstDash val="solid"/>
+                      <a:round/>
+                      <a:headEnd type="none" w="med" len="med"/>
+                      <a:tailEnd type="none" w="med" len="med"/>
+                    </a:lnL>
+                    <a:lnR w="6350" cap="flat" cmpd="sng" algn="ctr">
+                      <a:solidFill>
+                        <a:srgbClr val="DCD6C9"/>
+                      </a:solidFill>
+                      <a:prstDash val="solid"/>
+                      <a:round/>
+                      <a:headEnd type="none" w="med" len="med"/>
+                      <a:tailEnd type="none" w="med" len="med"/>
+                    </a:lnR>
+                    <a:lnT w="6350" cap="flat" cmpd="sng" algn="ctr">
+                      <a:solidFill>
+                        <a:srgbClr val="DCD6C9"/>
+                      </a:solidFill>
+                      <a:prstDash val="solid"/>
+                      <a:round/>
+                      <a:headEnd type="none" w="med" len="med"/>
+                      <a:tailEnd type="none" w="med" len="med"/>
+                    </a:lnT>
+                    <a:lnB w="6350" cap="flat" cmpd="sng" algn="ctr">
+                      <a:solidFill>
+                        <a:srgbClr val="DCD6C9"/>
+                      </a:solidFill>
+                      <a:prstDash val="solid"/>
+                      <a:round/>
+                      <a:headEnd type="none" w="med" len="med"/>
+                      <a:tailEnd type="none" w="med" len="med"/>
+                    </a:lnB>
+                    <a:solidFill>
+                      <a:srgbClr val="FFFFFF"/>
+                    </a:solidFill>
+                  </a:tcPr>
+                </a:tc>
+              </a:tr>
+              <a:tr h="365760">
+                <a:tc>
+                  <a:txBody>
+                    <a:bodyPr/>
+                    <a:lstStyle/>
+                    <a:p>
+                      <a:pPr indent="0" marL="0">
+                        <a:buNone/>
+                      </a:pPr>
+                      <a:r>
+                        <a:rPr lang="en-US" sz="1000" dirty="0">
                           <a:solidFill>
                             <a:srgbClr val="1B2426"/>
                           </a:solidFill>
@@ -6992,7 +7506,7 @@
                         </a:rPr>
                         <a:t>1년차 소계 (입학비 제외)</a:t>
                       </a:r>
-                      <a:endParaRPr lang="en-US" sz="1050" dirty="0">
+                      <a:endParaRPr lang="en-US" sz="1000" dirty="0">
                         <a:latin typeface="맑은 고딕" charset="0"/>
                         <a:ea typeface="맑은 고딕" charset="0"/>
                         <a:cs typeface="맑은 고딕" charset="0"/>
@@ -7050,7 +7564,7 @@
                         <a:buNone/>
                       </a:pPr>
                       <a:r>
-                        <a:rPr lang="en-US" sz="1050" dirty="0">
+                        <a:rPr lang="en-US" sz="1000" dirty="0">
                           <a:solidFill>
                             <a:srgbClr val="1B2426"/>
                           </a:solidFill>
@@ -7058,9 +7572,9 @@
                           <a:ea typeface="맑은 고딕" pitchFamily="34" charset="-122"/>
                           <a:cs typeface="맑은 고딕" pitchFamily="34" charset="-120"/>
                         </a:rPr>
-                        <a:t>약 3,256만</a:t>
+                        <a:t>3,256만</a:t>
                       </a:r>
-                      <a:endParaRPr lang="en-US" sz="1050" dirty="0">
+                      <a:endParaRPr lang="en-US" sz="1000" dirty="0">
                         <a:latin typeface="맑은 고딕" charset="0"/>
                         <a:ea typeface="맑은 고딕" charset="0"/>
                         <a:cs typeface="맑은 고딕" charset="0"/>
@@ -7118,7 +7632,7 @@
                         <a:buNone/>
                       </a:pPr>
                       <a:r>
-                        <a:rPr lang="en-US" sz="1050" dirty="0">
+                        <a:rPr lang="en-US" sz="1000" dirty="0">
                           <a:solidFill>
                             <a:srgbClr val="1B2426"/>
                           </a:solidFill>
@@ -7126,9 +7640,9 @@
                           <a:ea typeface="맑은 고딕" pitchFamily="34" charset="-122"/>
                           <a:cs typeface="맑은 고딕" pitchFamily="34" charset="-120"/>
                         </a:rPr>
-                        <a:t>약 2,868만</a:t>
+                        <a:t>2,380만</a:t>
                       </a:r>
-                      <a:endParaRPr lang="en-US" sz="1050" dirty="0">
+                      <a:endParaRPr lang="en-US" sz="1000" dirty="0">
                         <a:latin typeface="맑은 고딕" charset="0"/>
                         <a:ea typeface="맑은 고딕" charset="0"/>
                         <a:cs typeface="맑은 고딕" charset="0"/>
@@ -7186,7 +7700,7 @@
                         <a:buNone/>
                       </a:pPr>
                       <a:r>
-                        <a:rPr lang="en-US" sz="1050" dirty="0">
+                        <a:rPr lang="en-US" sz="1000" dirty="0">
                           <a:solidFill>
                             <a:srgbClr val="1B2426"/>
                           </a:solidFill>
@@ -7194,9 +7708,9 @@
                           <a:ea typeface="맑은 고딕" pitchFamily="34" charset="-122"/>
                           <a:cs typeface="맑은 고딕" pitchFamily="34" charset="-120"/>
                         </a:rPr>
-                        <a:t>약 2,380만</a:t>
+                        <a:t>2,868만</a:t>
                       </a:r>
-                      <a:endParaRPr lang="en-US" sz="1050" dirty="0">
+                      <a:endParaRPr lang="en-US" sz="1000" dirty="0">
                         <a:latin typeface="맑은 고딕" charset="0"/>
                         <a:ea typeface="맑은 고딕" charset="0"/>
                         <a:cs typeface="맑은 고딕" charset="0"/>
@@ -7254,7 +7768,7 @@
                         <a:buNone/>
                       </a:pPr>
                       <a:r>
-                        <a:rPr lang="en-US" sz="1050" dirty="0">
+                        <a:rPr lang="en-US" sz="1000" dirty="0">
                           <a:solidFill>
                             <a:srgbClr val="1B2426"/>
                           </a:solidFill>
@@ -7262,9 +7776,9 @@
                           <a:ea typeface="맑은 고딕" pitchFamily="34" charset="-122"/>
                           <a:cs typeface="맑은 고딕" pitchFamily="34" charset="-120"/>
                         </a:rPr>
-                        <a:t>약 2,868만</a:t>
+                        <a:t>2,380만</a:t>
                       </a:r>
-                      <a:endParaRPr lang="en-US" sz="1050" dirty="0">
+                      <a:endParaRPr lang="en-US" sz="1000" dirty="0">
                         <a:latin typeface="맑은 고딕" charset="0"/>
                         <a:ea typeface="맑은 고딕" charset="0"/>
                         <a:cs typeface="맑은 고딕" charset="0"/>
@@ -7313,8 +7827,6 @@
                     </a:solidFill>
                   </a:tcPr>
                 </a:tc>
-              </a:tr>
-              <a:tr h="384048">
                 <a:tc>
                   <a:txBody>
                     <a:bodyPr/>
@@ -7324,7 +7836,77 @@
                         <a:buNone/>
                       </a:pPr>
                       <a:r>
-                        <a:rPr lang="en-US" sz="1050" dirty="0">
+                        <a:rPr lang="en-US" sz="1000" dirty="0">
+                          <a:solidFill>
+                            <a:srgbClr val="1B2426"/>
+                          </a:solidFill>
+                          <a:latin typeface="맑은 고딕" pitchFamily="34" charset="0"/>
+                          <a:ea typeface="맑은 고딕" pitchFamily="34" charset="-122"/>
+                          <a:cs typeface="맑은 고딕" pitchFamily="34" charset="-120"/>
+                        </a:rPr>
+                        <a:t>2,868만</a:t>
+                      </a:r>
+                      <a:endParaRPr lang="en-US" sz="1000" dirty="0">
+                        <a:latin typeface="맑은 고딕" charset="0"/>
+                        <a:ea typeface="맑은 고딕" charset="0"/>
+                        <a:cs typeface="맑은 고딕" charset="0"/>
+                      </a:endParaRPr>
+                    </a:p>
+                  </a:txBody>
+                  <a:tcPr marL="88900" marR="88900" marT="50800" marB="50800" anchor="ctr">
+                    <a:lnL w="6350" cap="flat" cmpd="sng" algn="ctr">
+                      <a:solidFill>
+                        <a:srgbClr val="DCD6C9"/>
+                      </a:solidFill>
+                      <a:prstDash val="solid"/>
+                      <a:round/>
+                      <a:headEnd type="none" w="med" len="med"/>
+                      <a:tailEnd type="none" w="med" len="med"/>
+                    </a:lnL>
+                    <a:lnR w="6350" cap="flat" cmpd="sng" algn="ctr">
+                      <a:solidFill>
+                        <a:srgbClr val="DCD6C9"/>
+                      </a:solidFill>
+                      <a:prstDash val="solid"/>
+                      <a:round/>
+                      <a:headEnd type="none" w="med" len="med"/>
+                      <a:tailEnd type="none" w="med" len="med"/>
+                    </a:lnR>
+                    <a:lnT w="6350" cap="flat" cmpd="sng" algn="ctr">
+                      <a:solidFill>
+                        <a:srgbClr val="DCD6C9"/>
+                      </a:solidFill>
+                      <a:prstDash val="solid"/>
+                      <a:round/>
+                      <a:headEnd type="none" w="med" len="med"/>
+                      <a:tailEnd type="none" w="med" len="med"/>
+                    </a:lnT>
+                    <a:lnB w="6350" cap="flat" cmpd="sng" algn="ctr">
+                      <a:solidFill>
+                        <a:srgbClr val="DCD6C9"/>
+                      </a:solidFill>
+                      <a:prstDash val="solid"/>
+                      <a:round/>
+                      <a:headEnd type="none" w="med" len="med"/>
+                      <a:tailEnd type="none" w="med" len="med"/>
+                    </a:lnB>
+                    <a:solidFill>
+                      <a:srgbClr val="F1EDE4"/>
+                    </a:solidFill>
+                  </a:tcPr>
+                </a:tc>
+              </a:tr>
+              <a:tr h="365760">
+                <a:tc>
+                  <a:txBody>
+                    <a:bodyPr/>
+                    <a:lstStyle/>
+                    <a:p>
+                      <a:pPr indent="0" marL="0">
+                        <a:buNone/>
+                      </a:pPr>
+                      <a:r>
+                        <a:rPr lang="en-US" sz="1000" dirty="0">
                           <a:solidFill>
                             <a:srgbClr val="1B2426"/>
                           </a:solidFill>
@@ -7334,7 +7916,7 @@
                         </a:rPr>
                         <a:t>1년차 소계 (입학비 포함)</a:t>
                       </a:r>
-                      <a:endParaRPr lang="en-US" sz="1050" dirty="0">
+                      <a:endParaRPr lang="en-US" sz="1000" dirty="0">
                         <a:latin typeface="맑은 고딕" charset="0"/>
                         <a:ea typeface="맑은 고딕" charset="0"/>
                         <a:cs typeface="맑은 고딕" charset="0"/>
@@ -7392,7 +7974,7 @@
                         <a:buNone/>
                       </a:pPr>
                       <a:r>
-                        <a:rPr lang="en-US" sz="1050" dirty="0">
+                        <a:rPr lang="en-US" sz="1000" dirty="0">
                           <a:solidFill>
                             <a:srgbClr val="1B2426"/>
                           </a:solidFill>
@@ -7400,9 +7982,9 @@
                           <a:ea typeface="맑은 고딕" pitchFamily="34" charset="-122"/>
                           <a:cs typeface="맑은 고딕" pitchFamily="34" charset="-120"/>
                         </a:rPr>
-                        <a:t>약 3,756만</a:t>
+                        <a:t>3,756만</a:t>
                       </a:r>
-                      <a:endParaRPr lang="en-US" sz="1050" dirty="0">
+                      <a:endParaRPr lang="en-US" sz="1000" dirty="0">
                         <a:latin typeface="맑은 고딕" charset="0"/>
                         <a:ea typeface="맑은 고딕" charset="0"/>
                         <a:cs typeface="맑은 고딕" charset="0"/>
@@ -7460,7 +8042,7 @@
                         <a:buNone/>
                       </a:pPr>
                       <a:r>
-                        <a:rPr lang="en-US" sz="1050" dirty="0">
+                        <a:rPr lang="en-US" sz="1000" dirty="0">
                           <a:solidFill>
                             <a:srgbClr val="1B2426"/>
                           </a:solidFill>
@@ -7468,9 +8050,9 @@
                           <a:ea typeface="맑은 고딕" pitchFamily="34" charset="-122"/>
                           <a:cs typeface="맑은 고딕" pitchFamily="34" charset="-120"/>
                         </a:rPr>
-                        <a:t>약 3,368만</a:t>
+                        <a:t>2,880만</a:t>
                       </a:r>
-                      <a:endParaRPr lang="en-US" sz="1050" dirty="0">
+                      <a:endParaRPr lang="en-US" sz="1000" dirty="0">
                         <a:latin typeface="맑은 고딕" charset="0"/>
                         <a:ea typeface="맑은 고딕" charset="0"/>
                         <a:cs typeface="맑은 고딕" charset="0"/>
@@ -7528,7 +8110,7 @@
                         <a:buNone/>
                       </a:pPr>
                       <a:r>
-                        <a:rPr lang="en-US" sz="1050" dirty="0">
+                        <a:rPr lang="en-US" sz="1000" dirty="0">
                           <a:solidFill>
                             <a:srgbClr val="1B2426"/>
                           </a:solidFill>
@@ -7536,9 +8118,9 @@
                           <a:ea typeface="맑은 고딕" pitchFamily="34" charset="-122"/>
                           <a:cs typeface="맑은 고딕" pitchFamily="34" charset="-120"/>
                         </a:rPr>
-                        <a:t>약 2,880만</a:t>
+                        <a:t>3,368만</a:t>
                       </a:r>
-                      <a:endParaRPr lang="en-US" sz="1050" dirty="0">
+                      <a:endParaRPr lang="en-US" sz="1000" dirty="0">
                         <a:latin typeface="맑은 고딕" charset="0"/>
                         <a:ea typeface="맑은 고딕" charset="0"/>
                         <a:cs typeface="맑은 고딕" charset="0"/>
@@ -7596,7 +8178,7 @@
                         <a:buNone/>
                       </a:pPr>
                       <a:r>
-                        <a:rPr lang="en-US" sz="1050" dirty="0">
+                        <a:rPr lang="en-US" sz="1000" dirty="0">
                           <a:solidFill>
                             <a:srgbClr val="1B2426"/>
                           </a:solidFill>
@@ -7604,9 +8186,9 @@
                           <a:ea typeface="맑은 고딕" pitchFamily="34" charset="-122"/>
                           <a:cs typeface="맑은 고딕" pitchFamily="34" charset="-120"/>
                         </a:rPr>
-                        <a:t>약 3,368만</a:t>
+                        <a:t>2,880만</a:t>
                       </a:r>
-                      <a:endParaRPr lang="en-US" sz="1050" dirty="0">
+                      <a:endParaRPr lang="en-US" sz="1000" dirty="0">
                         <a:latin typeface="맑은 고딕" charset="0"/>
                         <a:ea typeface="맑은 고딕" charset="0"/>
                         <a:cs typeface="맑은 고딕" charset="0"/>
@@ -7655,8 +8237,6 @@
                     </a:solidFill>
                   </a:tcPr>
                 </a:tc>
-              </a:tr>
-              <a:tr h="384048">
                 <a:tc>
                   <a:txBody>
                     <a:bodyPr/>
@@ -7666,7 +8246,77 @@
                         <a:buNone/>
                       </a:pPr>
                       <a:r>
-                        <a:rPr lang="en-US" sz="1050" dirty="0">
+                        <a:rPr lang="en-US" sz="1000" dirty="0">
+                          <a:solidFill>
+                            <a:srgbClr val="1B2426"/>
+                          </a:solidFill>
+                          <a:latin typeface="맑은 고딕" pitchFamily="34" charset="0"/>
+                          <a:ea typeface="맑은 고딕" pitchFamily="34" charset="-122"/>
+                          <a:cs typeface="맑은 고딕" pitchFamily="34" charset="-120"/>
+                        </a:rPr>
+                        <a:t>3,368만</a:t>
+                      </a:r>
+                      <a:endParaRPr lang="en-US" sz="1000" dirty="0">
+                        <a:latin typeface="맑은 고딕" charset="0"/>
+                        <a:ea typeface="맑은 고딕" charset="0"/>
+                        <a:cs typeface="맑은 고딕" charset="0"/>
+                      </a:endParaRPr>
+                    </a:p>
+                  </a:txBody>
+                  <a:tcPr marL="88900" marR="88900" marT="50800" marB="50800" anchor="ctr">
+                    <a:lnL w="6350" cap="flat" cmpd="sng" algn="ctr">
+                      <a:solidFill>
+                        <a:srgbClr val="DCD6C9"/>
+                      </a:solidFill>
+                      <a:prstDash val="solid"/>
+                      <a:round/>
+                      <a:headEnd type="none" w="med" len="med"/>
+                      <a:tailEnd type="none" w="med" len="med"/>
+                    </a:lnL>
+                    <a:lnR w="6350" cap="flat" cmpd="sng" algn="ctr">
+                      <a:solidFill>
+                        <a:srgbClr val="DCD6C9"/>
+                      </a:solidFill>
+                      <a:prstDash val="solid"/>
+                      <a:round/>
+                      <a:headEnd type="none" w="med" len="med"/>
+                      <a:tailEnd type="none" w="med" len="med"/>
+                    </a:lnR>
+                    <a:lnT w="6350" cap="flat" cmpd="sng" algn="ctr">
+                      <a:solidFill>
+                        <a:srgbClr val="DCD6C9"/>
+                      </a:solidFill>
+                      <a:prstDash val="solid"/>
+                      <a:round/>
+                      <a:headEnd type="none" w="med" len="med"/>
+                      <a:tailEnd type="none" w="med" len="med"/>
+                    </a:lnT>
+                    <a:lnB w="6350" cap="flat" cmpd="sng" algn="ctr">
+                      <a:solidFill>
+                        <a:srgbClr val="DCD6C9"/>
+                      </a:solidFill>
+                      <a:prstDash val="solid"/>
+                      <a:round/>
+                      <a:headEnd type="none" w="med" len="med"/>
+                      <a:tailEnd type="none" w="med" len="med"/>
+                    </a:lnB>
+                    <a:solidFill>
+                      <a:srgbClr val="FFFFFF"/>
+                    </a:solidFill>
+                  </a:tcPr>
+                </a:tc>
+              </a:tr>
+              <a:tr h="365760">
+                <a:tc>
+                  <a:txBody>
+                    <a:bodyPr/>
+                    <a:lstStyle/>
+                    <a:p>
+                      <a:pPr indent="0" marL="0">
+                        <a:buNone/>
+                      </a:pPr>
+                      <a:r>
+                        <a:rPr lang="en-US" sz="1000" dirty="0">
                           <a:solidFill>
                             <a:srgbClr val="1B2426"/>
                           </a:solidFill>
@@ -7676,7 +8326,7 @@
                         </a:rPr>
                         <a:t>2년차 이후 (연)</a:t>
                       </a:r>
-                      <a:endParaRPr lang="en-US" sz="1050" dirty="0">
+                      <a:endParaRPr lang="en-US" sz="1000" dirty="0">
                         <a:latin typeface="맑은 고딕" charset="0"/>
                         <a:ea typeface="맑은 고딕" charset="0"/>
                         <a:cs typeface="맑은 고딕" charset="0"/>
@@ -7734,7 +8384,7 @@
                         <a:buNone/>
                       </a:pPr>
                       <a:r>
-                        <a:rPr lang="en-US" sz="1050" dirty="0">
+                        <a:rPr lang="en-US" sz="1000" dirty="0">
                           <a:solidFill>
                             <a:srgbClr val="1B2426"/>
                           </a:solidFill>
@@ -7742,9 +8392,9 @@
                           <a:ea typeface="맑은 고딕" pitchFamily="34" charset="-122"/>
                           <a:cs typeface="맑은 고딕" pitchFamily="34" charset="-120"/>
                         </a:rPr>
-                        <a:t>약 3,321만</a:t>
+                        <a:t>3,321만</a:t>
                       </a:r>
-                      <a:endParaRPr lang="en-US" sz="1050" dirty="0">
+                      <a:endParaRPr lang="en-US" sz="1000" dirty="0">
                         <a:latin typeface="맑은 고딕" charset="0"/>
                         <a:ea typeface="맑은 고딕" charset="0"/>
                         <a:cs typeface="맑은 고딕" charset="0"/>
@@ -7802,7 +8452,7 @@
                         <a:buNone/>
                       </a:pPr>
                       <a:r>
-                        <a:rPr lang="en-US" sz="1050" dirty="0">
+                        <a:rPr lang="en-US" sz="1000" dirty="0">
                           <a:solidFill>
                             <a:srgbClr val="1B2426"/>
                           </a:solidFill>
@@ -7810,9 +8460,9 @@
                           <a:ea typeface="맑은 고딕" pitchFamily="34" charset="-122"/>
                           <a:cs typeface="맑은 고딕" pitchFamily="34" charset="-120"/>
                         </a:rPr>
-                        <a:t>약 3,445만</a:t>
+                        <a:t>3,321만</a:t>
                       </a:r>
-                      <a:endParaRPr lang="en-US" sz="1050" dirty="0">
+                      <a:endParaRPr lang="en-US" sz="1000" dirty="0">
                         <a:latin typeface="맑은 고딕" charset="0"/>
                         <a:ea typeface="맑은 고딕" charset="0"/>
                         <a:cs typeface="맑은 고딕" charset="0"/>
@@ -7870,7 +8520,7 @@
                         <a:buNone/>
                       </a:pPr>
                       <a:r>
-                        <a:rPr lang="en-US" sz="1050" dirty="0">
+                        <a:rPr lang="en-US" sz="1000" dirty="0">
                           <a:solidFill>
                             <a:srgbClr val="1B2426"/>
                           </a:solidFill>
@@ -7878,9 +8528,9 @@
                           <a:ea typeface="맑은 고딕" pitchFamily="34" charset="-122"/>
                           <a:cs typeface="맑은 고딕" pitchFamily="34" charset="-120"/>
                         </a:rPr>
-                        <a:t>약 3,891만</a:t>
+                        <a:t>3,445만</a:t>
                       </a:r>
-                      <a:endParaRPr lang="en-US" sz="1050" dirty="0">
+                      <a:endParaRPr lang="en-US" sz="1000" dirty="0">
                         <a:latin typeface="맑은 고딕" charset="0"/>
                         <a:ea typeface="맑은 고딕" charset="0"/>
                         <a:cs typeface="맑은 고딕" charset="0"/>
@@ -7938,7 +8588,7 @@
                         <a:buNone/>
                       </a:pPr>
                       <a:r>
-                        <a:rPr lang="en-US" sz="1050" dirty="0">
+                        <a:rPr lang="en-US" sz="1000" dirty="0">
                           <a:solidFill>
                             <a:srgbClr val="1B2426"/>
                           </a:solidFill>
@@ -7946,9 +8596,9 @@
                           <a:ea typeface="맑은 고딕" pitchFamily="34" charset="-122"/>
                           <a:cs typeface="맑은 고딕" pitchFamily="34" charset="-120"/>
                         </a:rPr>
-                        <a:t>약 3,851만</a:t>
+                        <a:t>3,891만</a:t>
                       </a:r>
-                      <a:endParaRPr lang="en-US" sz="1050" dirty="0">
+                      <a:endParaRPr lang="en-US" sz="1000" dirty="0">
                         <a:latin typeface="맑은 고딕" charset="0"/>
                         <a:ea typeface="맑은 고딕" charset="0"/>
                         <a:cs typeface="맑은 고딕" charset="0"/>
@@ -7997,8 +8647,6 @@
                     </a:solidFill>
                   </a:tcPr>
                 </a:tc>
-              </a:tr>
-              <a:tr h="384048">
                 <a:tc>
                   <a:txBody>
                     <a:bodyPr/>
@@ -8008,7 +8656,77 @@
                         <a:buNone/>
                       </a:pPr>
                       <a:r>
-                        <a:rPr lang="en-US" sz="1050" dirty="0">
+                        <a:rPr lang="en-US" sz="1000" dirty="0">
+                          <a:solidFill>
+                            <a:srgbClr val="1B2426"/>
+                          </a:solidFill>
+                          <a:latin typeface="맑은 고딕" pitchFamily="34" charset="0"/>
+                          <a:ea typeface="맑은 고딕" pitchFamily="34" charset="-122"/>
+                          <a:cs typeface="맑은 고딕" pitchFamily="34" charset="-120"/>
+                        </a:rPr>
+                        <a:t>3,851만</a:t>
+                      </a:r>
+                      <a:endParaRPr lang="en-US" sz="1000" dirty="0">
+                        <a:latin typeface="맑은 고딕" charset="0"/>
+                        <a:ea typeface="맑은 고딕" charset="0"/>
+                        <a:cs typeface="맑은 고딕" charset="0"/>
+                      </a:endParaRPr>
+                    </a:p>
+                  </a:txBody>
+                  <a:tcPr marL="88900" marR="88900" marT="50800" marB="50800" anchor="ctr">
+                    <a:lnL w="6350" cap="flat" cmpd="sng" algn="ctr">
+                      <a:solidFill>
+                        <a:srgbClr val="DCD6C9"/>
+                      </a:solidFill>
+                      <a:prstDash val="solid"/>
+                      <a:round/>
+                      <a:headEnd type="none" w="med" len="med"/>
+                      <a:tailEnd type="none" w="med" len="med"/>
+                    </a:lnL>
+                    <a:lnR w="6350" cap="flat" cmpd="sng" algn="ctr">
+                      <a:solidFill>
+                        <a:srgbClr val="DCD6C9"/>
+                      </a:solidFill>
+                      <a:prstDash val="solid"/>
+                      <a:round/>
+                      <a:headEnd type="none" w="med" len="med"/>
+                      <a:tailEnd type="none" w="med" len="med"/>
+                    </a:lnR>
+                    <a:lnT w="6350" cap="flat" cmpd="sng" algn="ctr">
+                      <a:solidFill>
+                        <a:srgbClr val="DCD6C9"/>
+                      </a:solidFill>
+                      <a:prstDash val="solid"/>
+                      <a:round/>
+                      <a:headEnd type="none" w="med" len="med"/>
+                      <a:tailEnd type="none" w="med" len="med"/>
+                    </a:lnT>
+                    <a:lnB w="6350" cap="flat" cmpd="sng" algn="ctr">
+                      <a:solidFill>
+                        <a:srgbClr val="DCD6C9"/>
+                      </a:solidFill>
+                      <a:prstDash val="solid"/>
+                      <a:round/>
+                      <a:headEnd type="none" w="med" len="med"/>
+                      <a:tailEnd type="none" w="med" len="med"/>
+                    </a:lnB>
+                    <a:solidFill>
+                      <a:srgbClr val="F1EDE4"/>
+                    </a:solidFill>
+                  </a:tcPr>
+                </a:tc>
+              </a:tr>
+              <a:tr h="365760">
+                <a:tc>
+                  <a:txBody>
+                    <a:bodyPr/>
+                    <a:lstStyle/>
+                    <a:p>
+                      <a:pPr indent="0" marL="0">
+                        <a:buNone/>
+                      </a:pPr>
+                      <a:r>
+                        <a:rPr lang="en-US" sz="1000" dirty="0">
                           <a:solidFill>
                             <a:srgbClr val="1B2426"/>
                           </a:solidFill>
@@ -8018,7 +8736,7 @@
                         </a:rPr>
                         <a:t>졸업까지 총액</a:t>
                       </a:r>
-                      <a:endParaRPr lang="en-US" sz="1050" dirty="0">
+                      <a:endParaRPr lang="en-US" sz="1000" dirty="0">
                         <a:latin typeface="맑은 고딕" charset="0"/>
                         <a:ea typeface="맑은 고딕" charset="0"/>
                         <a:cs typeface="맑은 고딕" charset="0"/>
@@ -8076,7 +8794,7 @@
                         <a:buNone/>
                       </a:pPr>
                       <a:r>
-                        <a:rPr lang="en-US" sz="1050" dirty="0">
+                        <a:rPr lang="en-US" sz="1000" dirty="0">
                           <a:solidFill>
                             <a:srgbClr val="1B2426"/>
                           </a:solidFill>
@@ -8084,9 +8802,9 @@
                           <a:ea typeface="맑은 고딕" pitchFamily="34" charset="-122"/>
                           <a:cs typeface="맑은 고딕" pitchFamily="34" charset="-120"/>
                         </a:rPr>
-                        <a:t>약 1억 398만</a:t>
+                        <a:t>1억 398만</a:t>
                       </a:r>
-                      <a:endParaRPr lang="en-US" sz="1050" dirty="0">
+                      <a:endParaRPr lang="en-US" sz="1000" dirty="0">
                         <a:latin typeface="맑은 고딕" charset="0"/>
                         <a:ea typeface="맑은 고딕" charset="0"/>
                         <a:cs typeface="맑은 고딕" charset="0"/>
@@ -8144,7 +8862,7 @@
                         <a:buNone/>
                       </a:pPr>
                       <a:r>
-                        <a:rPr lang="en-US" sz="1050" dirty="0">
+                        <a:rPr lang="en-US" sz="1000" dirty="0">
                           <a:solidFill>
                             <a:srgbClr val="1B2426"/>
                           </a:solidFill>
@@ -8152,9 +8870,9 @@
                           <a:ea typeface="맑은 고딕" pitchFamily="34" charset="-122"/>
                           <a:cs typeface="맑은 고딕" pitchFamily="34" charset="-120"/>
                         </a:rPr>
-                        <a:t>약 1억 3,702만</a:t>
+                        <a:t>1억 2,843만</a:t>
                       </a:r>
-                      <a:endParaRPr lang="en-US" sz="1050" dirty="0">
+                      <a:endParaRPr lang="en-US" sz="1000" dirty="0">
                         <a:latin typeface="맑은 고딕" charset="0"/>
                         <a:ea typeface="맑은 고딕" charset="0"/>
                         <a:cs typeface="맑은 고딕" charset="0"/>
@@ -8212,7 +8930,7 @@
                         <a:buNone/>
                       </a:pPr>
                       <a:r>
-                        <a:rPr lang="en-US" sz="1050" dirty="0">
+                        <a:rPr lang="en-US" sz="1000" dirty="0">
                           <a:solidFill>
                             <a:srgbClr val="1B2426"/>
                           </a:solidFill>
@@ -8220,9 +8938,9 @@
                           <a:ea typeface="맑은 고딕" pitchFamily="34" charset="-122"/>
                           <a:cs typeface="맑은 고딕" pitchFamily="34" charset="-120"/>
                         </a:rPr>
-                        <a:t>약 1억 8,444만</a:t>
+                        <a:t>1억 3,702만</a:t>
                       </a:r>
-                      <a:endParaRPr lang="en-US" sz="1050" dirty="0">
+                      <a:endParaRPr lang="en-US" sz="1000" dirty="0">
                         <a:latin typeface="맑은 고딕" charset="0"/>
                         <a:ea typeface="맑은 고딕" charset="0"/>
                         <a:cs typeface="맑은 고딕" charset="0"/>
@@ -8280,7 +8998,7 @@
                         <a:buNone/>
                       </a:pPr>
                       <a:r>
-                        <a:rPr lang="en-US" sz="1050" dirty="0">
+                        <a:rPr lang="en-US" sz="1000" dirty="0">
                           <a:solidFill>
                             <a:srgbClr val="1B2426"/>
                           </a:solidFill>
@@ -8288,9 +9006,77 @@
                           <a:ea typeface="맑은 고딕" pitchFamily="34" charset="-122"/>
                           <a:cs typeface="맑은 고딕" pitchFamily="34" charset="-120"/>
                         </a:rPr>
-                        <a:t>약 1억 8,773만</a:t>
+                        <a:t>1억 8,444만</a:t>
                       </a:r>
-                      <a:endParaRPr lang="en-US" sz="1050" dirty="0">
+                      <a:endParaRPr lang="en-US" sz="1000" dirty="0">
+                        <a:latin typeface="맑은 고딕" charset="0"/>
+                        <a:ea typeface="맑은 고딕" charset="0"/>
+                        <a:cs typeface="맑은 고딕" charset="0"/>
+                      </a:endParaRPr>
+                    </a:p>
+                  </a:txBody>
+                  <a:tcPr marL="88900" marR="88900" marT="50800" marB="50800" anchor="ctr">
+                    <a:lnL w="6350" cap="flat" cmpd="sng" algn="ctr">
+                      <a:solidFill>
+                        <a:srgbClr val="DCD6C9"/>
+                      </a:solidFill>
+                      <a:prstDash val="solid"/>
+                      <a:round/>
+                      <a:headEnd type="none" w="med" len="med"/>
+                      <a:tailEnd type="none" w="med" len="med"/>
+                    </a:lnL>
+                    <a:lnR w="6350" cap="flat" cmpd="sng" algn="ctr">
+                      <a:solidFill>
+                        <a:srgbClr val="DCD6C9"/>
+                      </a:solidFill>
+                      <a:prstDash val="solid"/>
+                      <a:round/>
+                      <a:headEnd type="none" w="med" len="med"/>
+                      <a:tailEnd type="none" w="med" len="med"/>
+                    </a:lnR>
+                    <a:lnT w="6350" cap="flat" cmpd="sng" algn="ctr">
+                      <a:solidFill>
+                        <a:srgbClr val="DCD6C9"/>
+                      </a:solidFill>
+                      <a:prstDash val="solid"/>
+                      <a:round/>
+                      <a:headEnd type="none" w="med" len="med"/>
+                      <a:tailEnd type="none" w="med" len="med"/>
+                    </a:lnT>
+                    <a:lnB w="6350" cap="flat" cmpd="sng" algn="ctr">
+                      <a:solidFill>
+                        <a:srgbClr val="DCD6C9"/>
+                      </a:solidFill>
+                      <a:prstDash val="solid"/>
+                      <a:round/>
+                      <a:headEnd type="none" w="med" len="med"/>
+                      <a:tailEnd type="none" w="med" len="med"/>
+                    </a:lnB>
+                    <a:solidFill>
+                      <a:srgbClr val="FFFFFF"/>
+                    </a:solidFill>
+                  </a:tcPr>
+                </a:tc>
+                <a:tc>
+                  <a:txBody>
+                    <a:bodyPr/>
+                    <a:lstStyle/>
+                    <a:p>
+                      <a:pPr indent="0" marL="0">
+                        <a:buNone/>
+                      </a:pPr>
+                      <a:r>
+                        <a:rPr lang="en-US" sz="1000" dirty="0">
+                          <a:solidFill>
+                            <a:srgbClr val="1B2426"/>
+                          </a:solidFill>
+                          <a:latin typeface="맑은 고딕" pitchFamily="34" charset="0"/>
+                          <a:ea typeface="맑은 고딕" pitchFamily="34" charset="-122"/>
+                          <a:cs typeface="맑은 고딕" pitchFamily="34" charset="-120"/>
+                        </a:rPr>
+                        <a:t>1억 8,773만</a:t>
+                      </a:r>
+                      <a:endParaRPr lang="en-US" sz="1000" dirty="0">
                         <a:latin typeface="맑은 고딕" charset="0"/>
                         <a:ea typeface="맑은 고딕" charset="0"/>
                         <a:cs typeface="맑은 고딕" charset="0"/>
@@ -8486,7 +9272,7 @@
                 <a:ea typeface="맑은 고딕" pitchFamily="34" charset="-122"/>
                 <a:cs typeface="맑은 고딕" pitchFamily="34" charset="-120"/>
               </a:rPr>
-              <a:t>차액 — 2년차가 더 많음: 노팅엄 문과 77만 · 공학 483만 · 모나쉬 공학 1,011만  |  모나쉬 DHES만 1년차가 435만 더 많습니다.</a:t>
+              <a:t>차액 — 2년차가 더 많음: 모나쉬 MUFY+학부 441만 · 노팅엄 문과 77만 · 노팅엄 공학 483만 · 모나쉬 공학 1,011만  |  모나쉬 DHES만 1년차가 435만 더 많습니다.</a:t>
             </a:r>
             <a:endParaRPr lang="en-US" sz="1050" dirty="0"/>
           </a:p>

--- a/design/malaysia-study-live/말레이시아유학_2편_해외직영캠퍼스.pptx
+++ b/design/malaysia-study-live/말레이시아유학_2편_해외직영캠퍼스.pptx
@@ -17,9 +17,10 @@
     <p:sldId id="265" r:id="rId11"/>
     <p:sldId id="266" r:id="rId12"/>
     <p:sldId id="267" r:id="rId13"/>
+    <p:sldId id="268" r:id="rId14"/>
   </p:sldIdLst>
   <p:notesMasterIdLst>
-    <p:notesMasterId r:id="rId14"/>
+    <p:notesMasterId r:id="rId15"/>
   </p:notesMasterIdLst>
   <p:sldSz cx="12192000" cy="6858000"/>
   <p:notesSz cx="6858000" cy="12192000"/>
@@ -601,7 +602,7 @@
           <a:p>
             <a:r>
               <a:rPr lang="en-US" dirty="0"/>
-              <a:t>마지막 두 행부터 읽으십시오. 학부모가 알고 싶은 것은 "우리 아이는 어디냐"입니다.</a:t>
+              <a:t>표의 마지막 열만 읽으셔도 됩니다. 넷 다 4년제이고, 선웨이만 학위증이 두 장입니다. AQF 8등급을 석사라고 설명하면 나중에 문제가 됩니다.</a:t>
             </a:r>
             <a:endParaRPr lang="en-US" dirty="0"/>
           </a:p>
@@ -689,7 +690,7 @@
           <a:p>
             <a:r>
               <a:rPr lang="en-US" dirty="0"/>
-              <a:t>질문이 가장 많이 나오는 표입니다. 1년차는 파운데이션, 2년차부터는 학부라서 금액이 뛴다 — 이 한 문장으로 정리하십시오.</a:t>
+              <a:t>마지막 두 행부터 읽으십시오. 학부모가 알고 싶은 것은 "우리 아이는 어디냐"입니다.</a:t>
             </a:r>
             <a:endParaRPr lang="en-US" dirty="0"/>
           </a:p>
@@ -777,7 +778,7 @@
           <a:p>
             <a:r>
               <a:rPr lang="en-US" dirty="0"/>
-              <a:t>검정고시 1회(4월)를 잡으면 그해에 들어갑니다. 2회(8월)면 이듬해입니다. 이 한 가지가 1년을 가릅니다.</a:t>
+              <a:t>질문이 가장 많이 나오는 표입니다. 1년차는 파운데이션, 2년차부터는 학부라서 금액이 뛴다 — 이 한 문장으로 정리하십시오.</a:t>
             </a:r>
             <a:endParaRPr lang="en-US" dirty="0"/>
           </a:p>
@@ -801,6 +802,94 @@
             <a:fld id="{F7021451-1387-4CA6-816F-3879F97B5CBC}" type="slidenum">
               <a:rPr lang="en-US"/>
               <a:t>12</a:t>
+            </a:fld>
+            <a:endParaRPr lang="en-US"/>
+          </a:p>
+        </p:txBody>
+      </p:sp>
+    </p:spTree>
+    <p:extLst>
+      <p:ext uri="{BB962C8B-B14F-4D97-AF65-F5344CB8AC3E}">
+        <p14:creationId xmlns:p14="http://schemas.microsoft.com/office/powerpoint/2010/main" val="1024086991"/>
+      </p:ext>
+    </p:extLst>
+  </p:cSld>
+  <p:clrMapOvr>
+    <a:masterClrMapping/>
+  </p:clrMapOvr>
+</p:notes>
+</file>
+
+<file path=ppt/notesSlides/notesSlide13.xml><?xml version="1.0" encoding="utf-8"?>
+<p:notes xmlns:a="http://schemas.openxmlformats.org/drawingml/2006/main" xmlns:r="http://schemas.openxmlformats.org/officeDocument/2006/relationships" xmlns:p="http://schemas.openxmlformats.org/presentationml/2006/main">
+  <p:cSld>
+    <p:spTree>
+      <p:nvGrpSpPr>
+        <p:cNvPr id="1" name=""/>
+        <p:cNvGrpSpPr/>
+        <p:nvPr/>
+      </p:nvGrpSpPr>
+      <p:grpSpPr>
+        <a:xfrm>
+          <a:off x="0" y="0"/>
+          <a:ext cx="0" cy="0"/>
+          <a:chOff x="0" y="0"/>
+          <a:chExt cx="0" cy="0"/>
+        </a:xfrm>
+      </p:grpSpPr>
+      <p:sp>
+        <p:nvSpPr>
+          <p:cNvPr id="2" name="Slide Image Placeholder 1"/>
+          <p:cNvSpPr>
+            <a:spLocks noGrp="1" noRot="1" noChangeAspect="1"/>
+          </p:cNvSpPr>
+          <p:nvPr>
+            <p:ph type="sldImg"/>
+          </p:nvPr>
+        </p:nvSpPr>
+        <p:spPr/>
+      </p:sp>
+      <p:sp>
+        <p:nvSpPr>
+          <p:cNvPr id="3" name="Notes Placeholder 2"/>
+          <p:cNvSpPr>
+            <a:spLocks noGrp="1"/>
+          </p:cNvSpPr>
+          <p:nvPr>
+            <p:ph type="body" idx="1"/>
+          </p:nvPr>
+        </p:nvSpPr>
+        <p:spPr/>
+        <p:txBody>
+          <a:bodyPr/>
+          <a:lstStyle/>
+          <a:p>
+            <a:r>
+              <a:rPr lang="en-US" dirty="0"/>
+              <a:t>검정고시 1회(4월)를 잡으면 그해에 들어갑니다. 2회(8월)면 이듬해입니다. 이 한 가지가 1년을 가릅니다.</a:t>
+            </a:r>
+            <a:endParaRPr lang="en-US" dirty="0"/>
+          </a:p>
+        </p:txBody>
+      </p:sp>
+      <p:sp>
+        <p:nvSpPr>
+          <p:cNvPr id="4" name="Slide Number Placeholder 3"/>
+          <p:cNvSpPr>
+            <a:spLocks noGrp="1"/>
+          </p:cNvSpPr>
+          <p:nvPr>
+            <p:ph type="sldNum" sz="quarter" idx="10"/>
+          </p:nvPr>
+        </p:nvSpPr>
+        <p:spPr/>
+        <p:txBody>
+          <a:bodyPr/>
+          <a:lstStyle/>
+          <a:p>
+            <a:fld id="{F7021451-1387-4CA6-816F-3879F97B5CBC}" type="slidenum">
+              <a:rPr lang="en-US"/>
+              <a:t>13</a:t>
             </a:fld>
             <a:endParaRPr lang="en-US"/>
           </a:p>
@@ -2446,6 +2535,2052 @@
                 <a:ea typeface="맑은 고딕" pitchFamily="34" charset="-122"/>
                 <a:cs typeface="맑은 고딕" pitchFamily="34" charset="-120"/>
               </a:rPr>
+              <a:t>ENGINEERING DEGREES</a:t>
+            </a:r>
+            <a:endParaRPr lang="en-US" sz="1100" dirty="0"/>
+          </a:p>
+        </p:txBody>
+      </p:sp>
+      <p:sp>
+        <p:nvSpPr>
+          <p:cNvPr id="5" name="Text 3"/>
+          <p:cNvSpPr txBox="1"/>
+          <p:nvPr/>
+        </p:nvSpPr>
+        <p:spPr>
+          <a:xfrm>
+            <a:off x="1389888" y="676656"/>
+            <a:ext cx="10161727" cy="512064"/>
+          </a:xfrm>
+          <a:prstGeom prst="rect">
+            <a:avLst/>
+          </a:prstGeom>
+          <a:noFill/>
+          <a:ln/>
+        </p:spPr>
+        <p:txBody>
+          <a:bodyPr wrap="square" lIns="0" tIns="0" rIns="0" bIns="0" rtlCol="0" anchor="t"/>
+          <a:lstStyle/>
+          <a:p>
+            <a:pPr algn="l" indent="0" marL="0">
+              <a:lnSpc>
+                <a:spcPct val="110000"/>
+              </a:lnSpc>
+              <a:buNone/>
+            </a:pPr>
+            <a:r>
+              <a:rPr lang="en-US" sz="3000" b="1" dirty="0">
+                <a:solidFill>
+                  <a:srgbClr val="0C2E2C"/>
+                </a:solidFill>
+                <a:latin typeface="맑은 고딕" pitchFamily="34" charset="0"/>
+                <a:ea typeface="맑은 고딕" pitchFamily="34" charset="-122"/>
+                <a:cs typeface="맑은 고딕" pitchFamily="34" charset="-120"/>
+              </a:rPr>
+              <a:t>공학 학위, 무엇이 다른가</a:t>
+            </a:r>
+            <a:endParaRPr lang="en-US" sz="3000" dirty="0"/>
+          </a:p>
+        </p:txBody>
+      </p:sp>
+      <p:sp>
+        <p:nvSpPr>
+          <p:cNvPr id="6" name="Text 4"/>
+          <p:cNvSpPr txBox="1"/>
+          <p:nvPr/>
+        </p:nvSpPr>
+        <p:spPr>
+          <a:xfrm>
+            <a:off x="640080" y="1225296"/>
+            <a:ext cx="10911535" cy="530352"/>
+          </a:xfrm>
+          <a:prstGeom prst="rect">
+            <a:avLst/>
+          </a:prstGeom>
+          <a:noFill/>
+          <a:ln/>
+        </p:spPr>
+        <p:txBody>
+          <a:bodyPr wrap="square" lIns="0" tIns="0" rIns="0" bIns="0" rtlCol="0" anchor="t"/>
+          <a:lstStyle/>
+          <a:p>
+            <a:pPr algn="l" indent="0" marL="0">
+              <a:lnSpc>
+                <a:spcPct val="130000"/>
+              </a:lnSpc>
+              <a:buNone/>
+            </a:pPr>
+            <a:r>
+              <a:rPr lang="en-US" sz="1300" dirty="0">
+                <a:solidFill>
+                  <a:srgbClr val="6E7C7A"/>
+                </a:solidFill>
+                <a:latin typeface="맑은 고딕" pitchFamily="34" charset="0"/>
+                <a:ea typeface="맑은 고딕" pitchFamily="34" charset="-122"/>
+                <a:cs typeface="맑은 고딕" pitchFamily="34" charset="-120"/>
+              </a:rPr>
+              <a:t>네 학교 모두 본과 4년제입니다 · 다른 것은 "어느 나라 학제를 따르는가"입니다</a:t>
+            </a:r>
+            <a:endParaRPr lang="en-US" sz="1300" dirty="0"/>
+          </a:p>
+        </p:txBody>
+      </p:sp>
+      <p:graphicFrame>
+        <p:nvGraphicFramePr>
+          <p:cNvPr id="11" name="Table 0"/>
+          <p:cNvGraphicFramePr>
+            <a:graphicFrameLocks noGrp="1"/>
+          </p:cNvGraphicFramePr>
+          <p:nvPr>
+            <p:extLst>
+              <p:ext uri="{D42A27DB-BD31-4B8C-83A1-F6EECF244321}">
+                <p14:modId xmlns:p14="http://schemas.microsoft.com/office/powerpoint/2010/main" val="1579011935"/>
+              </p:ext>
+            </p:extLst>
+          </p:nvPr>
+        </p:nvGraphicFramePr>
+        <p:xfrm>
+          <a:off x="640080" y="1828800"/>
+          <a:ext cx="10911535" cy="914400"/>
+        </p:xfrm>
+        <a:graphic>
+          <a:graphicData uri="http://schemas.openxmlformats.org/drawingml/2006/table">
+            <a:tbl>
+              <a:tblPr/>
+              <a:tblGrid>
+                <a:gridCol w="2286000"/>
+                <a:gridCol w="1005840"/>
+                <a:gridCol w="3017520"/>
+                <a:gridCol w="4602175"/>
+              </a:tblGrid>
+              <a:tr h="621792">
+                <a:tc>
+                  <a:txBody>
+                    <a:bodyPr/>
+                    <a:lstStyle/>
+                    <a:p>
+                      <a:pPr indent="0" marL="0">
+                        <a:buNone/>
+                      </a:pPr>
+                      <a:r>
+                        <a:rPr lang="en-US" sz="1100" b="1" dirty="0">
+                          <a:solidFill>
+                            <a:srgbClr val="FFFFFF"/>
+                          </a:solidFill>
+                          <a:latin typeface="맑은 고딕" pitchFamily="34" charset="0"/>
+                          <a:ea typeface="맑은 고딕" pitchFamily="34" charset="-122"/>
+                          <a:cs typeface="맑은 고딕" pitchFamily="34" charset="-120"/>
+                        </a:rPr>
+                        <a:t>대학</a:t>
+                      </a:r>
+                      <a:endParaRPr lang="en-US" sz="1100" dirty="0">
+                        <a:latin typeface="맑은 고딕" charset="0"/>
+                        <a:ea typeface="맑은 고딕" charset="0"/>
+                        <a:cs typeface="맑은 고딕" charset="0"/>
+                      </a:endParaRPr>
+                    </a:p>
+                  </a:txBody>
+                  <a:tcPr marL="88900" marR="88900" marT="50800" marB="50800" anchor="ctr">
+                    <a:lnL w="6350" cap="flat" cmpd="sng" algn="ctr">
+                      <a:solidFill>
+                        <a:srgbClr val="DCD6C9"/>
+                      </a:solidFill>
+                      <a:prstDash val="solid"/>
+                      <a:round/>
+                      <a:headEnd type="none" w="med" len="med"/>
+                      <a:tailEnd type="none" w="med" len="med"/>
+                    </a:lnL>
+                    <a:lnR w="6350" cap="flat" cmpd="sng" algn="ctr">
+                      <a:solidFill>
+                        <a:srgbClr val="DCD6C9"/>
+                      </a:solidFill>
+                      <a:prstDash val="solid"/>
+                      <a:round/>
+                      <a:headEnd type="none" w="med" len="med"/>
+                      <a:tailEnd type="none" w="med" len="med"/>
+                    </a:lnR>
+                    <a:lnT w="6350" cap="flat" cmpd="sng" algn="ctr">
+                      <a:solidFill>
+                        <a:srgbClr val="DCD6C9"/>
+                      </a:solidFill>
+                      <a:prstDash val="solid"/>
+                      <a:round/>
+                      <a:headEnd type="none" w="med" len="med"/>
+                      <a:tailEnd type="none" w="med" len="med"/>
+                    </a:lnT>
+                    <a:lnB w="6350" cap="flat" cmpd="sng" algn="ctr">
+                      <a:solidFill>
+                        <a:srgbClr val="DCD6C9"/>
+                      </a:solidFill>
+                      <a:prstDash val="solid"/>
+                      <a:round/>
+                      <a:headEnd type="none" w="med" len="med"/>
+                      <a:tailEnd type="none" w="med" len="med"/>
+                    </a:lnB>
+                    <a:solidFill>
+                      <a:srgbClr val="134744"/>
+                    </a:solidFill>
+                  </a:tcPr>
+                </a:tc>
+                <a:tc>
+                  <a:txBody>
+                    <a:bodyPr/>
+                    <a:lstStyle/>
+                    <a:p>
+                      <a:pPr indent="0" marL="0">
+                        <a:buNone/>
+                      </a:pPr>
+                      <a:r>
+                        <a:rPr lang="en-US" sz="1100" b="1" dirty="0">
+                          <a:solidFill>
+                            <a:srgbClr val="FFFFFF"/>
+                          </a:solidFill>
+                          <a:latin typeface="맑은 고딕" pitchFamily="34" charset="0"/>
+                          <a:ea typeface="맑은 고딕" pitchFamily="34" charset="-122"/>
+                          <a:cs typeface="맑은 고딕" pitchFamily="34" charset="-120"/>
+                        </a:rPr>
+                        <a:t>본과 학제</a:t>
+                      </a:r>
+                      <a:endParaRPr lang="en-US" sz="1100" dirty="0">
+                        <a:latin typeface="맑은 고딕" charset="0"/>
+                        <a:ea typeface="맑은 고딕" charset="0"/>
+                        <a:cs typeface="맑은 고딕" charset="0"/>
+                      </a:endParaRPr>
+                    </a:p>
+                  </a:txBody>
+                  <a:tcPr marL="88900" marR="88900" marT="50800" marB="50800" anchor="ctr">
+                    <a:lnL w="6350" cap="flat" cmpd="sng" algn="ctr">
+                      <a:solidFill>
+                        <a:srgbClr val="DCD6C9"/>
+                      </a:solidFill>
+                      <a:prstDash val="solid"/>
+                      <a:round/>
+                      <a:headEnd type="none" w="med" len="med"/>
+                      <a:tailEnd type="none" w="med" len="med"/>
+                    </a:lnL>
+                    <a:lnR w="6350" cap="flat" cmpd="sng" algn="ctr">
+                      <a:solidFill>
+                        <a:srgbClr val="DCD6C9"/>
+                      </a:solidFill>
+                      <a:prstDash val="solid"/>
+                      <a:round/>
+                      <a:headEnd type="none" w="med" len="med"/>
+                      <a:tailEnd type="none" w="med" len="med"/>
+                    </a:lnR>
+                    <a:lnT w="6350" cap="flat" cmpd="sng" algn="ctr">
+                      <a:solidFill>
+                        <a:srgbClr val="DCD6C9"/>
+                      </a:solidFill>
+                      <a:prstDash val="solid"/>
+                      <a:round/>
+                      <a:headEnd type="none" w="med" len="med"/>
+                      <a:tailEnd type="none" w="med" len="med"/>
+                    </a:lnT>
+                    <a:lnB w="6350" cap="flat" cmpd="sng" algn="ctr">
+                      <a:solidFill>
+                        <a:srgbClr val="DCD6C9"/>
+                      </a:solidFill>
+                      <a:prstDash val="solid"/>
+                      <a:round/>
+                      <a:headEnd type="none" w="med" len="med"/>
+                      <a:tailEnd type="none" w="med" len="med"/>
+                    </a:lnB>
+                    <a:solidFill>
+                      <a:srgbClr val="134744"/>
+                    </a:solidFill>
+                  </a:tcPr>
+                </a:tc>
+                <a:tc>
+                  <a:txBody>
+                    <a:bodyPr/>
+                    <a:lstStyle/>
+                    <a:p>
+                      <a:pPr indent="0" marL="0">
+                        <a:buNone/>
+                      </a:pPr>
+                      <a:r>
+                        <a:rPr lang="en-US" sz="1100" b="1" dirty="0">
+                          <a:solidFill>
+                            <a:srgbClr val="FFFFFF"/>
+                          </a:solidFill>
+                          <a:latin typeface="맑은 고딕" pitchFamily="34" charset="0"/>
+                          <a:ea typeface="맑은 고딕" pitchFamily="34" charset="-122"/>
+                          <a:cs typeface="맑은 고딕" pitchFamily="34" charset="-120"/>
+                        </a:rPr>
+                        <a:t>수여 학위</a:t>
+                      </a:r>
+                      <a:endParaRPr lang="en-US" sz="1100" dirty="0">
+                        <a:latin typeface="맑은 고딕" charset="0"/>
+                        <a:ea typeface="맑은 고딕" charset="0"/>
+                        <a:cs typeface="맑은 고딕" charset="0"/>
+                      </a:endParaRPr>
+                    </a:p>
+                  </a:txBody>
+                  <a:tcPr marL="88900" marR="88900" marT="50800" marB="50800" anchor="ctr">
+                    <a:lnL w="6350" cap="flat" cmpd="sng" algn="ctr">
+                      <a:solidFill>
+                        <a:srgbClr val="DCD6C9"/>
+                      </a:solidFill>
+                      <a:prstDash val="solid"/>
+                      <a:round/>
+                      <a:headEnd type="none" w="med" len="med"/>
+                      <a:tailEnd type="none" w="med" len="med"/>
+                    </a:lnL>
+                    <a:lnR w="6350" cap="flat" cmpd="sng" algn="ctr">
+                      <a:solidFill>
+                        <a:srgbClr val="DCD6C9"/>
+                      </a:solidFill>
+                      <a:prstDash val="solid"/>
+                      <a:round/>
+                      <a:headEnd type="none" w="med" len="med"/>
+                      <a:tailEnd type="none" w="med" len="med"/>
+                    </a:lnR>
+                    <a:lnT w="6350" cap="flat" cmpd="sng" algn="ctr">
+                      <a:solidFill>
+                        <a:srgbClr val="DCD6C9"/>
+                      </a:solidFill>
+                      <a:prstDash val="solid"/>
+                      <a:round/>
+                      <a:headEnd type="none" w="med" len="med"/>
+                      <a:tailEnd type="none" w="med" len="med"/>
+                    </a:lnT>
+                    <a:lnB w="6350" cap="flat" cmpd="sng" algn="ctr">
+                      <a:solidFill>
+                        <a:srgbClr val="DCD6C9"/>
+                      </a:solidFill>
+                      <a:prstDash val="solid"/>
+                      <a:round/>
+                      <a:headEnd type="none" w="med" len="med"/>
+                      <a:tailEnd type="none" w="med" len="med"/>
+                    </a:lnB>
+                    <a:solidFill>
+                      <a:srgbClr val="134744"/>
+                    </a:solidFill>
+                  </a:tcPr>
+                </a:tc>
+                <a:tc>
+                  <a:txBody>
+                    <a:bodyPr/>
+                    <a:lstStyle/>
+                    <a:p>
+                      <a:pPr indent="0" marL="0">
+                        <a:buNone/>
+                      </a:pPr>
+                      <a:r>
+                        <a:rPr lang="en-US" sz="1100" b="1" dirty="0">
+                          <a:solidFill>
+                            <a:srgbClr val="FFFFFF"/>
+                          </a:solidFill>
+                          <a:latin typeface="맑은 고딕" pitchFamily="34" charset="0"/>
+                          <a:ea typeface="맑은 고딕" pitchFamily="34" charset="-122"/>
+                          <a:cs typeface="맑은 고딕" pitchFamily="34" charset="-120"/>
+                        </a:rPr>
+                        <a:t>특징</a:t>
+                      </a:r>
+                      <a:endParaRPr lang="en-US" sz="1100" dirty="0">
+                        <a:latin typeface="맑은 고딕" charset="0"/>
+                        <a:ea typeface="맑은 고딕" charset="0"/>
+                        <a:cs typeface="맑은 고딕" charset="0"/>
+                      </a:endParaRPr>
+                    </a:p>
+                  </a:txBody>
+                  <a:tcPr marL="88900" marR="88900" marT="50800" marB="50800" anchor="ctr">
+                    <a:lnL w="6350" cap="flat" cmpd="sng" algn="ctr">
+                      <a:solidFill>
+                        <a:srgbClr val="DCD6C9"/>
+                      </a:solidFill>
+                      <a:prstDash val="solid"/>
+                      <a:round/>
+                      <a:headEnd type="none" w="med" len="med"/>
+                      <a:tailEnd type="none" w="med" len="med"/>
+                    </a:lnL>
+                    <a:lnR w="6350" cap="flat" cmpd="sng" algn="ctr">
+                      <a:solidFill>
+                        <a:srgbClr val="DCD6C9"/>
+                      </a:solidFill>
+                      <a:prstDash val="solid"/>
+                      <a:round/>
+                      <a:headEnd type="none" w="med" len="med"/>
+                      <a:tailEnd type="none" w="med" len="med"/>
+                    </a:lnR>
+                    <a:lnT w="6350" cap="flat" cmpd="sng" algn="ctr">
+                      <a:solidFill>
+                        <a:srgbClr val="DCD6C9"/>
+                      </a:solidFill>
+                      <a:prstDash val="solid"/>
+                      <a:round/>
+                      <a:headEnd type="none" w="med" len="med"/>
+                      <a:tailEnd type="none" w="med" len="med"/>
+                    </a:lnT>
+                    <a:lnB w="6350" cap="flat" cmpd="sng" algn="ctr">
+                      <a:solidFill>
+                        <a:srgbClr val="DCD6C9"/>
+                      </a:solidFill>
+                      <a:prstDash val="solid"/>
+                      <a:round/>
+                      <a:headEnd type="none" w="med" len="med"/>
+                      <a:tailEnd type="none" w="med" len="med"/>
+                    </a:lnB>
+                    <a:solidFill>
+                      <a:srgbClr val="134744"/>
+                    </a:solidFill>
+                  </a:tcPr>
+                </a:tc>
+              </a:tr>
+              <a:tr h="621792">
+                <a:tc>
+                  <a:txBody>
+                    <a:bodyPr/>
+                    <a:lstStyle/>
+                    <a:p>
+                      <a:pPr indent="0" marL="0">
+                        <a:buNone/>
+                      </a:pPr>
+                      <a:r>
+                        <a:rPr lang="en-US" sz="1100" dirty="0">
+                          <a:solidFill>
+                            <a:srgbClr val="1B2426"/>
+                          </a:solidFill>
+                          <a:latin typeface="맑은 고딕" pitchFamily="34" charset="0"/>
+                          <a:ea typeface="맑은 고딕" pitchFamily="34" charset="-122"/>
+                          <a:cs typeface="맑은 고딕" pitchFamily="34" charset="-120"/>
+                        </a:rPr>
+                        <a:t>모나쉬 말레이시아</a:t>
+                      </a:r>
+                      <a:endParaRPr lang="en-US" sz="1100" dirty="0">
+                        <a:latin typeface="맑은 고딕" charset="0"/>
+                        <a:ea typeface="맑은 고딕" charset="0"/>
+                        <a:cs typeface="맑은 고딕" charset="0"/>
+                      </a:endParaRPr>
+                    </a:p>
+                    <a:p>
+                      <a:pPr indent="0" marL="0">
+                        <a:buNone/>
+                      </a:pPr>
+                      <a:r>
+                        <a:rPr lang="en-US" sz="1100" dirty="0">
+                          <a:solidFill>
+                            <a:srgbClr val="1B2426"/>
+                          </a:solidFill>
+                          <a:latin typeface="맑은 고딕" pitchFamily="34" charset="0"/>
+                          <a:ea typeface="맑은 고딕" pitchFamily="34" charset="-122"/>
+                          <a:cs typeface="맑은 고딕" pitchFamily="34" charset="-120"/>
+                        </a:rPr>
+                        <a:t>(2편)</a:t>
+                      </a:r>
+                      <a:endParaRPr lang="en-US" sz="1100" dirty="0">
+                        <a:latin typeface="맑은 고딕" charset="0"/>
+                        <a:ea typeface="맑은 고딕" charset="0"/>
+                        <a:cs typeface="맑은 고딕" charset="0"/>
+                      </a:endParaRPr>
+                    </a:p>
+                  </a:txBody>
+                  <a:tcPr marL="88900" marR="88900" marT="50800" marB="50800" anchor="ctr">
+                    <a:lnL w="6350" cap="flat" cmpd="sng" algn="ctr">
+                      <a:solidFill>
+                        <a:srgbClr val="DCD6C9"/>
+                      </a:solidFill>
+                      <a:prstDash val="solid"/>
+                      <a:round/>
+                      <a:headEnd type="none" w="med" len="med"/>
+                      <a:tailEnd type="none" w="med" len="med"/>
+                    </a:lnL>
+                    <a:lnR w="6350" cap="flat" cmpd="sng" algn="ctr">
+                      <a:solidFill>
+                        <a:srgbClr val="DCD6C9"/>
+                      </a:solidFill>
+                      <a:prstDash val="solid"/>
+                      <a:round/>
+                      <a:headEnd type="none" w="med" len="med"/>
+                      <a:tailEnd type="none" w="med" len="med"/>
+                    </a:lnR>
+                    <a:lnT w="6350" cap="flat" cmpd="sng" algn="ctr">
+                      <a:solidFill>
+                        <a:srgbClr val="DCD6C9"/>
+                      </a:solidFill>
+                      <a:prstDash val="solid"/>
+                      <a:round/>
+                      <a:headEnd type="none" w="med" len="med"/>
+                      <a:tailEnd type="none" w="med" len="med"/>
+                    </a:lnT>
+                    <a:lnB w="6350" cap="flat" cmpd="sng" algn="ctr">
+                      <a:solidFill>
+                        <a:srgbClr val="DCD6C9"/>
+                      </a:solidFill>
+                      <a:prstDash val="solid"/>
+                      <a:round/>
+                      <a:headEnd type="none" w="med" len="med"/>
+                      <a:tailEnd type="none" w="med" len="med"/>
+                    </a:lnB>
+                    <a:solidFill>
+                      <a:srgbClr val="FFFFFF"/>
+                    </a:solidFill>
+                  </a:tcPr>
+                </a:tc>
+                <a:tc>
+                  <a:txBody>
+                    <a:bodyPr/>
+                    <a:lstStyle/>
+                    <a:p>
+                      <a:pPr indent="0" marL="0">
+                        <a:buNone/>
+                      </a:pPr>
+                      <a:r>
+                        <a:rPr lang="en-US" sz="1100" dirty="0">
+                          <a:solidFill>
+                            <a:srgbClr val="1B2426"/>
+                          </a:solidFill>
+                          <a:latin typeface="맑은 고딕" pitchFamily="34" charset="0"/>
+                          <a:ea typeface="맑은 고딕" pitchFamily="34" charset="-122"/>
+                          <a:cs typeface="맑은 고딕" pitchFamily="34" charset="-120"/>
+                        </a:rPr>
+                        <a:t>4년</a:t>
+                      </a:r>
+                      <a:endParaRPr lang="en-US" sz="1100" dirty="0">
+                        <a:latin typeface="맑은 고딕" charset="0"/>
+                        <a:ea typeface="맑은 고딕" charset="0"/>
+                        <a:cs typeface="맑은 고딕" charset="0"/>
+                      </a:endParaRPr>
+                    </a:p>
+                  </a:txBody>
+                  <a:tcPr marL="88900" marR="88900" marT="50800" marB="50800" anchor="ctr">
+                    <a:lnL w="6350" cap="flat" cmpd="sng" algn="ctr">
+                      <a:solidFill>
+                        <a:srgbClr val="DCD6C9"/>
+                      </a:solidFill>
+                      <a:prstDash val="solid"/>
+                      <a:round/>
+                      <a:headEnd type="none" w="med" len="med"/>
+                      <a:tailEnd type="none" w="med" len="med"/>
+                    </a:lnL>
+                    <a:lnR w="6350" cap="flat" cmpd="sng" algn="ctr">
+                      <a:solidFill>
+                        <a:srgbClr val="DCD6C9"/>
+                      </a:solidFill>
+                      <a:prstDash val="solid"/>
+                      <a:round/>
+                      <a:headEnd type="none" w="med" len="med"/>
+                      <a:tailEnd type="none" w="med" len="med"/>
+                    </a:lnR>
+                    <a:lnT w="6350" cap="flat" cmpd="sng" algn="ctr">
+                      <a:solidFill>
+                        <a:srgbClr val="DCD6C9"/>
+                      </a:solidFill>
+                      <a:prstDash val="solid"/>
+                      <a:round/>
+                      <a:headEnd type="none" w="med" len="med"/>
+                      <a:tailEnd type="none" w="med" len="med"/>
+                    </a:lnT>
+                    <a:lnB w="6350" cap="flat" cmpd="sng" algn="ctr">
+                      <a:solidFill>
+                        <a:srgbClr val="DCD6C9"/>
+                      </a:solidFill>
+                      <a:prstDash val="solid"/>
+                      <a:round/>
+                      <a:headEnd type="none" w="med" len="med"/>
+                      <a:tailEnd type="none" w="med" len="med"/>
+                    </a:lnB>
+                    <a:solidFill>
+                      <a:srgbClr val="FFFFFF"/>
+                    </a:solidFill>
+                  </a:tcPr>
+                </a:tc>
+                <a:tc>
+                  <a:txBody>
+                    <a:bodyPr/>
+                    <a:lstStyle/>
+                    <a:p>
+                      <a:pPr indent="0" marL="0">
+                        <a:buNone/>
+                      </a:pPr>
+                      <a:r>
+                        <a:rPr lang="en-US" sz="1100" dirty="0">
+                          <a:solidFill>
+                            <a:srgbClr val="1B2426"/>
+                          </a:solidFill>
+                          <a:latin typeface="맑은 고딕" pitchFamily="34" charset="0"/>
+                          <a:ea typeface="맑은 고딕" pitchFamily="34" charset="-122"/>
+                          <a:cs typeface="맑은 고딕" pitchFamily="34" charset="-120"/>
+                        </a:rPr>
+                        <a:t>Bachelor of Engineering</a:t>
+                      </a:r>
+                      <a:endParaRPr lang="en-US" sz="1100" dirty="0">
+                        <a:latin typeface="맑은 고딕" charset="0"/>
+                        <a:ea typeface="맑은 고딕" charset="0"/>
+                        <a:cs typeface="맑은 고딕" charset="0"/>
+                      </a:endParaRPr>
+                    </a:p>
+                    <a:p>
+                      <a:pPr indent="0" marL="0">
+                        <a:buNone/>
+                      </a:pPr>
+                      <a:r>
+                        <a:rPr lang="en-US" sz="1100" dirty="0">
+                          <a:solidFill>
+                            <a:srgbClr val="1B2426"/>
+                          </a:solidFill>
+                          <a:latin typeface="맑은 고딕" pitchFamily="34" charset="0"/>
+                          <a:ea typeface="맑은 고딕" pitchFamily="34" charset="-122"/>
+                          <a:cs typeface="맑은 고딕" pitchFamily="34" charset="-120"/>
+                        </a:rPr>
+                        <a:t>(Honours)</a:t>
+                      </a:r>
+                      <a:endParaRPr lang="en-US" sz="1100" dirty="0">
+                        <a:latin typeface="맑은 고딕" charset="0"/>
+                        <a:ea typeface="맑은 고딕" charset="0"/>
+                        <a:cs typeface="맑은 고딕" charset="0"/>
+                      </a:endParaRPr>
+                    </a:p>
+                  </a:txBody>
+                  <a:tcPr marL="88900" marR="88900" marT="50800" marB="50800" anchor="ctr">
+                    <a:lnL w="6350" cap="flat" cmpd="sng" algn="ctr">
+                      <a:solidFill>
+                        <a:srgbClr val="DCD6C9"/>
+                      </a:solidFill>
+                      <a:prstDash val="solid"/>
+                      <a:round/>
+                      <a:headEnd type="none" w="med" len="med"/>
+                      <a:tailEnd type="none" w="med" len="med"/>
+                    </a:lnL>
+                    <a:lnR w="6350" cap="flat" cmpd="sng" algn="ctr">
+                      <a:solidFill>
+                        <a:srgbClr val="DCD6C9"/>
+                      </a:solidFill>
+                      <a:prstDash val="solid"/>
+                      <a:round/>
+                      <a:headEnd type="none" w="med" len="med"/>
+                      <a:tailEnd type="none" w="med" len="med"/>
+                    </a:lnR>
+                    <a:lnT w="6350" cap="flat" cmpd="sng" algn="ctr">
+                      <a:solidFill>
+                        <a:srgbClr val="DCD6C9"/>
+                      </a:solidFill>
+                      <a:prstDash val="solid"/>
+                      <a:round/>
+                      <a:headEnd type="none" w="med" len="med"/>
+                      <a:tailEnd type="none" w="med" len="med"/>
+                    </a:lnT>
+                    <a:lnB w="6350" cap="flat" cmpd="sng" algn="ctr">
+                      <a:solidFill>
+                        <a:srgbClr val="DCD6C9"/>
+                      </a:solidFill>
+                      <a:prstDash val="solid"/>
+                      <a:round/>
+                      <a:headEnd type="none" w="med" len="med"/>
+                      <a:tailEnd type="none" w="med" len="med"/>
+                    </a:lnB>
+                    <a:solidFill>
+                      <a:srgbClr val="FFFFFF"/>
+                    </a:solidFill>
+                  </a:tcPr>
+                </a:tc>
+                <a:tc>
+                  <a:txBody>
+                    <a:bodyPr/>
+                    <a:lstStyle/>
+                    <a:p>
+                      <a:pPr indent="0" marL="0">
+                        <a:buNone/>
+                      </a:pPr>
+                      <a:r>
+                        <a:rPr lang="en-US" sz="1100" dirty="0">
+                          <a:solidFill>
+                            <a:srgbClr val="1B2426"/>
+                          </a:solidFill>
+                          <a:latin typeface="맑은 고딕" pitchFamily="34" charset="0"/>
+                          <a:ea typeface="맑은 고딕" pitchFamily="34" charset="-122"/>
+                          <a:cs typeface="맑은 고딕" pitchFamily="34" charset="-120"/>
+                        </a:rPr>
+                        <a:t>호주 학제를 따릅니다. Honours가 과정 안에 포함된 4년제이며, 호주 자격체계(AQF) 8등급 — 학사 중 가장 높은 등급입니다.</a:t>
+                      </a:r>
+                      <a:endParaRPr lang="en-US" sz="1100" dirty="0">
+                        <a:latin typeface="맑은 고딕" charset="0"/>
+                        <a:ea typeface="맑은 고딕" charset="0"/>
+                        <a:cs typeface="맑은 고딕" charset="0"/>
+                      </a:endParaRPr>
+                    </a:p>
+                  </a:txBody>
+                  <a:tcPr marL="88900" marR="88900" marT="50800" marB="50800" anchor="ctr">
+                    <a:lnL w="6350" cap="flat" cmpd="sng" algn="ctr">
+                      <a:solidFill>
+                        <a:srgbClr val="DCD6C9"/>
+                      </a:solidFill>
+                      <a:prstDash val="solid"/>
+                      <a:round/>
+                      <a:headEnd type="none" w="med" len="med"/>
+                      <a:tailEnd type="none" w="med" len="med"/>
+                    </a:lnL>
+                    <a:lnR w="6350" cap="flat" cmpd="sng" algn="ctr">
+                      <a:solidFill>
+                        <a:srgbClr val="DCD6C9"/>
+                      </a:solidFill>
+                      <a:prstDash val="solid"/>
+                      <a:round/>
+                      <a:headEnd type="none" w="med" len="med"/>
+                      <a:tailEnd type="none" w="med" len="med"/>
+                    </a:lnR>
+                    <a:lnT w="6350" cap="flat" cmpd="sng" algn="ctr">
+                      <a:solidFill>
+                        <a:srgbClr val="DCD6C9"/>
+                      </a:solidFill>
+                      <a:prstDash val="solid"/>
+                      <a:round/>
+                      <a:headEnd type="none" w="med" len="med"/>
+                      <a:tailEnd type="none" w="med" len="med"/>
+                    </a:lnT>
+                    <a:lnB w="6350" cap="flat" cmpd="sng" algn="ctr">
+                      <a:solidFill>
+                        <a:srgbClr val="DCD6C9"/>
+                      </a:solidFill>
+                      <a:prstDash val="solid"/>
+                      <a:round/>
+                      <a:headEnd type="none" w="med" len="med"/>
+                      <a:tailEnd type="none" w="med" len="med"/>
+                    </a:lnB>
+                    <a:solidFill>
+                      <a:srgbClr val="FFFFFF"/>
+                    </a:solidFill>
+                  </a:tcPr>
+                </a:tc>
+              </a:tr>
+              <a:tr h="621792">
+                <a:tc>
+                  <a:txBody>
+                    <a:bodyPr/>
+                    <a:lstStyle/>
+                    <a:p>
+                      <a:pPr indent="0" marL="0">
+                        <a:buNone/>
+                      </a:pPr>
+                      <a:r>
+                        <a:rPr lang="en-US" sz="1100" dirty="0">
+                          <a:solidFill>
+                            <a:srgbClr val="1B2426"/>
+                          </a:solidFill>
+                          <a:latin typeface="맑은 고딕" pitchFamily="34" charset="0"/>
+                          <a:ea typeface="맑은 고딕" pitchFamily="34" charset="-122"/>
+                          <a:cs typeface="맑은 고딕" pitchFamily="34" charset="-120"/>
+                        </a:rPr>
+                        <a:t>노팅엄 말레이시아</a:t>
+                      </a:r>
+                      <a:endParaRPr lang="en-US" sz="1100" dirty="0">
+                        <a:latin typeface="맑은 고딕" charset="0"/>
+                        <a:ea typeface="맑은 고딕" charset="0"/>
+                        <a:cs typeface="맑은 고딕" charset="0"/>
+                      </a:endParaRPr>
+                    </a:p>
+                    <a:p>
+                      <a:pPr indent="0" marL="0">
+                        <a:buNone/>
+                      </a:pPr>
+                      <a:r>
+                        <a:rPr lang="en-US" sz="1100" dirty="0">
+                          <a:solidFill>
+                            <a:srgbClr val="1B2426"/>
+                          </a:solidFill>
+                          <a:latin typeface="맑은 고딕" pitchFamily="34" charset="0"/>
+                          <a:ea typeface="맑은 고딕" pitchFamily="34" charset="-122"/>
+                          <a:cs typeface="맑은 고딕" pitchFamily="34" charset="-120"/>
+                        </a:rPr>
+                        <a:t>(2편)</a:t>
+                      </a:r>
+                      <a:endParaRPr lang="en-US" sz="1100" dirty="0">
+                        <a:latin typeface="맑은 고딕" charset="0"/>
+                        <a:ea typeface="맑은 고딕" charset="0"/>
+                        <a:cs typeface="맑은 고딕" charset="0"/>
+                      </a:endParaRPr>
+                    </a:p>
+                  </a:txBody>
+                  <a:tcPr marL="88900" marR="88900" marT="50800" marB="50800" anchor="ctr">
+                    <a:lnL w="6350" cap="flat" cmpd="sng" algn="ctr">
+                      <a:solidFill>
+                        <a:srgbClr val="DCD6C9"/>
+                      </a:solidFill>
+                      <a:prstDash val="solid"/>
+                      <a:round/>
+                      <a:headEnd type="none" w="med" len="med"/>
+                      <a:tailEnd type="none" w="med" len="med"/>
+                    </a:lnL>
+                    <a:lnR w="6350" cap="flat" cmpd="sng" algn="ctr">
+                      <a:solidFill>
+                        <a:srgbClr val="DCD6C9"/>
+                      </a:solidFill>
+                      <a:prstDash val="solid"/>
+                      <a:round/>
+                      <a:headEnd type="none" w="med" len="med"/>
+                      <a:tailEnd type="none" w="med" len="med"/>
+                    </a:lnR>
+                    <a:lnT w="6350" cap="flat" cmpd="sng" algn="ctr">
+                      <a:solidFill>
+                        <a:srgbClr val="DCD6C9"/>
+                      </a:solidFill>
+                      <a:prstDash val="solid"/>
+                      <a:round/>
+                      <a:headEnd type="none" w="med" len="med"/>
+                      <a:tailEnd type="none" w="med" len="med"/>
+                    </a:lnT>
+                    <a:lnB w="6350" cap="flat" cmpd="sng" algn="ctr">
+                      <a:solidFill>
+                        <a:srgbClr val="DCD6C9"/>
+                      </a:solidFill>
+                      <a:prstDash val="solid"/>
+                      <a:round/>
+                      <a:headEnd type="none" w="med" len="med"/>
+                      <a:tailEnd type="none" w="med" len="med"/>
+                    </a:lnB>
+                    <a:solidFill>
+                      <a:srgbClr val="F1EDE4"/>
+                    </a:solidFill>
+                  </a:tcPr>
+                </a:tc>
+                <a:tc>
+                  <a:txBody>
+                    <a:bodyPr/>
+                    <a:lstStyle/>
+                    <a:p>
+                      <a:pPr indent="0" marL="0">
+                        <a:buNone/>
+                      </a:pPr>
+                      <a:r>
+                        <a:rPr lang="en-US" sz="1100" dirty="0">
+                          <a:solidFill>
+                            <a:srgbClr val="1B2426"/>
+                          </a:solidFill>
+                          <a:latin typeface="맑은 고딕" pitchFamily="34" charset="0"/>
+                          <a:ea typeface="맑은 고딕" pitchFamily="34" charset="-122"/>
+                          <a:cs typeface="맑은 고딕" pitchFamily="34" charset="-120"/>
+                        </a:rPr>
+                        <a:t>4년</a:t>
+                      </a:r>
+                      <a:endParaRPr lang="en-US" sz="1100" dirty="0">
+                        <a:latin typeface="맑은 고딕" charset="0"/>
+                        <a:ea typeface="맑은 고딕" charset="0"/>
+                        <a:cs typeface="맑은 고딕" charset="0"/>
+                      </a:endParaRPr>
+                    </a:p>
+                  </a:txBody>
+                  <a:tcPr marL="88900" marR="88900" marT="50800" marB="50800" anchor="ctr">
+                    <a:lnL w="6350" cap="flat" cmpd="sng" algn="ctr">
+                      <a:solidFill>
+                        <a:srgbClr val="DCD6C9"/>
+                      </a:solidFill>
+                      <a:prstDash val="solid"/>
+                      <a:round/>
+                      <a:headEnd type="none" w="med" len="med"/>
+                      <a:tailEnd type="none" w="med" len="med"/>
+                    </a:lnL>
+                    <a:lnR w="6350" cap="flat" cmpd="sng" algn="ctr">
+                      <a:solidFill>
+                        <a:srgbClr val="DCD6C9"/>
+                      </a:solidFill>
+                      <a:prstDash val="solid"/>
+                      <a:round/>
+                      <a:headEnd type="none" w="med" len="med"/>
+                      <a:tailEnd type="none" w="med" len="med"/>
+                    </a:lnR>
+                    <a:lnT w="6350" cap="flat" cmpd="sng" algn="ctr">
+                      <a:solidFill>
+                        <a:srgbClr val="DCD6C9"/>
+                      </a:solidFill>
+                      <a:prstDash val="solid"/>
+                      <a:round/>
+                      <a:headEnd type="none" w="med" len="med"/>
+                      <a:tailEnd type="none" w="med" len="med"/>
+                    </a:lnT>
+                    <a:lnB w="6350" cap="flat" cmpd="sng" algn="ctr">
+                      <a:solidFill>
+                        <a:srgbClr val="DCD6C9"/>
+                      </a:solidFill>
+                      <a:prstDash val="solid"/>
+                      <a:round/>
+                      <a:headEnd type="none" w="med" len="med"/>
+                      <a:tailEnd type="none" w="med" len="med"/>
+                    </a:lnB>
+                    <a:solidFill>
+                      <a:srgbClr val="F1EDE4"/>
+                    </a:solidFill>
+                  </a:tcPr>
+                </a:tc>
+                <a:tc>
+                  <a:txBody>
+                    <a:bodyPr/>
+                    <a:lstStyle/>
+                    <a:p>
+                      <a:pPr indent="0" marL="0">
+                        <a:buNone/>
+                      </a:pPr>
+                      <a:r>
+                        <a:rPr lang="en-US" sz="1100" dirty="0">
+                          <a:solidFill>
+                            <a:srgbClr val="1B2426"/>
+                          </a:solidFill>
+                          <a:latin typeface="맑은 고딕" pitchFamily="34" charset="0"/>
+                          <a:ea typeface="맑은 고딕" pitchFamily="34" charset="-122"/>
+                          <a:cs typeface="맑은 고딕" pitchFamily="34" charset="-120"/>
+                        </a:rPr>
+                        <a:t>MEng (Hons)</a:t>
+                      </a:r>
+                      <a:endParaRPr lang="en-US" sz="1100" dirty="0">
+                        <a:latin typeface="맑은 고딕" charset="0"/>
+                        <a:ea typeface="맑은 고딕" charset="0"/>
+                        <a:cs typeface="맑은 고딕" charset="0"/>
+                      </a:endParaRPr>
+                    </a:p>
+                    <a:p>
+                      <a:pPr indent="0" marL="0">
+                        <a:buNone/>
+                      </a:pPr>
+                      <a:r>
+                        <a:rPr lang="en-US" sz="1100" dirty="0">
+                          <a:solidFill>
+                            <a:srgbClr val="1B2426"/>
+                          </a:solidFill>
+                          <a:latin typeface="맑은 고딕" pitchFamily="34" charset="0"/>
+                          <a:ea typeface="맑은 고딕" pitchFamily="34" charset="-122"/>
+                          <a:cs typeface="맑은 고딕" pitchFamily="34" charset="-120"/>
+                        </a:rPr>
+                        <a:t>석사통합 학위</a:t>
+                      </a:r>
+                      <a:endParaRPr lang="en-US" sz="1100" dirty="0">
+                        <a:latin typeface="맑은 고딕" charset="0"/>
+                        <a:ea typeface="맑은 고딕" charset="0"/>
+                        <a:cs typeface="맑은 고딕" charset="0"/>
+                      </a:endParaRPr>
+                    </a:p>
+                  </a:txBody>
+                  <a:tcPr marL="88900" marR="88900" marT="50800" marB="50800" anchor="ctr">
+                    <a:lnL w="6350" cap="flat" cmpd="sng" algn="ctr">
+                      <a:solidFill>
+                        <a:srgbClr val="DCD6C9"/>
+                      </a:solidFill>
+                      <a:prstDash val="solid"/>
+                      <a:round/>
+                      <a:headEnd type="none" w="med" len="med"/>
+                      <a:tailEnd type="none" w="med" len="med"/>
+                    </a:lnL>
+                    <a:lnR w="6350" cap="flat" cmpd="sng" algn="ctr">
+                      <a:solidFill>
+                        <a:srgbClr val="DCD6C9"/>
+                      </a:solidFill>
+                      <a:prstDash val="solid"/>
+                      <a:round/>
+                      <a:headEnd type="none" w="med" len="med"/>
+                      <a:tailEnd type="none" w="med" len="med"/>
+                    </a:lnR>
+                    <a:lnT w="6350" cap="flat" cmpd="sng" algn="ctr">
+                      <a:solidFill>
+                        <a:srgbClr val="DCD6C9"/>
+                      </a:solidFill>
+                      <a:prstDash val="solid"/>
+                      <a:round/>
+                      <a:headEnd type="none" w="med" len="med"/>
+                      <a:tailEnd type="none" w="med" len="med"/>
+                    </a:lnT>
+                    <a:lnB w="6350" cap="flat" cmpd="sng" algn="ctr">
+                      <a:solidFill>
+                        <a:srgbClr val="DCD6C9"/>
+                      </a:solidFill>
+                      <a:prstDash val="solid"/>
+                      <a:round/>
+                      <a:headEnd type="none" w="med" len="med"/>
+                      <a:tailEnd type="none" w="med" len="med"/>
+                    </a:lnB>
+                    <a:solidFill>
+                      <a:srgbClr val="F1EDE4"/>
+                    </a:solidFill>
+                  </a:tcPr>
+                </a:tc>
+                <a:tc>
+                  <a:txBody>
+                    <a:bodyPr/>
+                    <a:lstStyle/>
+                    <a:p>
+                      <a:pPr indent="0" marL="0">
+                        <a:buNone/>
+                      </a:pPr>
+                      <a:r>
+                        <a:rPr lang="en-US" sz="1100" dirty="0">
+                          <a:solidFill>
+                            <a:srgbClr val="1B2426"/>
+                          </a:solidFill>
+                          <a:latin typeface="맑은 고딕" pitchFamily="34" charset="0"/>
+                          <a:ea typeface="맑은 고딕" pitchFamily="34" charset="-122"/>
+                          <a:cs typeface="맑은 고딕" pitchFamily="34" charset="-120"/>
+                        </a:rPr>
+                        <a:t>영국 학제를 따릅니다. 학사(BEng)가 아니라 석사통합(MEng)이며, 2+2 또는 3+1로 영국 본교 이동이 가능합니다.</a:t>
+                      </a:r>
+                      <a:endParaRPr lang="en-US" sz="1100" dirty="0">
+                        <a:latin typeface="맑은 고딕" charset="0"/>
+                        <a:ea typeface="맑은 고딕" charset="0"/>
+                        <a:cs typeface="맑은 고딕" charset="0"/>
+                      </a:endParaRPr>
+                    </a:p>
+                  </a:txBody>
+                  <a:tcPr marL="88900" marR="88900" marT="50800" marB="50800" anchor="ctr">
+                    <a:lnL w="6350" cap="flat" cmpd="sng" algn="ctr">
+                      <a:solidFill>
+                        <a:srgbClr val="DCD6C9"/>
+                      </a:solidFill>
+                      <a:prstDash val="solid"/>
+                      <a:round/>
+                      <a:headEnd type="none" w="med" len="med"/>
+                      <a:tailEnd type="none" w="med" len="med"/>
+                    </a:lnL>
+                    <a:lnR w="6350" cap="flat" cmpd="sng" algn="ctr">
+                      <a:solidFill>
+                        <a:srgbClr val="DCD6C9"/>
+                      </a:solidFill>
+                      <a:prstDash val="solid"/>
+                      <a:round/>
+                      <a:headEnd type="none" w="med" len="med"/>
+                      <a:tailEnd type="none" w="med" len="med"/>
+                    </a:lnR>
+                    <a:lnT w="6350" cap="flat" cmpd="sng" algn="ctr">
+                      <a:solidFill>
+                        <a:srgbClr val="DCD6C9"/>
+                      </a:solidFill>
+                      <a:prstDash val="solid"/>
+                      <a:round/>
+                      <a:headEnd type="none" w="med" len="med"/>
+                      <a:tailEnd type="none" w="med" len="med"/>
+                    </a:lnT>
+                    <a:lnB w="6350" cap="flat" cmpd="sng" algn="ctr">
+                      <a:solidFill>
+                        <a:srgbClr val="DCD6C9"/>
+                      </a:solidFill>
+                      <a:prstDash val="solid"/>
+                      <a:round/>
+                      <a:headEnd type="none" w="med" len="med"/>
+                      <a:tailEnd type="none" w="med" len="med"/>
+                    </a:lnB>
+                    <a:solidFill>
+                      <a:srgbClr val="F1EDE4"/>
+                    </a:solidFill>
+                  </a:tcPr>
+                </a:tc>
+              </a:tr>
+              <a:tr h="621792">
+                <a:tc>
+                  <a:txBody>
+                    <a:bodyPr/>
+                    <a:lstStyle/>
+                    <a:p>
+                      <a:pPr indent="0" marL="0">
+                        <a:buNone/>
+                      </a:pPr>
+                      <a:r>
+                        <a:rPr lang="en-US" sz="1100" dirty="0">
+                          <a:solidFill>
+                            <a:srgbClr val="1B2426"/>
+                          </a:solidFill>
+                          <a:latin typeface="맑은 고딕" pitchFamily="34" charset="0"/>
+                          <a:ea typeface="맑은 고딕" pitchFamily="34" charset="-122"/>
+                          <a:cs typeface="맑은 고딕" pitchFamily="34" charset="-120"/>
+                        </a:rPr>
+                        <a:t>테일러스</a:t>
+                      </a:r>
+                      <a:endParaRPr lang="en-US" sz="1100" dirty="0">
+                        <a:latin typeface="맑은 고딕" charset="0"/>
+                        <a:ea typeface="맑은 고딕" charset="0"/>
+                        <a:cs typeface="맑은 고딕" charset="0"/>
+                      </a:endParaRPr>
+                    </a:p>
+                    <a:p>
+                      <a:pPr indent="0" marL="0">
+                        <a:buNone/>
+                      </a:pPr>
+                      <a:r>
+                        <a:rPr lang="en-US" sz="1100" dirty="0">
+                          <a:solidFill>
+                            <a:srgbClr val="1B2426"/>
+                          </a:solidFill>
+                          <a:latin typeface="맑은 고딕" pitchFamily="34" charset="0"/>
+                          <a:ea typeface="맑은 고딕" pitchFamily="34" charset="-122"/>
+                          <a:cs typeface="맑은 고딕" pitchFamily="34" charset="-120"/>
+                        </a:rPr>
+                        <a:t>(1편)</a:t>
+                      </a:r>
+                      <a:endParaRPr lang="en-US" sz="1100" dirty="0">
+                        <a:latin typeface="맑은 고딕" charset="0"/>
+                        <a:ea typeface="맑은 고딕" charset="0"/>
+                        <a:cs typeface="맑은 고딕" charset="0"/>
+                      </a:endParaRPr>
+                    </a:p>
+                  </a:txBody>
+                  <a:tcPr marL="88900" marR="88900" marT="50800" marB="50800" anchor="ctr">
+                    <a:lnL w="6350" cap="flat" cmpd="sng" algn="ctr">
+                      <a:solidFill>
+                        <a:srgbClr val="DCD6C9"/>
+                      </a:solidFill>
+                      <a:prstDash val="solid"/>
+                      <a:round/>
+                      <a:headEnd type="none" w="med" len="med"/>
+                      <a:tailEnd type="none" w="med" len="med"/>
+                    </a:lnL>
+                    <a:lnR w="6350" cap="flat" cmpd="sng" algn="ctr">
+                      <a:solidFill>
+                        <a:srgbClr val="DCD6C9"/>
+                      </a:solidFill>
+                      <a:prstDash val="solid"/>
+                      <a:round/>
+                      <a:headEnd type="none" w="med" len="med"/>
+                      <a:tailEnd type="none" w="med" len="med"/>
+                    </a:lnR>
+                    <a:lnT w="6350" cap="flat" cmpd="sng" algn="ctr">
+                      <a:solidFill>
+                        <a:srgbClr val="DCD6C9"/>
+                      </a:solidFill>
+                      <a:prstDash val="solid"/>
+                      <a:round/>
+                      <a:headEnd type="none" w="med" len="med"/>
+                      <a:tailEnd type="none" w="med" len="med"/>
+                    </a:lnT>
+                    <a:lnB w="6350" cap="flat" cmpd="sng" algn="ctr">
+                      <a:solidFill>
+                        <a:srgbClr val="DCD6C9"/>
+                      </a:solidFill>
+                      <a:prstDash val="solid"/>
+                      <a:round/>
+                      <a:headEnd type="none" w="med" len="med"/>
+                      <a:tailEnd type="none" w="med" len="med"/>
+                    </a:lnB>
+                    <a:solidFill>
+                      <a:srgbClr val="FFFFFF"/>
+                    </a:solidFill>
+                  </a:tcPr>
+                </a:tc>
+                <a:tc>
+                  <a:txBody>
+                    <a:bodyPr/>
+                    <a:lstStyle/>
+                    <a:p>
+                      <a:pPr indent="0" marL="0">
+                        <a:buNone/>
+                      </a:pPr>
+                      <a:r>
+                        <a:rPr lang="en-US" sz="1100" dirty="0">
+                          <a:solidFill>
+                            <a:srgbClr val="1B2426"/>
+                          </a:solidFill>
+                          <a:latin typeface="맑은 고딕" pitchFamily="34" charset="0"/>
+                          <a:ea typeface="맑은 고딕" pitchFamily="34" charset="-122"/>
+                          <a:cs typeface="맑은 고딕" pitchFamily="34" charset="-120"/>
+                        </a:rPr>
+                        <a:t>4년</a:t>
+                      </a:r>
+                      <a:endParaRPr lang="en-US" sz="1100" dirty="0">
+                        <a:latin typeface="맑은 고딕" charset="0"/>
+                        <a:ea typeface="맑은 고딕" charset="0"/>
+                        <a:cs typeface="맑은 고딕" charset="0"/>
+                      </a:endParaRPr>
+                    </a:p>
+                  </a:txBody>
+                  <a:tcPr marL="88900" marR="88900" marT="50800" marB="50800" anchor="ctr">
+                    <a:lnL w="6350" cap="flat" cmpd="sng" algn="ctr">
+                      <a:solidFill>
+                        <a:srgbClr val="DCD6C9"/>
+                      </a:solidFill>
+                      <a:prstDash val="solid"/>
+                      <a:round/>
+                      <a:headEnd type="none" w="med" len="med"/>
+                      <a:tailEnd type="none" w="med" len="med"/>
+                    </a:lnL>
+                    <a:lnR w="6350" cap="flat" cmpd="sng" algn="ctr">
+                      <a:solidFill>
+                        <a:srgbClr val="DCD6C9"/>
+                      </a:solidFill>
+                      <a:prstDash val="solid"/>
+                      <a:round/>
+                      <a:headEnd type="none" w="med" len="med"/>
+                      <a:tailEnd type="none" w="med" len="med"/>
+                    </a:lnR>
+                    <a:lnT w="6350" cap="flat" cmpd="sng" algn="ctr">
+                      <a:solidFill>
+                        <a:srgbClr val="DCD6C9"/>
+                      </a:solidFill>
+                      <a:prstDash val="solid"/>
+                      <a:round/>
+                      <a:headEnd type="none" w="med" len="med"/>
+                      <a:tailEnd type="none" w="med" len="med"/>
+                    </a:lnT>
+                    <a:lnB w="6350" cap="flat" cmpd="sng" algn="ctr">
+                      <a:solidFill>
+                        <a:srgbClr val="DCD6C9"/>
+                      </a:solidFill>
+                      <a:prstDash val="solid"/>
+                      <a:round/>
+                      <a:headEnd type="none" w="med" len="med"/>
+                      <a:tailEnd type="none" w="med" len="med"/>
+                    </a:lnB>
+                    <a:solidFill>
+                      <a:srgbClr val="FFFFFF"/>
+                    </a:solidFill>
+                  </a:tcPr>
+                </a:tc>
+                <a:tc>
+                  <a:txBody>
+                    <a:bodyPr/>
+                    <a:lstStyle/>
+                    <a:p>
+                      <a:pPr indent="0" marL="0">
+                        <a:buNone/>
+                      </a:pPr>
+                      <a:r>
+                        <a:rPr lang="en-US" sz="1100" dirty="0">
+                          <a:solidFill>
+                            <a:srgbClr val="1B2426"/>
+                          </a:solidFill>
+                          <a:latin typeface="맑은 고딕" pitchFamily="34" charset="0"/>
+                          <a:ea typeface="맑은 고딕" pitchFamily="34" charset="-122"/>
+                          <a:cs typeface="맑은 고딕" pitchFamily="34" charset="-120"/>
+                        </a:rPr>
+                        <a:t>Bachelor of ○○ Engineering</a:t>
+                      </a:r>
+                      <a:endParaRPr lang="en-US" sz="1100" dirty="0">
+                        <a:latin typeface="맑은 고딕" charset="0"/>
+                        <a:ea typeface="맑은 고딕" charset="0"/>
+                        <a:cs typeface="맑은 고딕" charset="0"/>
+                      </a:endParaRPr>
+                    </a:p>
+                    <a:p>
+                      <a:pPr indent="0" marL="0">
+                        <a:buNone/>
+                      </a:pPr>
+                      <a:r>
+                        <a:rPr lang="en-US" sz="1100" dirty="0">
+                          <a:solidFill>
+                            <a:srgbClr val="1B2426"/>
+                          </a:solidFill>
+                          <a:latin typeface="맑은 고딕" pitchFamily="34" charset="0"/>
+                          <a:ea typeface="맑은 고딕" pitchFamily="34" charset="-122"/>
+                          <a:cs typeface="맑은 고딕" pitchFamily="34" charset="-120"/>
+                        </a:rPr>
+                        <a:t>with Honours</a:t>
+                      </a:r>
+                      <a:endParaRPr lang="en-US" sz="1100" dirty="0">
+                        <a:latin typeface="맑은 고딕" charset="0"/>
+                        <a:ea typeface="맑은 고딕" charset="0"/>
+                        <a:cs typeface="맑은 고딕" charset="0"/>
+                      </a:endParaRPr>
+                    </a:p>
+                  </a:txBody>
+                  <a:tcPr marL="88900" marR="88900" marT="50800" marB="50800" anchor="ctr">
+                    <a:lnL w="6350" cap="flat" cmpd="sng" algn="ctr">
+                      <a:solidFill>
+                        <a:srgbClr val="DCD6C9"/>
+                      </a:solidFill>
+                      <a:prstDash val="solid"/>
+                      <a:round/>
+                      <a:headEnd type="none" w="med" len="med"/>
+                      <a:tailEnd type="none" w="med" len="med"/>
+                    </a:lnL>
+                    <a:lnR w="6350" cap="flat" cmpd="sng" algn="ctr">
+                      <a:solidFill>
+                        <a:srgbClr val="DCD6C9"/>
+                      </a:solidFill>
+                      <a:prstDash val="solid"/>
+                      <a:round/>
+                      <a:headEnd type="none" w="med" len="med"/>
+                      <a:tailEnd type="none" w="med" len="med"/>
+                    </a:lnR>
+                    <a:lnT w="6350" cap="flat" cmpd="sng" algn="ctr">
+                      <a:solidFill>
+                        <a:srgbClr val="DCD6C9"/>
+                      </a:solidFill>
+                      <a:prstDash val="solid"/>
+                      <a:round/>
+                      <a:headEnd type="none" w="med" len="med"/>
+                      <a:tailEnd type="none" w="med" len="med"/>
+                    </a:lnT>
+                    <a:lnB w="6350" cap="flat" cmpd="sng" algn="ctr">
+                      <a:solidFill>
+                        <a:srgbClr val="DCD6C9"/>
+                      </a:solidFill>
+                      <a:prstDash val="solid"/>
+                      <a:round/>
+                      <a:headEnd type="none" w="med" len="med"/>
+                      <a:tailEnd type="none" w="med" len="med"/>
+                    </a:lnB>
+                    <a:solidFill>
+                      <a:srgbClr val="FFFFFF"/>
+                    </a:solidFill>
+                  </a:tcPr>
+                </a:tc>
+                <a:tc>
+                  <a:txBody>
+                    <a:bodyPr/>
+                    <a:lstStyle/>
+                    <a:p>
+                      <a:pPr indent="0" marL="0">
+                        <a:buNone/>
+                      </a:pPr>
+                      <a:r>
+                        <a:rPr lang="en-US" sz="1100" dirty="0">
+                          <a:solidFill>
+                            <a:srgbClr val="1B2426"/>
+                          </a:solidFill>
+                          <a:latin typeface="맑은 고딕" pitchFamily="34" charset="0"/>
+                          <a:ea typeface="맑은 고딕" pitchFamily="34" charset="-122"/>
+                          <a:cs typeface="맑은 고딕" pitchFamily="34" charset="-120"/>
+                        </a:rPr>
+                        <a:t>말레이시아 공학인증위원회(EAC/BEM) 인정 학위입니다. 워싱턴 어코드 가입국이라 호주·영국·캐나다·미국에서 재인증 없이 전문기술사 등록이 가능합니다.</a:t>
+                      </a:r>
+                      <a:endParaRPr lang="en-US" sz="1100" dirty="0">
+                        <a:latin typeface="맑은 고딕" charset="0"/>
+                        <a:ea typeface="맑은 고딕" charset="0"/>
+                        <a:cs typeface="맑은 고딕" charset="0"/>
+                      </a:endParaRPr>
+                    </a:p>
+                  </a:txBody>
+                  <a:tcPr marL="88900" marR="88900" marT="50800" marB="50800" anchor="ctr">
+                    <a:lnL w="6350" cap="flat" cmpd="sng" algn="ctr">
+                      <a:solidFill>
+                        <a:srgbClr val="DCD6C9"/>
+                      </a:solidFill>
+                      <a:prstDash val="solid"/>
+                      <a:round/>
+                      <a:headEnd type="none" w="med" len="med"/>
+                      <a:tailEnd type="none" w="med" len="med"/>
+                    </a:lnL>
+                    <a:lnR w="6350" cap="flat" cmpd="sng" algn="ctr">
+                      <a:solidFill>
+                        <a:srgbClr val="DCD6C9"/>
+                      </a:solidFill>
+                      <a:prstDash val="solid"/>
+                      <a:round/>
+                      <a:headEnd type="none" w="med" len="med"/>
+                      <a:tailEnd type="none" w="med" len="med"/>
+                    </a:lnR>
+                    <a:lnT w="6350" cap="flat" cmpd="sng" algn="ctr">
+                      <a:solidFill>
+                        <a:srgbClr val="DCD6C9"/>
+                      </a:solidFill>
+                      <a:prstDash val="solid"/>
+                      <a:round/>
+                      <a:headEnd type="none" w="med" len="med"/>
+                      <a:tailEnd type="none" w="med" len="med"/>
+                    </a:lnT>
+                    <a:lnB w="6350" cap="flat" cmpd="sng" algn="ctr">
+                      <a:solidFill>
+                        <a:srgbClr val="DCD6C9"/>
+                      </a:solidFill>
+                      <a:prstDash val="solid"/>
+                      <a:round/>
+                      <a:headEnd type="none" w="med" len="med"/>
+                      <a:tailEnd type="none" w="med" len="med"/>
+                    </a:lnB>
+                    <a:solidFill>
+                      <a:srgbClr val="FFFFFF"/>
+                    </a:solidFill>
+                  </a:tcPr>
+                </a:tc>
+              </a:tr>
+              <a:tr h="621792">
+                <a:tc>
+                  <a:txBody>
+                    <a:bodyPr/>
+                    <a:lstStyle/>
+                    <a:p>
+                      <a:pPr indent="0" marL="0">
+                        <a:buNone/>
+                      </a:pPr>
+                      <a:r>
+                        <a:rPr lang="en-US" sz="1100" dirty="0">
+                          <a:solidFill>
+                            <a:srgbClr val="1B2426"/>
+                          </a:solidFill>
+                          <a:latin typeface="맑은 고딕" pitchFamily="34" charset="0"/>
+                          <a:ea typeface="맑은 고딕" pitchFamily="34" charset="-122"/>
+                          <a:cs typeface="맑은 고딕" pitchFamily="34" charset="-120"/>
+                        </a:rPr>
+                        <a:t>선웨이</a:t>
+                      </a:r>
+                      <a:endParaRPr lang="en-US" sz="1100" dirty="0">
+                        <a:latin typeface="맑은 고딕" charset="0"/>
+                        <a:ea typeface="맑은 고딕" charset="0"/>
+                        <a:cs typeface="맑은 고딕" charset="0"/>
+                      </a:endParaRPr>
+                    </a:p>
+                    <a:p>
+                      <a:pPr indent="0" marL="0">
+                        <a:buNone/>
+                      </a:pPr>
+                      <a:r>
+                        <a:rPr lang="en-US" sz="1100" dirty="0">
+                          <a:solidFill>
+                            <a:srgbClr val="1B2426"/>
+                          </a:solidFill>
+                          <a:latin typeface="맑은 고딕" pitchFamily="34" charset="0"/>
+                          <a:ea typeface="맑은 고딕" pitchFamily="34" charset="-122"/>
+                          <a:cs typeface="맑은 고딕" pitchFamily="34" charset="-120"/>
+                        </a:rPr>
+                        <a:t>(1편)</a:t>
+                      </a:r>
+                      <a:endParaRPr lang="en-US" sz="1100" dirty="0">
+                        <a:latin typeface="맑은 고딕" charset="0"/>
+                        <a:ea typeface="맑은 고딕" charset="0"/>
+                        <a:cs typeface="맑은 고딕" charset="0"/>
+                      </a:endParaRPr>
+                    </a:p>
+                  </a:txBody>
+                  <a:tcPr marL="88900" marR="88900" marT="50800" marB="50800" anchor="ctr">
+                    <a:lnL w="6350" cap="flat" cmpd="sng" algn="ctr">
+                      <a:solidFill>
+                        <a:srgbClr val="DCD6C9"/>
+                      </a:solidFill>
+                      <a:prstDash val="solid"/>
+                      <a:round/>
+                      <a:headEnd type="none" w="med" len="med"/>
+                      <a:tailEnd type="none" w="med" len="med"/>
+                    </a:lnL>
+                    <a:lnR w="6350" cap="flat" cmpd="sng" algn="ctr">
+                      <a:solidFill>
+                        <a:srgbClr val="DCD6C9"/>
+                      </a:solidFill>
+                      <a:prstDash val="solid"/>
+                      <a:round/>
+                      <a:headEnd type="none" w="med" len="med"/>
+                      <a:tailEnd type="none" w="med" len="med"/>
+                    </a:lnR>
+                    <a:lnT w="6350" cap="flat" cmpd="sng" algn="ctr">
+                      <a:solidFill>
+                        <a:srgbClr val="DCD6C9"/>
+                      </a:solidFill>
+                      <a:prstDash val="solid"/>
+                      <a:round/>
+                      <a:headEnd type="none" w="med" len="med"/>
+                      <a:tailEnd type="none" w="med" len="med"/>
+                    </a:lnT>
+                    <a:lnB w="6350" cap="flat" cmpd="sng" algn="ctr">
+                      <a:solidFill>
+                        <a:srgbClr val="DCD6C9"/>
+                      </a:solidFill>
+                      <a:prstDash val="solid"/>
+                      <a:round/>
+                      <a:headEnd type="none" w="med" len="med"/>
+                      <a:tailEnd type="none" w="med" len="med"/>
+                    </a:lnB>
+                    <a:solidFill>
+                      <a:srgbClr val="F1EDE4"/>
+                    </a:solidFill>
+                  </a:tcPr>
+                </a:tc>
+                <a:tc>
+                  <a:txBody>
+                    <a:bodyPr/>
+                    <a:lstStyle/>
+                    <a:p>
+                      <a:pPr indent="0" marL="0">
+                        <a:buNone/>
+                      </a:pPr>
+                      <a:r>
+                        <a:rPr lang="en-US" sz="1100" dirty="0">
+                          <a:solidFill>
+                            <a:srgbClr val="1B2426"/>
+                          </a:solidFill>
+                          <a:latin typeface="맑은 고딕" pitchFamily="34" charset="0"/>
+                          <a:ea typeface="맑은 고딕" pitchFamily="34" charset="-122"/>
+                          <a:cs typeface="맑은 고딕" pitchFamily="34" charset="-120"/>
+                        </a:rPr>
+                        <a:t>4년</a:t>
+                      </a:r>
+                      <a:endParaRPr lang="en-US" sz="1100" dirty="0">
+                        <a:latin typeface="맑은 고딕" charset="0"/>
+                        <a:ea typeface="맑은 고딕" charset="0"/>
+                        <a:cs typeface="맑은 고딕" charset="0"/>
+                      </a:endParaRPr>
+                    </a:p>
+                  </a:txBody>
+                  <a:tcPr marL="88900" marR="88900" marT="50800" marB="50800" anchor="ctr">
+                    <a:lnL w="6350" cap="flat" cmpd="sng" algn="ctr">
+                      <a:solidFill>
+                        <a:srgbClr val="DCD6C9"/>
+                      </a:solidFill>
+                      <a:prstDash val="solid"/>
+                      <a:round/>
+                      <a:headEnd type="none" w="med" len="med"/>
+                      <a:tailEnd type="none" w="med" len="med"/>
+                    </a:lnL>
+                    <a:lnR w="6350" cap="flat" cmpd="sng" algn="ctr">
+                      <a:solidFill>
+                        <a:srgbClr val="DCD6C9"/>
+                      </a:solidFill>
+                      <a:prstDash val="solid"/>
+                      <a:round/>
+                      <a:headEnd type="none" w="med" len="med"/>
+                      <a:tailEnd type="none" w="med" len="med"/>
+                    </a:lnR>
+                    <a:lnT w="6350" cap="flat" cmpd="sng" algn="ctr">
+                      <a:solidFill>
+                        <a:srgbClr val="DCD6C9"/>
+                      </a:solidFill>
+                      <a:prstDash val="solid"/>
+                      <a:round/>
+                      <a:headEnd type="none" w="med" len="med"/>
+                      <a:tailEnd type="none" w="med" len="med"/>
+                    </a:lnT>
+                    <a:lnB w="6350" cap="flat" cmpd="sng" algn="ctr">
+                      <a:solidFill>
+                        <a:srgbClr val="DCD6C9"/>
+                      </a:solidFill>
+                      <a:prstDash val="solid"/>
+                      <a:round/>
+                      <a:headEnd type="none" w="med" len="med"/>
+                      <a:tailEnd type="none" w="med" len="med"/>
+                    </a:lnB>
+                    <a:solidFill>
+                      <a:srgbClr val="F1EDE4"/>
+                    </a:solidFill>
+                  </a:tcPr>
+                </a:tc>
+                <a:tc>
+                  <a:txBody>
+                    <a:bodyPr/>
+                    <a:lstStyle/>
+                    <a:p>
+                      <a:pPr indent="0" marL="0">
+                        <a:buNone/>
+                      </a:pPr>
+                      <a:r>
+                        <a:rPr lang="en-US" sz="1100" dirty="0">
+                          <a:solidFill>
+                            <a:srgbClr val="1B2426"/>
+                          </a:solidFill>
+                          <a:latin typeface="맑은 고딕" pitchFamily="34" charset="0"/>
+                          <a:ea typeface="맑은 고딕" pitchFamily="34" charset="-122"/>
+                          <a:cs typeface="맑은 고딕" pitchFamily="34" charset="-120"/>
+                        </a:rPr>
+                        <a:t>BEng (Hons)</a:t>
+                      </a:r>
+                      <a:endParaRPr lang="en-US" sz="1100" dirty="0">
+                        <a:latin typeface="맑은 고딕" charset="0"/>
+                        <a:ea typeface="맑은 고딕" charset="0"/>
+                        <a:cs typeface="맑은 고딕" charset="0"/>
+                      </a:endParaRPr>
+                    </a:p>
+                    <a:p>
+                      <a:pPr indent="0" marL="0">
+                        <a:buNone/>
+                      </a:pPr>
+                      <a:r>
+                        <a:rPr lang="en-US" sz="1100" dirty="0">
+                          <a:solidFill>
+                            <a:srgbClr val="1B2426"/>
+                          </a:solidFill>
+                          <a:latin typeface="맑은 고딕" pitchFamily="34" charset="0"/>
+                          <a:ea typeface="맑은 고딕" pitchFamily="34" charset="-122"/>
+                          <a:cs typeface="맑은 고딕" pitchFamily="34" charset="-120"/>
+                        </a:rPr>
+                        <a:t>+ 랭커스터 MEng (Hons)</a:t>
+                      </a:r>
+                      <a:endParaRPr lang="en-US" sz="1100" dirty="0">
+                        <a:latin typeface="맑은 고딕" charset="0"/>
+                        <a:ea typeface="맑은 고딕" charset="0"/>
+                        <a:cs typeface="맑은 고딕" charset="0"/>
+                      </a:endParaRPr>
+                    </a:p>
+                  </a:txBody>
+                  <a:tcPr marL="88900" marR="88900" marT="50800" marB="50800" anchor="ctr">
+                    <a:lnL w="6350" cap="flat" cmpd="sng" algn="ctr">
+                      <a:solidFill>
+                        <a:srgbClr val="DCD6C9"/>
+                      </a:solidFill>
+                      <a:prstDash val="solid"/>
+                      <a:round/>
+                      <a:headEnd type="none" w="med" len="med"/>
+                      <a:tailEnd type="none" w="med" len="med"/>
+                    </a:lnL>
+                    <a:lnR w="6350" cap="flat" cmpd="sng" algn="ctr">
+                      <a:solidFill>
+                        <a:srgbClr val="DCD6C9"/>
+                      </a:solidFill>
+                      <a:prstDash val="solid"/>
+                      <a:round/>
+                      <a:headEnd type="none" w="med" len="med"/>
+                      <a:tailEnd type="none" w="med" len="med"/>
+                    </a:lnR>
+                    <a:lnT w="6350" cap="flat" cmpd="sng" algn="ctr">
+                      <a:solidFill>
+                        <a:srgbClr val="DCD6C9"/>
+                      </a:solidFill>
+                      <a:prstDash val="solid"/>
+                      <a:round/>
+                      <a:headEnd type="none" w="med" len="med"/>
+                      <a:tailEnd type="none" w="med" len="med"/>
+                    </a:lnT>
+                    <a:lnB w="6350" cap="flat" cmpd="sng" algn="ctr">
+                      <a:solidFill>
+                        <a:srgbClr val="DCD6C9"/>
+                      </a:solidFill>
+                      <a:prstDash val="solid"/>
+                      <a:round/>
+                      <a:headEnd type="none" w="med" len="med"/>
+                      <a:tailEnd type="none" w="med" len="med"/>
+                    </a:lnB>
+                    <a:solidFill>
+                      <a:srgbClr val="F1EDE4"/>
+                    </a:solidFill>
+                  </a:tcPr>
+                </a:tc>
+                <a:tc>
+                  <a:txBody>
+                    <a:bodyPr/>
+                    <a:lstStyle/>
+                    <a:p>
+                      <a:pPr indent="0" marL="0">
+                        <a:buNone/>
+                      </a:pPr>
+                      <a:r>
+                        <a:rPr lang="en-US" sz="1100" dirty="0">
+                          <a:solidFill>
+                            <a:srgbClr val="1B2426"/>
+                          </a:solidFill>
+                          <a:latin typeface="맑은 고딕" pitchFamily="34" charset="0"/>
+                          <a:ea typeface="맑은 고딕" pitchFamily="34" charset="-122"/>
+                          <a:cs typeface="맑은 고딕" pitchFamily="34" charset="-120"/>
+                        </a:rPr>
+                        <a:t>선웨이 BEng 학위와 함께 영국 랭커스터대의 MEng (Hons) 학위가 복수로 수여됩니다. 네 학교 중 유일하게 학위증 두 장이 나옵니다.</a:t>
+                      </a:r>
+                      <a:endParaRPr lang="en-US" sz="1100" dirty="0">
+                        <a:latin typeface="맑은 고딕" charset="0"/>
+                        <a:ea typeface="맑은 고딕" charset="0"/>
+                        <a:cs typeface="맑은 고딕" charset="0"/>
+                      </a:endParaRPr>
+                    </a:p>
+                  </a:txBody>
+                  <a:tcPr marL="88900" marR="88900" marT="50800" marB="50800" anchor="ctr">
+                    <a:lnL w="6350" cap="flat" cmpd="sng" algn="ctr">
+                      <a:solidFill>
+                        <a:srgbClr val="DCD6C9"/>
+                      </a:solidFill>
+                      <a:prstDash val="solid"/>
+                      <a:round/>
+                      <a:headEnd type="none" w="med" len="med"/>
+                      <a:tailEnd type="none" w="med" len="med"/>
+                    </a:lnL>
+                    <a:lnR w="6350" cap="flat" cmpd="sng" algn="ctr">
+                      <a:solidFill>
+                        <a:srgbClr val="DCD6C9"/>
+                      </a:solidFill>
+                      <a:prstDash val="solid"/>
+                      <a:round/>
+                      <a:headEnd type="none" w="med" len="med"/>
+                      <a:tailEnd type="none" w="med" len="med"/>
+                    </a:lnR>
+                    <a:lnT w="6350" cap="flat" cmpd="sng" algn="ctr">
+                      <a:solidFill>
+                        <a:srgbClr val="DCD6C9"/>
+                      </a:solidFill>
+                      <a:prstDash val="solid"/>
+                      <a:round/>
+                      <a:headEnd type="none" w="med" len="med"/>
+                      <a:tailEnd type="none" w="med" len="med"/>
+                    </a:lnT>
+                    <a:lnB w="6350" cap="flat" cmpd="sng" algn="ctr">
+                      <a:solidFill>
+                        <a:srgbClr val="DCD6C9"/>
+                      </a:solidFill>
+                      <a:prstDash val="solid"/>
+                      <a:round/>
+                      <a:headEnd type="none" w="med" len="med"/>
+                      <a:tailEnd type="none" w="med" len="med"/>
+                    </a:lnB>
+                    <a:solidFill>
+                      <a:srgbClr val="F1EDE4"/>
+                    </a:solidFill>
+                  </a:tcPr>
+                </a:tc>
+              </a:tr>
+            </a:tbl>
+          </a:graphicData>
+        </a:graphic>
+      </p:graphicFrame>
+      <p:sp>
+        <p:nvSpPr>
+          <p:cNvPr id="8" name="Shape 5"/>
+          <p:cNvSpPr/>
+          <p:nvPr/>
+        </p:nvSpPr>
+        <p:spPr>
+          <a:xfrm>
+            <a:off x="640080" y="5047488"/>
+            <a:ext cx="5358384" cy="786384"/>
+          </a:xfrm>
+          <a:prstGeom prst="roundRect">
+            <a:avLst>
+              <a:gd name="adj" fmla="val 9302"/>
+            </a:avLst>
+          </a:prstGeom>
+          <a:solidFill>
+            <a:srgbClr val="F7EBE6"/>
+          </a:solidFill>
+          <a:ln/>
+        </p:spPr>
+      </p:sp>
+      <p:sp>
+        <p:nvSpPr>
+          <p:cNvPr id="9" name="Text 6"/>
+          <p:cNvSpPr txBox="1"/>
+          <p:nvPr/>
+        </p:nvSpPr>
+        <p:spPr>
+          <a:xfrm>
+            <a:off x="914400" y="5138928"/>
+            <a:ext cx="4809744" cy="237744"/>
+          </a:xfrm>
+          <a:prstGeom prst="rect">
+            <a:avLst/>
+          </a:prstGeom>
+          <a:noFill/>
+          <a:ln/>
+        </p:spPr>
+        <p:txBody>
+          <a:bodyPr wrap="square" lIns="0" tIns="0" rIns="0" bIns="0" rtlCol="0" anchor="t"/>
+          <a:lstStyle/>
+          <a:p>
+            <a:pPr algn="l" indent="0" marL="0">
+              <a:lnSpc>
+                <a:spcPct val="122000"/>
+              </a:lnSpc>
+              <a:buNone/>
+            </a:pPr>
+            <a:r>
+              <a:rPr lang="en-US" sz="1250" b="1" dirty="0">
+                <a:solidFill>
+                  <a:srgbClr val="A8412C"/>
+                </a:solidFill>
+                <a:latin typeface="맑은 고딕" pitchFamily="34" charset="0"/>
+                <a:ea typeface="맑은 고딕" pitchFamily="34" charset="-122"/>
+                <a:cs typeface="맑은 고딕" pitchFamily="34" charset="-120"/>
+              </a:rPr>
+              <a:t>AQF 8등급은 석사가 아닙니다</a:t>
+            </a:r>
+            <a:endParaRPr lang="en-US" sz="1250" dirty="0"/>
+          </a:p>
+        </p:txBody>
+      </p:sp>
+      <p:sp>
+        <p:nvSpPr>
+          <p:cNvPr id="10" name="Text 7"/>
+          <p:cNvSpPr txBox="1"/>
+          <p:nvPr/>
+        </p:nvSpPr>
+        <p:spPr>
+          <a:xfrm>
+            <a:off x="914400" y="5394960"/>
+            <a:ext cx="4809744" cy="402336"/>
+          </a:xfrm>
+          <a:prstGeom prst="rect">
+            <a:avLst/>
+          </a:prstGeom>
+          <a:noFill/>
+          <a:ln/>
+        </p:spPr>
+        <p:txBody>
+          <a:bodyPr wrap="square" lIns="0" tIns="0" rIns="0" bIns="0" rtlCol="0" anchor="t"/>
+          <a:lstStyle/>
+          <a:p>
+            <a:pPr algn="l" indent="0" marL="0">
+              <a:lnSpc>
+                <a:spcPct val="135000"/>
+              </a:lnSpc>
+              <a:buNone/>
+            </a:pPr>
+            <a:r>
+              <a:rPr lang="en-US" sz="1100" dirty="0">
+                <a:solidFill>
+                  <a:srgbClr val="1B2426"/>
+                </a:solidFill>
+                <a:latin typeface="맑은 고딕" pitchFamily="34" charset="0"/>
+                <a:ea typeface="맑은 고딕" pitchFamily="34" charset="-122"/>
+                <a:cs typeface="맑은 고딕" pitchFamily="34" charset="-120"/>
+              </a:rPr>
+              <a:t>호주 자격체계에서 학사 우등(Honours)은 8등급, 석사는 9등급, 박사는 10등급입니다. "석사에 버금간다"는 안내는 정확하지 않습니다.</a:t>
+            </a:r>
+            <a:endParaRPr lang="en-US" sz="1100" dirty="0"/>
+          </a:p>
+        </p:txBody>
+      </p:sp>
+      <p:sp>
+        <p:nvSpPr>
+          <p:cNvPr id="11" name="Shape 8"/>
+          <p:cNvSpPr/>
+          <p:nvPr/>
+        </p:nvSpPr>
+        <p:spPr>
+          <a:xfrm>
+            <a:off x="6190488" y="5047488"/>
+            <a:ext cx="5358384" cy="786384"/>
+          </a:xfrm>
+          <a:prstGeom prst="roundRect">
+            <a:avLst>
+              <a:gd name="adj" fmla="val 9302"/>
+            </a:avLst>
+          </a:prstGeom>
+          <a:solidFill>
+            <a:srgbClr val="F5EEDC"/>
+          </a:solidFill>
+          <a:ln/>
+        </p:spPr>
+      </p:sp>
+      <p:sp>
+        <p:nvSpPr>
+          <p:cNvPr id="12" name="Text 9"/>
+          <p:cNvSpPr txBox="1"/>
+          <p:nvPr/>
+        </p:nvSpPr>
+        <p:spPr>
+          <a:xfrm>
+            <a:off x="6464808" y="5138928"/>
+            <a:ext cx="4809744" cy="237744"/>
+          </a:xfrm>
+          <a:prstGeom prst="rect">
+            <a:avLst/>
+          </a:prstGeom>
+          <a:noFill/>
+          <a:ln/>
+        </p:spPr>
+        <p:txBody>
+          <a:bodyPr wrap="square" lIns="0" tIns="0" rIns="0" bIns="0" rtlCol="0" anchor="t"/>
+          <a:lstStyle/>
+          <a:p>
+            <a:pPr algn="l" indent="0" marL="0">
+              <a:lnSpc>
+                <a:spcPct val="122000"/>
+              </a:lnSpc>
+              <a:buNone/>
+            </a:pPr>
+            <a:r>
+              <a:rPr lang="en-US" sz="1250" b="1" dirty="0">
+                <a:solidFill>
+                  <a:srgbClr val="C08A2E"/>
+                </a:solidFill>
+                <a:latin typeface="맑은 고딕" pitchFamily="34" charset="0"/>
+                <a:ea typeface="맑은 고딕" pitchFamily="34" charset="-122"/>
+                <a:cs typeface="맑은 고딕" pitchFamily="34" charset="-120"/>
+              </a:rPr>
+              <a:t>학위 이름보다 인증(Accreditation)을 보십시오</a:t>
+            </a:r>
+            <a:endParaRPr lang="en-US" sz="1250" dirty="0"/>
+          </a:p>
+        </p:txBody>
+      </p:sp>
+      <p:sp>
+        <p:nvSpPr>
+          <p:cNvPr id="13" name="Text 10"/>
+          <p:cNvSpPr txBox="1"/>
+          <p:nvPr/>
+        </p:nvSpPr>
+        <p:spPr>
+          <a:xfrm>
+            <a:off x="6464808" y="5394960"/>
+            <a:ext cx="4809744" cy="402336"/>
+          </a:xfrm>
+          <a:prstGeom prst="rect">
+            <a:avLst/>
+          </a:prstGeom>
+          <a:noFill/>
+          <a:ln/>
+        </p:spPr>
+        <p:txBody>
+          <a:bodyPr wrap="square" lIns="0" tIns="0" rIns="0" bIns="0" rtlCol="0" anchor="t"/>
+          <a:lstStyle/>
+          <a:p>
+            <a:pPr algn="l" indent="0" marL="0">
+              <a:lnSpc>
+                <a:spcPct val="135000"/>
+              </a:lnSpc>
+              <a:buNone/>
+            </a:pPr>
+            <a:r>
+              <a:rPr lang="en-US" sz="1100" dirty="0">
+                <a:solidFill>
+                  <a:srgbClr val="1B2426"/>
+                </a:solidFill>
+                <a:latin typeface="맑은 고딕" pitchFamily="34" charset="0"/>
+                <a:ea typeface="맑은 고딕" pitchFamily="34" charset="-122"/>
+                <a:cs typeface="맑은 고딕" pitchFamily="34" charset="-120"/>
+              </a:rPr>
+              <a:t>엔지니어 등록과 해외 취업을 가르는 것은 학위 명칭이 아니라 EAC/BEM · IET · IChemE 인증과 워싱턴 어코드 가입 여부입니다.</a:t>
+            </a:r>
+            <a:endParaRPr lang="en-US" sz="1100" dirty="0"/>
+          </a:p>
+        </p:txBody>
+      </p:sp>
+      <p:sp>
+        <p:nvSpPr>
+          <p:cNvPr id="14" name="Text 11"/>
+          <p:cNvSpPr txBox="1"/>
+          <p:nvPr/>
+        </p:nvSpPr>
+        <p:spPr>
+          <a:xfrm>
+            <a:off x="640080" y="6400800"/>
+            <a:ext cx="10911535" cy="310896"/>
+          </a:xfrm>
+          <a:prstGeom prst="rect">
+            <a:avLst/>
+          </a:prstGeom>
+          <a:noFill/>
+          <a:ln/>
+        </p:spPr>
+        <p:txBody>
+          <a:bodyPr wrap="square" lIns="0" tIns="0" rIns="0" bIns="0" rtlCol="0" anchor="t"/>
+          <a:lstStyle/>
+          <a:p>
+            <a:pPr algn="l" indent="0" marL="0">
+              <a:lnSpc>
+                <a:spcPct val="125000"/>
+              </a:lnSpc>
+              <a:buNone/>
+            </a:pPr>
+            <a:r>
+              <a:rPr lang="en-US" sz="900" dirty="0">
+                <a:solidFill>
+                  <a:srgbClr val="6E7C7A"/>
+                </a:solidFill>
+                <a:latin typeface="맑은 고딕" pitchFamily="34" charset="0"/>
+                <a:ea typeface="맑은 고딕" pitchFamily="34" charset="-122"/>
+                <a:cs typeface="맑은 고딕" pitchFamily="34" charset="-120"/>
+              </a:rPr>
+              <a:t>출처: Monash UG Prospectus 2027 p.8 (Bachelor of Engineering (Honours)) · UNM 브로셔 p.18 (MEng (Hons)) · 테일러스 School of Engineering · 선웨이 Faculty of Engineering and Technology · 호주 자격체계(AQF) 등급표</a:t>
+            </a:r>
+            <a:endParaRPr lang="en-US" sz="900" dirty="0"/>
+          </a:p>
+        </p:txBody>
+      </p:sp>
+    </p:spTree>
+  </p:cSld>
+  <p:clrMapOvr>
+    <a:masterClrMapping/>
+  </p:clrMapOvr>
+</p:sld>
+</file>
+
+<file path=ppt/slides/slide11.xml><?xml version="1.0" encoding="utf-8"?>
+<p:sld xmlns:a="http://schemas.openxmlformats.org/drawingml/2006/main" xmlns:r="http://schemas.openxmlformats.org/officeDocument/2006/relationships" xmlns:p="http://schemas.openxmlformats.org/presentationml/2006/main">
+  <p:cSld name="Slide 11">
+    <p:bg>
+      <p:bgPr>
+        <a:solidFill>
+          <a:srgbClr val="FFFFFF"/>
+        </a:solidFill>
+      </p:bgPr>
+    </p:bg>
+    <p:spTree>
+      <p:nvGrpSpPr>
+        <p:cNvPr id="1" name=""/>
+        <p:cNvGrpSpPr/>
+        <p:nvPr/>
+      </p:nvGrpSpPr>
+      <p:grpSpPr>
+        <a:xfrm>
+          <a:off x="0" y="0"/>
+          <a:ext cx="0" cy="0"/>
+          <a:chOff x="0" y="0"/>
+          <a:chExt cx="0" cy="0"/>
+        </a:xfrm>
+      </p:grpSpPr>
+      <p:sp>
+        <p:nvSpPr>
+          <p:cNvPr id="2" name="Shape 0"/>
+          <p:cNvSpPr/>
+          <p:nvPr/>
+        </p:nvSpPr>
+        <p:spPr>
+          <a:xfrm>
+            <a:off x="640080" y="475488"/>
+            <a:ext cx="566928" cy="566928"/>
+          </a:xfrm>
+          <a:prstGeom prst="roundRect">
+            <a:avLst>
+              <a:gd name="adj" fmla="val 9677"/>
+            </a:avLst>
+          </a:prstGeom>
+          <a:solidFill>
+            <a:srgbClr val="134744"/>
+          </a:solidFill>
+          <a:ln/>
+        </p:spPr>
+      </p:sp>
+      <p:sp>
+        <p:nvSpPr>
+          <p:cNvPr id="3" name="Text 1"/>
+          <p:cNvSpPr txBox="1"/>
+          <p:nvPr/>
+        </p:nvSpPr>
+        <p:spPr>
+          <a:xfrm>
+            <a:off x="640080" y="475488"/>
+            <a:ext cx="566928" cy="566928"/>
+          </a:xfrm>
+          <a:prstGeom prst="rect">
+            <a:avLst/>
+          </a:prstGeom>
+          <a:noFill/>
+          <a:ln/>
+        </p:spPr>
+        <p:txBody>
+          <a:bodyPr wrap="square" lIns="0" tIns="0" rIns="0" bIns="0" rtlCol="0" anchor="ctr"/>
+          <a:lstStyle/>
+          <a:p>
+            <a:pPr algn="ctr" indent="0" marL="0">
+              <a:lnSpc>
+                <a:spcPct val="122000"/>
+              </a:lnSpc>
+              <a:buNone/>
+            </a:pPr>
+            <a:r>
+              <a:rPr lang="en-US" sz="1700" b="1" dirty="0">
+                <a:solidFill>
+                  <a:srgbClr val="C08A2E"/>
+                </a:solidFill>
+                <a:latin typeface="맑은 고딕" pitchFamily="34" charset="0"/>
+                <a:ea typeface="맑은 고딕" pitchFamily="34" charset="-122"/>
+                <a:cs typeface="맑은 고딕" pitchFamily="34" charset="-120"/>
+              </a:rPr>
+              <a:t>10</a:t>
+            </a:r>
+            <a:endParaRPr lang="en-US" sz="1700" dirty="0"/>
+          </a:p>
+        </p:txBody>
+      </p:sp>
+      <p:sp>
+        <p:nvSpPr>
+          <p:cNvPr id="4" name="Text 2"/>
+          <p:cNvSpPr txBox="1"/>
+          <p:nvPr/>
+        </p:nvSpPr>
+        <p:spPr>
+          <a:xfrm>
+            <a:off x="1389888" y="457200"/>
+            <a:ext cx="10161727" cy="237744"/>
+          </a:xfrm>
+          <a:prstGeom prst="rect">
+            <a:avLst/>
+          </a:prstGeom>
+          <a:noFill/>
+          <a:ln/>
+        </p:spPr>
+        <p:txBody>
+          <a:bodyPr wrap="square" lIns="0" tIns="0" rIns="0" bIns="0" rtlCol="0" anchor="t"/>
+          <a:lstStyle/>
+          <a:p>
+            <a:pPr algn="l" indent="0" marL="0">
+              <a:lnSpc>
+                <a:spcPct val="122000"/>
+              </a:lnSpc>
+              <a:buNone/>
+            </a:pPr>
+            <a:r>
+              <a:rPr lang="en-US" sz="1100" b="1" spc="200" kern="0" dirty="0">
+                <a:solidFill>
+                  <a:srgbClr val="1F6B66"/>
+                </a:solidFill>
+                <a:latin typeface="맑은 고딕" pitchFamily="34" charset="0"/>
+                <a:ea typeface="맑은 고딕" pitchFamily="34" charset="-122"/>
+                <a:cs typeface="맑은 고딕" pitchFamily="34" charset="-120"/>
+              </a:rPr>
               <a:t>SIDE BY SIDE</a:t>
             </a:r>
             <a:endParaRPr lang="en-US" sz="1100" dirty="0"/>
@@ -2538,7 +4673,7 @@
       </p:sp>
       <p:graphicFrame>
         <p:nvGraphicFramePr>
-          <p:cNvPr id="11" name="Table 0"/>
+          <p:cNvPr id="12" name="Table 0"/>
           <p:cNvGraphicFramePr>
             <a:graphicFrameLocks noGrp="1"/>
           </p:cNvGraphicFramePr>
@@ -4677,9 +6812,9 @@
 </p:sld>
 </file>
 
-<file path=ppt/slides/slide11.xml><?xml version="1.0" encoding="utf-8"?>
+<file path=ppt/slides/slide12.xml><?xml version="1.0" encoding="utf-8"?>
 <p:sld xmlns:a="http://schemas.openxmlformats.org/drawingml/2006/main" xmlns:r="http://schemas.openxmlformats.org/officeDocument/2006/relationships" xmlns:p="http://schemas.openxmlformats.org/presentationml/2006/main">
-  <p:cSld name="Slide 11">
+  <p:cSld name="Slide 12">
     <p:bg>
       <p:bgPr>
         <a:solidFill>
@@ -4759,7 +6894,7 @@
                 <a:ea typeface="맑은 고딕" pitchFamily="34" charset="-122"/>
                 <a:cs typeface="맑은 고딕" pitchFamily="34" charset="-120"/>
               </a:rPr>
-              <a:t>10</a:t>
+              <a:t>11</a:t>
             </a:r>
             <a:endParaRPr lang="en-US" sz="1700" dirty="0"/>
           </a:p>
@@ -4893,7 +7028,7 @@
       </p:sp>
       <p:graphicFrame>
         <p:nvGraphicFramePr>
-          <p:cNvPr id="12" name="Table 0"/>
+          <p:cNvPr id="13" name="Table 0"/>
           <p:cNvGraphicFramePr>
             <a:graphicFrameLocks noGrp="1"/>
           </p:cNvGraphicFramePr>
@@ -9328,9 +11463,9 @@
 </p:sld>
 </file>
 
-<file path=ppt/slides/slide12.xml><?xml version="1.0" encoding="utf-8"?>
+<file path=ppt/slides/slide13.xml><?xml version="1.0" encoding="utf-8"?>
 <p:sld xmlns:a="http://schemas.openxmlformats.org/drawingml/2006/main" xmlns:r="http://schemas.openxmlformats.org/officeDocument/2006/relationships" xmlns:p="http://schemas.openxmlformats.org/presentationml/2006/main">
-  <p:cSld name="Slide 12">
+  <p:cSld name="Slide 13">
     <p:bg>
       <p:bgPr>
         <a:solidFill>
@@ -9410,7 +11545,7 @@
                 <a:ea typeface="맑은 고딕" pitchFamily="34" charset="-122"/>
                 <a:cs typeface="맑은 고딕" pitchFamily="34" charset="-120"/>
               </a:rPr>
-              <a:t>11</a:t>
+              <a:t>12</a:t>
             </a:r>
             <a:endParaRPr lang="en-US" sz="1700" dirty="0"/>
           </a:p>
